--- a/Zemi/2026-10-28-Di.pptx
+++ b/Zemi/2026-10-28-Di.pptx
@@ -9,19 +9,21 @@
   </p:notesMasterIdLst>
   <p:sldIdLst>
     <p:sldId id="280" r:id="rId3"/>
-    <p:sldId id="353" r:id="rId5"/>
-    <p:sldId id="369" r:id="rId6"/>
-    <p:sldId id="370" r:id="rId7"/>
-    <p:sldId id="371" r:id="rId8"/>
-    <p:sldId id="354" r:id="rId9"/>
-    <p:sldId id="355" r:id="rId10"/>
-    <p:sldId id="372" r:id="rId11"/>
-    <p:sldId id="373" r:id="rId12"/>
-    <p:sldId id="374" r:id="rId13"/>
-    <p:sldId id="376" r:id="rId14"/>
-    <p:sldId id="377" r:id="rId15"/>
-    <p:sldId id="378" r:id="rId16"/>
-    <p:sldId id="359" r:id="rId17"/>
+    <p:sldId id="379" r:id="rId5"/>
+    <p:sldId id="380" r:id="rId6"/>
+    <p:sldId id="353" r:id="rId7"/>
+    <p:sldId id="369" r:id="rId8"/>
+    <p:sldId id="370" r:id="rId9"/>
+    <p:sldId id="371" r:id="rId10"/>
+    <p:sldId id="354" r:id="rId11"/>
+    <p:sldId id="355" r:id="rId12"/>
+    <p:sldId id="372" r:id="rId13"/>
+    <p:sldId id="373" r:id="rId14"/>
+    <p:sldId id="374" r:id="rId15"/>
+    <p:sldId id="376" r:id="rId16"/>
+    <p:sldId id="377" r:id="rId17"/>
+    <p:sldId id="378" r:id="rId18"/>
+    <p:sldId id="359" r:id="rId19"/>
   </p:sldIdLst>
   <p:sldSz cx="9144000" cy="6858000" type="screen4x3"/>
   <p:notesSz cx="6858000" cy="9144000"/>
@@ -842,6 +844,134 @@
 </p:notes>
 </file>
 
+<file path=ppt/notesSlides/notesSlide15.xml><?xml version="1.0" encoding="utf-8"?>
+<p:notes xmlns:a="http://schemas.openxmlformats.org/drawingml/2006/main" xmlns:r="http://schemas.openxmlformats.org/officeDocument/2006/relationships" xmlns:p="http://schemas.openxmlformats.org/presentationml/2006/main">
+  <p:cSld>
+    <p:spTree>
+      <p:nvGrpSpPr>
+        <p:cNvPr id="1" name=""/>
+        <p:cNvGrpSpPr/>
+        <p:nvPr/>
+      </p:nvGrpSpPr>
+      <p:grpSpPr/>
+      <p:sp>
+        <p:nvSpPr>
+          <p:cNvPr id="2" name="Slide Image Placeholder 1"/>
+          <p:cNvSpPr>
+            <a:spLocks noGrp="1"/>
+          </p:cNvSpPr>
+          <p:nvPr>
+            <p:ph type="sldImg"/>
+          </p:nvPr>
+        </p:nvSpPr>
+        <p:spPr/>
+      </p:sp>
+      <p:sp>
+        <p:nvSpPr>
+          <p:cNvPr id="3" name="Notes Placeholder 2"/>
+          <p:cNvSpPr>
+            <a:spLocks noGrp="1"/>
+          </p:cNvSpPr>
+          <p:nvPr>
+            <p:ph type="body" idx="1"/>
+          </p:nvPr>
+        </p:nvSpPr>
+        <p:spPr/>
+        <p:txBody>
+          <a:bodyPr/>
+          <a:lstStyle/>
+          <a:p/>
+        </p:txBody>
+      </p:sp>
+      <p:sp>
+        <p:nvSpPr>
+          <p:cNvPr id="4" name="Slide Number Placeholder 3"/>
+          <p:cNvSpPr>
+            <a:spLocks noGrp="1"/>
+          </p:cNvSpPr>
+          <p:nvPr>
+            <p:ph type="sldNum" idx="5"/>
+          </p:nvPr>
+        </p:nvSpPr>
+        <p:spPr/>
+        <p:txBody>
+          <a:bodyPr/>
+          <a:lstStyle/>
+          <a:p/>
+        </p:txBody>
+      </p:sp>
+    </p:spTree>
+  </p:cSld>
+  <p:clrMapOvr>
+    <a:masterClrMapping/>
+  </p:clrMapOvr>
+</p:notes>
+</file>
+
+<file path=ppt/notesSlides/notesSlide16.xml><?xml version="1.0" encoding="utf-8"?>
+<p:notes xmlns:a="http://schemas.openxmlformats.org/drawingml/2006/main" xmlns:r="http://schemas.openxmlformats.org/officeDocument/2006/relationships" xmlns:p="http://schemas.openxmlformats.org/presentationml/2006/main">
+  <p:cSld>
+    <p:spTree>
+      <p:nvGrpSpPr>
+        <p:cNvPr id="1" name=""/>
+        <p:cNvGrpSpPr/>
+        <p:nvPr/>
+      </p:nvGrpSpPr>
+      <p:grpSpPr/>
+      <p:sp>
+        <p:nvSpPr>
+          <p:cNvPr id="2" name="Slide Image Placeholder 1"/>
+          <p:cNvSpPr>
+            <a:spLocks noGrp="1"/>
+          </p:cNvSpPr>
+          <p:nvPr>
+            <p:ph type="sldImg"/>
+          </p:nvPr>
+        </p:nvSpPr>
+        <p:spPr/>
+      </p:sp>
+      <p:sp>
+        <p:nvSpPr>
+          <p:cNvPr id="3" name="Notes Placeholder 2"/>
+          <p:cNvSpPr>
+            <a:spLocks noGrp="1"/>
+          </p:cNvSpPr>
+          <p:nvPr>
+            <p:ph type="body" idx="1"/>
+          </p:nvPr>
+        </p:nvSpPr>
+        <p:spPr/>
+        <p:txBody>
+          <a:bodyPr/>
+          <a:lstStyle/>
+          <a:p/>
+        </p:txBody>
+      </p:sp>
+      <p:sp>
+        <p:nvSpPr>
+          <p:cNvPr id="4" name="Slide Number Placeholder 3"/>
+          <p:cNvSpPr>
+            <a:spLocks noGrp="1"/>
+          </p:cNvSpPr>
+          <p:nvPr>
+            <p:ph type="sldNum" idx="5"/>
+          </p:nvPr>
+        </p:nvSpPr>
+        <p:spPr/>
+        <p:txBody>
+          <a:bodyPr/>
+          <a:lstStyle/>
+          <a:p/>
+        </p:txBody>
+      </p:sp>
+    </p:spTree>
+  </p:cSld>
+  <p:clrMapOvr>
+    <a:masterClrMapping/>
+  </p:clrMapOvr>
+</p:notes>
+</file>
+
 <file path=ppt/notesSlides/notesSlide2.xml><?xml version="1.0" encoding="utf-8"?>
 <p:notes xmlns:a="http://schemas.openxmlformats.org/drawingml/2006/main" xmlns:r="http://schemas.openxmlformats.org/officeDocument/2006/relationships" xmlns:p="http://schemas.openxmlformats.org/presentationml/2006/main">
   <p:cSld>
@@ -879,48 +1009,42 @@
           <a:bodyPr/>
           <a:p>
             <a:r>
-              <a:rPr lang="en-US" altLang="zh-CN"/>
-              <a:t>So in my research, objective is to Replace classification models to Regression Models.</a:t>
-            </a:r>
-            <a:br>
-              <a:rPr lang="en-US" altLang="zh-CN"/>
-            </a:br>
-            <a:r>
-              <a:rPr lang="en-US" altLang="zh-CN"/>
-              <a:t>From modular approach to end to end approach to reduce </a:t>
-            </a:r>
-            <a:r>
               <a:rPr lang="en-US" altLang="zh-CN">
                 <a:sym typeface="+mn-ea"/>
               </a:rPr>
-              <a:t>system complexity and loss of important information</a:t>
-            </a:r>
-            <a:endParaRPr lang="en-US" altLang="zh-CN"/>
-          </a:p>
-          <a:p>
-            <a:r>
-              <a:rPr lang="en-US" altLang="zh-CN"/>
-              <a:t>RQ is to verify that can the system </a:t>
-            </a:r>
-            <a:r>
-              <a:rPr lang="en-US" altLang="zh-CN">
-                <a:ea typeface="SimSun" panose="02010600030101010101" pitchFamily="2" charset="-122"/>
+              <a:t>Approximately 57.7 million people </a:t>
+            </a:r>
+            <a:r>
+              <a:rPr lang="en-US" altLang="ja-JP">
                 <a:sym typeface="+mn-ea"/>
               </a:rPr>
-              <a:t>build </a:t>
-            </a:r>
-            <a:r>
-              <a:rPr lang="en-US" altLang="zh-CN"/>
-              <a:t>on an end-to-end </a:t>
+              <a:t>lost an</a:t>
             </a:r>
             <a:r>
               <a:rPr lang="en-US" altLang="zh-CN">
-                <a:ea typeface="SimSun" panose="02010600030101010101" pitchFamily="2" charset="-122"/>
                 <a:sym typeface="+mn-ea"/>
               </a:rPr>
-              <a:t>approach combined with regression be successfully applied, </a:t>
+              <a:t> upper limb.</a:t>
             </a:r>
             <a:endParaRPr lang="en-US" altLang="zh-CN"/>
+          </a:p>
+          <a:p>
+            <a:r>
+              <a:rPr lang="en-US" altLang="zh-CN">
+                <a:sym typeface="+mn-ea"/>
+              </a:rPr>
+              <a:t>This significantly impacts their daily lives, so the prosthetic hand research aim to help them.</a:t>
+            </a:r>
+            <a:endParaRPr lang="en-US" altLang="zh-CN"/>
+          </a:p>
+          <a:p>
+            <a:r>
+              <a:rPr lang="en-US" altLang="ja-JP">
+                <a:sym typeface="+mn-ea"/>
+              </a:rPr>
+              <a:t>With computational power and algorithms continue to advance, the prosthetic hand are able to recognize an increasing number of movements</a:t>
+            </a:r>
+            <a:endParaRPr lang="zh-CN" altLang="en-US"/>
           </a:p>
         </p:txBody>
       </p:sp>
@@ -944,48 +1068,107 @@
       <p:grpSpPr/>
       <p:sp>
         <p:nvSpPr>
-          <p:cNvPr id="2" name="Slide Image Placeholder 1"/>
+          <p:cNvPr id="2" name="幻灯片图像占位符 1"/>
           <p:cNvSpPr>
             <a:spLocks noGrp="1"/>
           </p:cNvSpPr>
           <p:nvPr>
-            <p:ph type="sldImg"/>
+            <p:ph type="sldImg" idx="2"/>
           </p:nvPr>
         </p:nvSpPr>
         <p:spPr/>
       </p:sp>
       <p:sp>
         <p:nvSpPr>
-          <p:cNvPr id="3" name="Notes Placeholder 2"/>
+          <p:cNvPr id="3" name="文本占位符 2"/>
           <p:cNvSpPr>
             <a:spLocks noGrp="1"/>
           </p:cNvSpPr>
           <p:nvPr>
-            <p:ph type="body" idx="1"/>
+            <p:ph type="body" idx="3"/>
           </p:nvPr>
         </p:nvSpPr>
         <p:spPr/>
         <p:txBody>
           <a:bodyPr/>
-          <a:lstStyle/>
-          <a:p/>
-        </p:txBody>
-      </p:sp>
-      <p:sp>
-        <p:nvSpPr>
-          <p:cNvPr id="4" name="Slide Number Placeholder 3"/>
-          <p:cNvSpPr>
-            <a:spLocks noGrp="1"/>
-          </p:cNvSpPr>
-          <p:nvPr>
-            <p:ph type="sldNum" idx="5"/>
-          </p:nvPr>
-        </p:nvSpPr>
-        <p:spPr/>
-        <p:txBody>
-          <a:bodyPr/>
-          <a:lstStyle/>
-          <a:p/>
+          <a:p>
+            <a:r>
+              <a:rPr lang="en-US" altLang="zh-CN"/>
+              <a:t>1.</a:t>
+            </a:r>
+            <a:r>
+              <a:rPr lang="en-US" altLang="zh-CN">
+                <a:sym typeface="+mn-ea"/>
+              </a:rPr>
+              <a:t>V</a:t>
+            </a:r>
+            <a:r>
+              <a:rPr lang="en-US" altLang="en-US">
+                <a:sym typeface="+mn-ea"/>
+              </a:rPr>
+              <a:t>á</a:t>
+            </a:r>
+            <a:r>
+              <a:rPr lang="en-US" altLang="zh-CN">
+                <a:sym typeface="+mn-ea"/>
+              </a:rPr>
+              <a:t>sconez</a:t>
+            </a:r>
+            <a:r>
+              <a:rPr lang="en-US" altLang="zh-CN">
+                <a:latin typeface="+mj-lt"/>
+                <a:cs typeface="+mj-lt"/>
+                <a:sym typeface="+mn-ea"/>
+              </a:rPr>
+              <a:t> et al. proposed a system, that combine EMG with IMU, adopts a deep reinforcement learning model. Classifies 11 types of grasping movements. The results achieved 97% accuracy.</a:t>
+            </a:r>
+            <a:br>
+              <a:rPr lang="en-US" altLang="zh-CN">
+                <a:latin typeface="+mj-lt"/>
+                <a:cs typeface="+mj-lt"/>
+                <a:sym typeface="+mn-ea"/>
+              </a:rPr>
+            </a:br>
+            <a:r>
+              <a:rPr lang="en-US" altLang="zh-CN"/>
+              <a:t>2.Zandigohar et al.</a:t>
+            </a:r>
+            <a:br>
+              <a:rPr lang="zh-CN" altLang="en-US"/>
+            </a:br>
+            <a:r>
+              <a:rPr lang="en-US" altLang="zh-CN"/>
+              <a:t>..</a:t>
+            </a:r>
+            <a:br>
+              <a:rPr lang="en-US" altLang="zh-CN"/>
+            </a:br>
+            <a:r>
+              <a:rPr lang="en-US" altLang="zh-CN"/>
+              <a:t>This is </a:t>
+            </a:r>
+            <a:r>
+              <a:rPr lang="en-US" altLang="zh-CN">
+                <a:sym typeface="+mn-ea"/>
+              </a:rPr>
+              <a:t>currently</a:t>
+            </a:r>
+            <a:r>
+              <a:rPr lang="en-US" altLang="zh-CN"/>
+              <a:t> one reason for the high </a:t>
+            </a:r>
+            <a:r>
+              <a:rPr lang="en-US" altLang="zh-CN" dirty="0">
+                <a:sym typeface="+mn-ea"/>
+              </a:rPr>
+              <a:t>rejection</a:t>
+            </a:r>
+            <a:r>
+              <a:rPr lang="en-US" altLang="zh-CN"/>
+              <a:t> rate of prosthetic hand.</a:t>
+            </a:r>
+            <a:endParaRPr lang="en-US" altLang="zh-CN"/>
+          </a:p>
         </p:txBody>
       </p:sp>
     </p:spTree>
@@ -1008,48 +1191,74 @@
       <p:grpSpPr/>
       <p:sp>
         <p:nvSpPr>
-          <p:cNvPr id="2" name="Slide Image Placeholder 1"/>
+          <p:cNvPr id="2" name="幻灯片图像占位符 1"/>
           <p:cNvSpPr>
             <a:spLocks noGrp="1"/>
           </p:cNvSpPr>
           <p:nvPr>
-            <p:ph type="sldImg"/>
+            <p:ph type="sldImg" idx="2"/>
           </p:nvPr>
         </p:nvSpPr>
         <p:spPr/>
       </p:sp>
       <p:sp>
         <p:nvSpPr>
-          <p:cNvPr id="3" name="Notes Placeholder 2"/>
+          <p:cNvPr id="3" name="文本占位符 2"/>
           <p:cNvSpPr>
             <a:spLocks noGrp="1"/>
           </p:cNvSpPr>
           <p:nvPr>
-            <p:ph type="body" idx="1"/>
+            <p:ph type="body" idx="3"/>
           </p:nvPr>
         </p:nvSpPr>
         <p:spPr/>
         <p:txBody>
           <a:bodyPr/>
-          <a:lstStyle/>
-          <a:p/>
-        </p:txBody>
-      </p:sp>
-      <p:sp>
-        <p:nvSpPr>
-          <p:cNvPr id="4" name="Slide Number Placeholder 3"/>
-          <p:cNvSpPr>
-            <a:spLocks noGrp="1"/>
-          </p:cNvSpPr>
-          <p:nvPr>
-            <p:ph type="sldNum" idx="5"/>
-          </p:nvPr>
-        </p:nvSpPr>
-        <p:spPr/>
-        <p:txBody>
-          <a:bodyPr/>
-          <a:lstStyle/>
-          <a:p/>
+          <a:p>
+            <a:r>
+              <a:rPr lang="en-US" altLang="zh-CN"/>
+              <a:t>So in my research, objective is to Replace classification models to Regression Models.</a:t>
+            </a:r>
+            <a:br>
+              <a:rPr lang="en-US" altLang="zh-CN"/>
+            </a:br>
+            <a:r>
+              <a:rPr lang="en-US" altLang="zh-CN"/>
+              <a:t>From modular approach to end to end approach to reduce </a:t>
+            </a:r>
+            <a:r>
+              <a:rPr lang="en-US" altLang="zh-CN">
+                <a:sym typeface="+mn-ea"/>
+              </a:rPr>
+              <a:t>system complexity and loss of important information</a:t>
+            </a:r>
+            <a:endParaRPr lang="en-US" altLang="zh-CN"/>
+          </a:p>
+          <a:p>
+            <a:r>
+              <a:rPr lang="en-US" altLang="zh-CN"/>
+              <a:t>RQ is to verify that can the system </a:t>
+            </a:r>
+            <a:r>
+              <a:rPr lang="en-US" altLang="zh-CN">
+                <a:ea typeface="宋体" panose="02010600030101010101" pitchFamily="2" charset="-122"/>
+                <a:sym typeface="+mn-ea"/>
+              </a:rPr>
+              <a:t>build </a:t>
+            </a:r>
+            <a:r>
+              <a:rPr lang="en-US" altLang="zh-CN"/>
+              <a:t>on an end-to-end </a:t>
+            </a:r>
+            <a:r>
+              <a:rPr lang="en-US" altLang="zh-CN">
+                <a:ea typeface="宋体" panose="02010600030101010101" pitchFamily="2" charset="-122"/>
+                <a:sym typeface="+mn-ea"/>
+              </a:rPr>
+              <a:t>approach combined with regression be successfully applied, </a:t>
+            </a:r>
+            <a:endParaRPr lang="en-US" altLang="zh-CN"/>
+          </a:p>
         </p:txBody>
       </p:sp>
     </p:spTree>
@@ -4570,9 +4779,9 @@
             <a:pPr algn="ctr"/>
             <a:r>
               <a:rPr lang="en-US" altLang="zh-CN" sz="3600"/>
-              <a:t>A Vision Regression Model for Prosthetic Hand Control</a:t>
-            </a:r>
-            <a:endParaRPr kumimoji="1" lang="en-US" altLang="zh-CN" sz="3600" dirty="0"/>
+              <a:t>A Vision Regression Model for Fingertip Aperture Prediction</a:t>
+            </a:r>
+            <a:endParaRPr lang="en-US" altLang="zh-CN" sz="3600"/>
           </a:p>
         </p:txBody>
       </p:sp>
@@ -4869,3493 +5078,6 @@
 </file>
 
 <file path=ppt/slides/slide10.xml><?xml version="1.0" encoding="utf-8"?>
-<p:sld xmlns:a="http://schemas.openxmlformats.org/drawingml/2006/main" xmlns:r="http://schemas.openxmlformats.org/officeDocument/2006/relationships" xmlns:p="http://schemas.openxmlformats.org/presentationml/2006/main">
-  <p:cSld>
-    <p:spTree>
-      <p:nvGrpSpPr>
-        <p:cNvPr id="1" name=""/>
-        <p:cNvGrpSpPr/>
-        <p:nvPr/>
-      </p:nvGrpSpPr>
-      <p:grpSpPr/>
-      <p:sp>
-        <p:nvSpPr>
-          <p:cNvPr id="6" name="文本框 5"/>
-          <p:cNvSpPr>
-            <a:spLocks noGrp="1"/>
-          </p:cNvSpPr>
-          <p:nvPr/>
-        </p:nvSpPr>
-        <p:spPr>
-          <a:xfrm>
-            <a:off x="275590" y="226695"/>
-            <a:ext cx="8522970" cy="583565"/>
-          </a:xfrm>
-          <a:prstGeom prst="rect">
-            <a:avLst/>
-          </a:prstGeom>
-          <a:noFill/>
-        </p:spPr>
-        <p:txBody>
-          <a:bodyPr wrap="square">
-            <a:spAutoFit/>
-          </a:bodyPr>
-          <a:lstStyle/>
-          <a:p>
-            <a:r>
-              <a:rPr lang="en-US" altLang="zh-CN" sz="3200" b="1">
-                <a:latin typeface="Times New Roman" panose="02020603050405020304"/>
-                <a:ea typeface="Times New Roman" panose="02020603050405020304"/>
-                <a:cs typeface="Times New Roman" panose="02020603050405020304"/>
-                <a:sym typeface="+mn-ea"/>
-              </a:rPr>
-              <a:t>Offline Validation – Phase-Wise Analysis</a:t>
-            </a:r>
-            <a:endParaRPr lang="en-US" altLang="zh-CN" sz="3200" b="1">
-              <a:latin typeface="Times New Roman" panose="02020603050405020304"/>
-              <a:ea typeface="Times New Roman" panose="02020603050405020304"/>
-              <a:cs typeface="Times New Roman" panose="02020603050405020304"/>
-              <a:sym typeface="+mn-ea"/>
-            </a:endParaRPr>
-          </a:p>
-        </p:txBody>
-      </p:sp>
-      <p:sp>
-        <p:nvSpPr>
-          <p:cNvPr id="16" name="文本框 15"/>
-          <p:cNvSpPr txBox="1"/>
-          <p:nvPr/>
-        </p:nvSpPr>
-        <p:spPr>
-          <a:xfrm>
-            <a:off x="275590" y="931545"/>
-            <a:ext cx="7620000" cy="645160"/>
-          </a:xfrm>
-          <a:prstGeom prst="rect">
-            <a:avLst/>
-          </a:prstGeom>
-          <a:noFill/>
-        </p:spPr>
-        <p:txBody>
-          <a:bodyPr wrap="square" rtlCol="0">
-            <a:spAutoFit/>
-          </a:bodyPr>
-          <a:p>
-            <a:r>
-              <a:rPr lang="en-US" altLang="zh-CN"/>
-              <a:t>The grasping phase is the most challenging to predict.</a:t>
-            </a:r>
-            <a:br>
-              <a:rPr lang="en-US" altLang="zh-CN"/>
-            </a:br>
-            <a:r>
-              <a:rPr lang="en-US" altLang="zh-CN"/>
-              <a:t>However, the current model can reduce prediction errors during this phase.</a:t>
-            </a:r>
-            <a:endParaRPr lang="en-US" altLang="zh-CN"/>
-          </a:p>
-        </p:txBody>
-      </p:sp>
-      <p:pic>
-        <p:nvPicPr>
-          <p:cNvPr id="3" name="图片 2" descr="06_overall_phase_errors_window5"/>
-          <p:cNvPicPr>
-            <a:picLocks noChangeAspect="1"/>
-          </p:cNvPicPr>
-          <p:nvPr/>
-        </p:nvPicPr>
-        <p:blipFill>
-          <a:blip r:embed="rId1"/>
-          <a:stretch>
-            <a:fillRect/>
-          </a:stretch>
-        </p:blipFill>
-        <p:spPr>
-          <a:xfrm>
-            <a:off x="1002030" y="1843405"/>
-            <a:ext cx="7070090" cy="4860925"/>
-          </a:xfrm>
-          <a:prstGeom prst="rect">
-            <a:avLst/>
-          </a:prstGeom>
-        </p:spPr>
-      </p:pic>
-      <p:sp>
-        <p:nvSpPr>
-          <p:cNvPr id="5" name="上箭头 4"/>
-          <p:cNvSpPr/>
-          <p:nvPr/>
-        </p:nvSpPr>
-        <p:spPr>
-          <a:xfrm rot="8460000">
-            <a:off x="3138170" y="2391410"/>
-            <a:ext cx="799465" cy="1100455"/>
-          </a:xfrm>
-          <a:prstGeom prst="upArrow">
-            <a:avLst/>
-          </a:prstGeom>
-          <a:solidFill>
-            <a:schemeClr val="tx2">
-              <a:lumMod val="75000"/>
-              <a:lumOff val="25000"/>
-            </a:schemeClr>
-          </a:solidFill>
-          <a:ln>
-            <a:noFill/>
-            <a:tailEnd type="triangle"/>
-          </a:ln>
-        </p:spPr>
-        <p:style>
-          <a:lnRef idx="2">
-            <a:schemeClr val="accent1">
-              <a:lumMod val="75000"/>
-            </a:schemeClr>
-          </a:lnRef>
-          <a:fillRef idx="1">
-            <a:schemeClr val="accent1"/>
-          </a:fillRef>
-          <a:effectRef idx="0">
-            <a:srgbClr val="FFFFFF"/>
-          </a:effectRef>
-          <a:fontRef idx="minor">
-            <a:schemeClr val="lt1"/>
-          </a:fontRef>
-        </p:style>
-        <p:txBody>
-          <a:bodyPr rtlCol="0" anchor="ctr"/>
-          <a:p>
-            <a:pPr algn="ctr"/>
-            <a:endParaRPr lang="zh-CN" altLang="en-US"/>
-          </a:p>
-        </p:txBody>
-      </p:sp>
-    </p:spTree>
-  </p:cSld>
-  <p:clrMapOvr>
-    <a:masterClrMapping/>
-  </p:clrMapOvr>
-  <p:timing>
-    <p:tnLst>
-      <p:par>
-        <p:cTn id="1" dur="indefinite" restart="never" nodeType="tmRoot"/>
-      </p:par>
-    </p:tnLst>
-  </p:timing>
-</p:sld>
-</file>
-
-<file path=ppt/slides/slide11.xml><?xml version="1.0" encoding="utf-8"?>
-<p:sld xmlns:a="http://schemas.openxmlformats.org/drawingml/2006/main" xmlns:r="http://schemas.openxmlformats.org/officeDocument/2006/relationships" xmlns:p="http://schemas.openxmlformats.org/presentationml/2006/main">
-  <p:cSld>
-    <p:spTree>
-      <p:nvGrpSpPr>
-        <p:cNvPr id="1" name=""/>
-        <p:cNvGrpSpPr/>
-        <p:nvPr/>
-      </p:nvGrpSpPr>
-      <p:grpSpPr/>
-      <p:sp>
-        <p:nvSpPr>
-          <p:cNvPr id="6" name="文本框 5"/>
-          <p:cNvSpPr>
-            <a:spLocks noGrp="1"/>
-          </p:cNvSpPr>
-          <p:nvPr/>
-        </p:nvSpPr>
-        <p:spPr>
-          <a:xfrm>
-            <a:off x="275590" y="226695"/>
-            <a:ext cx="8522970" cy="583565"/>
-          </a:xfrm>
-          <a:prstGeom prst="rect">
-            <a:avLst/>
-          </a:prstGeom>
-          <a:noFill/>
-        </p:spPr>
-        <p:txBody>
-          <a:bodyPr wrap="square">
-            <a:spAutoFit/>
-          </a:bodyPr>
-          <a:lstStyle/>
-          <a:p>
-            <a:r>
-              <a:rPr lang="en-US" altLang="zh-CN" sz="3200" b="1">
-                <a:latin typeface="Times New Roman" panose="02020603050405020304"/>
-                <a:ea typeface="Times New Roman" panose="02020603050405020304"/>
-                <a:cs typeface="Times New Roman" panose="02020603050405020304"/>
-              </a:rPr>
-              <a:t>Effect of Temporal Window</a:t>
-            </a:r>
-            <a:endParaRPr lang="en-US" altLang="zh-CN" sz="3200" b="1">
-              <a:latin typeface="Times New Roman" panose="02020603050405020304"/>
-              <a:ea typeface="Times New Roman" panose="02020603050405020304"/>
-              <a:cs typeface="Times New Roman" panose="02020603050405020304"/>
-            </a:endParaRPr>
-          </a:p>
-        </p:txBody>
-      </p:sp>
-      <p:sp>
-        <p:nvSpPr>
-          <p:cNvPr id="31" name="文本框 30"/>
-          <p:cNvSpPr txBox="1"/>
-          <p:nvPr/>
-        </p:nvSpPr>
-        <p:spPr>
-          <a:xfrm>
-            <a:off x="240665" y="5895340"/>
-            <a:ext cx="8556625" cy="521970"/>
-          </a:xfrm>
-          <a:prstGeom prst="rect">
-            <a:avLst/>
-          </a:prstGeom>
-          <a:noFill/>
-        </p:spPr>
-        <p:txBody>
-          <a:bodyPr wrap="square" rtlCol="0">
-            <a:spAutoFit/>
-          </a:bodyPr>
-          <a:p>
-            <a:r>
-              <a:rPr lang="en-US" altLang="zh-CN" sz="1400"/>
-              <a:t>Comparison between predicted and ground-truth curves, In the red-highlighted region, the model without a temporal window shows poor prediction performance.</a:t>
-            </a:r>
-            <a:endParaRPr lang="en-US" altLang="zh-CN" sz="1400"/>
-          </a:p>
-        </p:txBody>
-      </p:sp>
-      <p:sp>
-        <p:nvSpPr>
-          <p:cNvPr id="33" name="文本框 32"/>
-          <p:cNvSpPr txBox="1"/>
-          <p:nvPr/>
-        </p:nvSpPr>
-        <p:spPr>
-          <a:xfrm>
-            <a:off x="275590" y="792000"/>
-            <a:ext cx="8522970" cy="1476375"/>
-          </a:xfrm>
-          <a:prstGeom prst="rect">
-            <a:avLst/>
-          </a:prstGeom>
-        </p:spPr>
-        <p:txBody>
-          <a:bodyPr wrap="square">
-            <a:spAutoFit/>
-          </a:bodyPr>
-          <a:p>
-            <a:pPr marL="285750" indent="-285750">
-              <a:buFont typeface="Wingdings" panose="05000000000000000000" charset="0"/>
-              <a:buChar char="l"/>
-            </a:pPr>
-            <a:r>
-              <a:rPr lang="en-US" altLang="zh-CN"/>
-              <a:t>Without a temporal window : The model learns only the mapping between distance and fingertip aperture, resulting in larger errors during rapid changes.</a:t>
-            </a:r>
-            <a:endParaRPr lang="en-US" altLang="zh-CN"/>
-          </a:p>
-          <a:p>
-            <a:pPr marL="285750" indent="-285750">
-              <a:buFont typeface="Wingdings" panose="05000000000000000000" charset="0"/>
-              <a:buChar char="l"/>
-            </a:pPr>
-            <a:endParaRPr lang="en-US" altLang="zh-CN"/>
-          </a:p>
-          <a:p>
-            <a:pPr marL="285750" indent="-285750">
-              <a:buFont typeface="Wingdings" panose="05000000000000000000" charset="0"/>
-              <a:buChar char="l"/>
-            </a:pPr>
-            <a:r>
-              <a:rPr lang="en-US" altLang="zh-CN"/>
-              <a:t>With a temporal window:The model can utilize short-term motion context to learn temporal trends, improving prediction accuracy.</a:t>
-            </a:r>
-            <a:endParaRPr lang="en-US" altLang="zh-CN"/>
-          </a:p>
-        </p:txBody>
-      </p:sp>
-      <p:pic>
-        <p:nvPicPr>
-          <p:cNvPr id="34" name="图片 33" descr="download"/>
-          <p:cNvPicPr>
-            <a:picLocks noChangeAspect="1"/>
-          </p:cNvPicPr>
-          <p:nvPr/>
-        </p:nvPicPr>
-        <p:blipFill>
-          <a:blip r:embed="rId1"/>
-          <a:stretch>
-            <a:fillRect/>
-          </a:stretch>
-        </p:blipFill>
-        <p:spPr>
-          <a:xfrm>
-            <a:off x="275590" y="2753995"/>
-            <a:ext cx="2640965" cy="3215640"/>
-          </a:xfrm>
-          <a:prstGeom prst="rect">
-            <a:avLst/>
-          </a:prstGeom>
-        </p:spPr>
-      </p:pic>
-      <p:pic>
-        <p:nvPicPr>
-          <p:cNvPr id="36" name="图片 35" descr="C:/Users/Di/Downloads/download (1).pngdownload (1)"/>
-          <p:cNvPicPr>
-            <a:picLocks noChangeAspect="1"/>
-          </p:cNvPicPr>
-          <p:nvPr/>
-        </p:nvPicPr>
-        <p:blipFill>
-          <a:blip r:embed="rId2"/>
-          <a:srcRect r="20"/>
-          <a:stretch>
-            <a:fillRect/>
-          </a:stretch>
-        </p:blipFill>
-        <p:spPr>
-          <a:xfrm>
-            <a:off x="3216275" y="2753995"/>
-            <a:ext cx="2640965" cy="3215640"/>
-          </a:xfrm>
-          <a:prstGeom prst="rect">
-            <a:avLst/>
-          </a:prstGeom>
-        </p:spPr>
-      </p:pic>
-      <p:pic>
-        <p:nvPicPr>
-          <p:cNvPr id="37" name="图片 36" descr="C:/Users/Di/Downloads/download (2).pngdownload (2)"/>
-          <p:cNvPicPr>
-            <a:picLocks noChangeAspect="1"/>
-          </p:cNvPicPr>
-          <p:nvPr/>
-        </p:nvPicPr>
-        <p:blipFill>
-          <a:blip r:embed="rId3"/>
-          <a:srcRect r="20"/>
-          <a:stretch>
-            <a:fillRect/>
-          </a:stretch>
-        </p:blipFill>
-        <p:spPr>
-          <a:xfrm>
-            <a:off x="6156960" y="2753995"/>
-            <a:ext cx="2640965" cy="3215640"/>
-          </a:xfrm>
-          <a:prstGeom prst="rect">
-            <a:avLst/>
-          </a:prstGeom>
-        </p:spPr>
-      </p:pic>
-    </p:spTree>
-  </p:cSld>
-  <p:clrMapOvr>
-    <a:masterClrMapping/>
-  </p:clrMapOvr>
-  <p:timing>
-    <p:tnLst>
-      <p:par>
-        <p:cTn id="1" dur="indefinite" restart="never" nodeType="tmRoot"/>
-      </p:par>
-    </p:tnLst>
-  </p:timing>
-</p:sld>
-</file>
-
-<file path=ppt/slides/slide12.xml><?xml version="1.0" encoding="utf-8"?>
-<p:sld xmlns:a="http://schemas.openxmlformats.org/drawingml/2006/main" xmlns:r="http://schemas.openxmlformats.org/officeDocument/2006/relationships" xmlns:p="http://schemas.openxmlformats.org/presentationml/2006/main">
-  <p:cSld>
-    <p:spTree>
-      <p:nvGrpSpPr>
-        <p:cNvPr id="1" name=""/>
-        <p:cNvGrpSpPr/>
-        <p:nvPr/>
-      </p:nvGrpSpPr>
-      <p:grpSpPr/>
-      <p:sp>
-        <p:nvSpPr>
-          <p:cNvPr id="6" name="文本框 5"/>
-          <p:cNvSpPr>
-            <a:spLocks noGrp="1"/>
-          </p:cNvSpPr>
-          <p:nvPr/>
-        </p:nvSpPr>
-        <p:spPr>
-          <a:xfrm>
-            <a:off x="275590" y="226695"/>
-            <a:ext cx="8522970" cy="583565"/>
-          </a:xfrm>
-          <a:prstGeom prst="rect">
-            <a:avLst/>
-          </a:prstGeom>
-          <a:noFill/>
-        </p:spPr>
-        <p:txBody>
-          <a:bodyPr wrap="square">
-            <a:spAutoFit/>
-          </a:bodyPr>
-          <a:lstStyle/>
-          <a:p>
-            <a:r>
-              <a:rPr lang="en-US" altLang="zh-CN" sz="3200" b="1">
-                <a:latin typeface="Times New Roman" panose="02020603050405020304"/>
-                <a:ea typeface="Times New Roman" panose="02020603050405020304"/>
-                <a:cs typeface="Times New Roman" panose="02020603050405020304"/>
-                <a:sym typeface="+mn-ea"/>
-              </a:rPr>
-              <a:t>Real-Time Experiment</a:t>
-            </a:r>
-            <a:endParaRPr lang="en-US" altLang="zh-CN" sz="3200" b="1">
-              <a:latin typeface="Times New Roman" panose="02020603050405020304"/>
-              <a:ea typeface="Times New Roman" panose="02020603050405020304"/>
-              <a:cs typeface="Times New Roman" panose="02020603050405020304"/>
-            </a:endParaRPr>
-          </a:p>
-        </p:txBody>
-      </p:sp>
-      <p:pic>
-        <p:nvPicPr>
-          <p:cNvPr id="5" name="图片 4" descr="02_trial_metrics"/>
-          <p:cNvPicPr>
-            <a:picLocks noChangeAspect="1"/>
-          </p:cNvPicPr>
-          <p:nvPr/>
-        </p:nvPicPr>
-        <p:blipFill>
-          <a:blip r:embed="rId1"/>
-          <a:stretch>
-            <a:fillRect/>
-          </a:stretch>
-        </p:blipFill>
-        <p:spPr>
-          <a:xfrm>
-            <a:off x="176530" y="3528000"/>
-            <a:ext cx="8792210" cy="2930525"/>
-          </a:xfrm>
-          <a:prstGeom prst="rect">
-            <a:avLst/>
-          </a:prstGeom>
-        </p:spPr>
-      </p:pic>
-      <p:sp>
-        <p:nvSpPr>
-          <p:cNvPr id="16" name="文本框 15"/>
-          <p:cNvSpPr txBox="1"/>
-          <p:nvPr/>
-        </p:nvSpPr>
-        <p:spPr>
-          <a:xfrm>
-            <a:off x="310515" y="737870"/>
-            <a:ext cx="8523605" cy="337185"/>
-          </a:xfrm>
-          <a:prstGeom prst="rect">
-            <a:avLst/>
-          </a:prstGeom>
-          <a:noFill/>
-        </p:spPr>
-        <p:txBody>
-          <a:bodyPr wrap="square" rtlCol="0">
-            <a:spAutoFit/>
-          </a:bodyPr>
-          <a:p>
-            <a:r>
-              <a:rPr lang="en-US" altLang="zh-CN" sz="1600">
-                <a:solidFill>
-                  <a:srgbClr val="6A6A6A"/>
-                </a:solidFill>
-              </a:rPr>
-              <a:t>9 validation trials across three cube sizes (3 trials per size)</a:t>
-            </a:r>
-            <a:endParaRPr lang="en-US" altLang="zh-CN" sz="1600">
-              <a:solidFill>
-                <a:srgbClr val="6A6A6A"/>
-              </a:solidFill>
-            </a:endParaRPr>
-          </a:p>
-        </p:txBody>
-      </p:sp>
-    </p:spTree>
-  </p:cSld>
-  <p:clrMapOvr>
-    <a:masterClrMapping/>
-  </p:clrMapOvr>
-  <p:timing>
-    <p:tnLst>
-      <p:par>
-        <p:cTn id="1" dur="indefinite" restart="never" nodeType="tmRoot"/>
-      </p:par>
-    </p:tnLst>
-  </p:timing>
-</p:sld>
-</file>
-
-<file path=ppt/slides/slide13.xml><?xml version="1.0" encoding="utf-8"?>
-<p:sld xmlns:a="http://schemas.openxmlformats.org/drawingml/2006/main" xmlns:r="http://schemas.openxmlformats.org/officeDocument/2006/relationships" xmlns:p="http://schemas.openxmlformats.org/presentationml/2006/main">
-  <p:cSld>
-    <p:spTree>
-      <p:nvGrpSpPr>
-        <p:cNvPr id="1" name=""/>
-        <p:cNvGrpSpPr/>
-        <p:nvPr/>
-      </p:nvGrpSpPr>
-      <p:grpSpPr/>
-      <p:sp>
-        <p:nvSpPr>
-          <p:cNvPr id="6" name="文本框 5"/>
-          <p:cNvSpPr>
-            <a:spLocks noGrp="1"/>
-          </p:cNvSpPr>
-          <p:nvPr/>
-        </p:nvSpPr>
-        <p:spPr>
-          <a:xfrm>
-            <a:off x="275590" y="226695"/>
-            <a:ext cx="8522970" cy="583565"/>
-          </a:xfrm>
-          <a:prstGeom prst="rect">
-            <a:avLst/>
-          </a:prstGeom>
-          <a:noFill/>
-        </p:spPr>
-        <p:txBody>
-          <a:bodyPr wrap="square">
-            <a:spAutoFit/>
-          </a:bodyPr>
-          <a:lstStyle/>
-          <a:p>
-            <a:r>
-              <a:rPr lang="en-US" altLang="zh-CN" sz="3200" b="1">
-                <a:latin typeface="Times New Roman" panose="02020603050405020304"/>
-                <a:ea typeface="Times New Roman" panose="02020603050405020304"/>
-                <a:cs typeface="Times New Roman" panose="02020603050405020304"/>
-                <a:sym typeface="+mn-ea"/>
-              </a:rPr>
-              <a:t>Real-Time Experiment</a:t>
-            </a:r>
-            <a:endParaRPr lang="en-US" altLang="zh-CN" sz="3200" b="1">
-              <a:latin typeface="Times New Roman" panose="02020603050405020304"/>
-              <a:ea typeface="Times New Roman" panose="02020603050405020304"/>
-              <a:cs typeface="Times New Roman" panose="02020603050405020304"/>
-            </a:endParaRPr>
-          </a:p>
-        </p:txBody>
-      </p:sp>
-      <p:sp>
-        <p:nvSpPr>
-          <p:cNvPr id="3" name="文本框 2"/>
-          <p:cNvSpPr txBox="1"/>
-          <p:nvPr/>
-        </p:nvSpPr>
-        <p:spPr>
-          <a:xfrm>
-            <a:off x="275590" y="941070"/>
-            <a:ext cx="3048000" cy="368300"/>
-          </a:xfrm>
-          <a:prstGeom prst="rect">
-            <a:avLst/>
-          </a:prstGeom>
-          <a:noFill/>
-        </p:spPr>
-        <p:txBody>
-          <a:bodyPr wrap="square" rtlCol="0">
-            <a:spAutoFit/>
-          </a:bodyPr>
-          <a:p>
-            <a:r>
-              <a:rPr lang="en-US" altLang="zh-CN">
-                <a:ea typeface="SimSun" panose="02010600030101010101" pitchFamily="2" charset="-122"/>
-              </a:rPr>
-              <a:t>Three phase comparison</a:t>
-            </a:r>
-            <a:endParaRPr lang="en-US" altLang="zh-CN">
-              <a:ea typeface="SimSun" panose="02010600030101010101" pitchFamily="2" charset="-122"/>
-            </a:endParaRPr>
-          </a:p>
-        </p:txBody>
-      </p:sp>
-      <p:pic>
-        <p:nvPicPr>
-          <p:cNvPr id="4" name="图片 3" descr="C:/Users/Di/Downloads/download (3).pngdownload (3)"/>
-          <p:cNvPicPr>
-            <a:picLocks noChangeAspect="1"/>
-          </p:cNvPicPr>
-          <p:nvPr/>
-        </p:nvPicPr>
-        <p:blipFill>
-          <a:blip r:embed="rId1"/>
-          <a:srcRect/>
-          <a:stretch>
-            <a:fillRect/>
-          </a:stretch>
-        </p:blipFill>
-        <p:spPr>
-          <a:xfrm>
-            <a:off x="879475" y="1828800"/>
-            <a:ext cx="7315200" cy="5029200"/>
-          </a:xfrm>
-          <a:prstGeom prst="rect">
-            <a:avLst/>
-          </a:prstGeom>
-        </p:spPr>
-      </p:pic>
-    </p:spTree>
-  </p:cSld>
-  <p:clrMapOvr>
-    <a:masterClrMapping/>
-  </p:clrMapOvr>
-  <p:timing>
-    <p:tnLst>
-      <p:par>
-        <p:cTn id="1" dur="indefinite" restart="never" nodeType="tmRoot"/>
-      </p:par>
-    </p:tnLst>
-  </p:timing>
-</p:sld>
-</file>
-
-<file path=ppt/slides/slide14.xml><?xml version="1.0" encoding="utf-8"?>
-<p:sld xmlns:a="http://schemas.openxmlformats.org/drawingml/2006/main" xmlns:r="http://schemas.openxmlformats.org/officeDocument/2006/relationships" xmlns:p="http://schemas.openxmlformats.org/presentationml/2006/main">
-  <p:cSld>
-    <p:spTree>
-      <p:nvGrpSpPr>
-        <p:cNvPr id="1" name=""/>
-        <p:cNvGrpSpPr/>
-        <p:nvPr/>
-      </p:nvGrpSpPr>
-      <p:grpSpPr/>
-      <p:sp>
-        <p:nvSpPr>
-          <p:cNvPr id="6" name="文本框 5"/>
-          <p:cNvSpPr>
-            <a:spLocks noGrp="1"/>
-          </p:cNvSpPr>
-          <p:nvPr/>
-        </p:nvSpPr>
-        <p:spPr>
-          <a:xfrm>
-            <a:off x="275590" y="226695"/>
-            <a:ext cx="8522970" cy="583565"/>
-          </a:xfrm>
-          <a:prstGeom prst="rect">
-            <a:avLst/>
-          </a:prstGeom>
-          <a:noFill/>
-        </p:spPr>
-        <p:txBody>
-          <a:bodyPr wrap="square">
-            <a:spAutoFit/>
-          </a:bodyPr>
-          <a:lstStyle/>
-          <a:p>
-            <a:r>
-              <a:rPr lang="en-US" altLang="zh-CN" sz="3200" b="1">
-                <a:latin typeface="Times New Roman" panose="02020603050405020304"/>
-                <a:ea typeface="Times New Roman" panose="02020603050405020304"/>
-                <a:cs typeface="Times New Roman" panose="02020603050405020304"/>
-              </a:rPr>
-              <a:t>Summary</a:t>
-            </a:r>
-            <a:endParaRPr lang="en-US" altLang="zh-CN" sz="3200" b="1">
-              <a:latin typeface="Times New Roman" panose="02020603050405020304"/>
-              <a:ea typeface="Times New Roman" panose="02020603050405020304"/>
-              <a:cs typeface="Times New Roman" panose="02020603050405020304"/>
-            </a:endParaRPr>
-          </a:p>
-        </p:txBody>
-      </p:sp>
-      <p:sp>
-        <p:nvSpPr>
-          <p:cNvPr id="3" name="文本框 5"/>
-          <p:cNvSpPr>
-            <a:spLocks noGrp="1"/>
-          </p:cNvSpPr>
-          <p:nvPr/>
-        </p:nvSpPr>
-        <p:spPr>
-          <a:xfrm>
-            <a:off x="275590" y="4140000"/>
-            <a:ext cx="8522970" cy="583565"/>
-          </a:xfrm>
-          <a:prstGeom prst="rect">
-            <a:avLst/>
-          </a:prstGeom>
-          <a:noFill/>
-        </p:spPr>
-        <p:txBody>
-          <a:bodyPr wrap="square">
-            <a:spAutoFit/>
-          </a:bodyPr>
-          <a:lstStyle/>
-          <a:p>
-            <a:r>
-              <a:rPr lang="en-US" altLang="zh-CN" sz="3200" b="1">
-                <a:latin typeface="Times New Roman" panose="02020603050405020304"/>
-                <a:ea typeface="Times New Roman" panose="02020603050405020304"/>
-                <a:cs typeface="Times New Roman" panose="02020603050405020304"/>
-              </a:rPr>
-              <a:t>Future Work</a:t>
-            </a:r>
-            <a:endParaRPr lang="en-US" altLang="zh-CN" sz="3200" b="1">
-              <a:latin typeface="Times New Roman" panose="02020603050405020304"/>
-              <a:ea typeface="Times New Roman" panose="02020603050405020304"/>
-              <a:cs typeface="Times New Roman" panose="02020603050405020304"/>
-            </a:endParaRPr>
-          </a:p>
-        </p:txBody>
-      </p:sp>
-    </p:spTree>
-  </p:cSld>
-  <p:clrMapOvr>
-    <a:masterClrMapping/>
-  </p:clrMapOvr>
-  <p:timing>
-    <p:tnLst>
-      <p:par>
-        <p:cTn id="1" dur="indefinite" restart="never" nodeType="tmRoot"/>
-      </p:par>
-    </p:tnLst>
-  </p:timing>
-</p:sld>
-</file>
-
-<file path=ppt/slides/slide2.xml><?xml version="1.0" encoding="utf-8"?>
-<p:sld xmlns:a="http://schemas.openxmlformats.org/drawingml/2006/main" xmlns:r="http://schemas.openxmlformats.org/officeDocument/2006/relationships" xmlns:p="http://schemas.openxmlformats.org/presentationml/2006/main">
-  <p:cSld>
-    <p:spTree>
-      <p:nvGrpSpPr>
-        <p:cNvPr id="1" name=""/>
-        <p:cNvGrpSpPr/>
-        <p:nvPr/>
-      </p:nvGrpSpPr>
-      <p:grpSpPr/>
-      <p:sp>
-        <p:nvSpPr>
-          <p:cNvPr id="6" name="文本框 5"/>
-          <p:cNvSpPr txBox="1"/>
-          <p:nvPr/>
-        </p:nvSpPr>
-        <p:spPr>
-          <a:xfrm>
-            <a:off x="220980" y="226695"/>
-            <a:ext cx="8717915" cy="760730"/>
-          </a:xfrm>
-          <a:prstGeom prst="rect">
-            <a:avLst/>
-          </a:prstGeom>
-          <a:noFill/>
-        </p:spPr>
-        <p:txBody>
-          <a:bodyPr wrap="square" rtlCol="0">
-            <a:noAutofit/>
-          </a:bodyPr>
-          <a:p>
-            <a:r>
-              <a:rPr lang="en-US" altLang="zh-CN" sz="3200" b="1" dirty="0"/>
-              <a:t>Research Objective </a:t>
-            </a:r>
-            <a:r>
-              <a:rPr lang="en-US" altLang="zh-CN" sz="3200" b="1" dirty="0">
-                <a:sym typeface="Avenir Heavy"/>
-              </a:rPr>
-              <a:t>&amp; Question</a:t>
-            </a:r>
-            <a:endParaRPr lang="en-US" altLang="zh-CN" sz="3200" b="1" dirty="0"/>
-          </a:p>
-          <a:p>
-            <a:endParaRPr lang="en-US" altLang="zh-CN" sz="3200" b="1">
-              <a:latin typeface="Times New Roman" panose="02020603050405020304" charset="0"/>
-              <a:ea typeface="SimSun" panose="02010600030101010101" pitchFamily="2" charset="-122"/>
-              <a:cs typeface="Times New Roman" panose="02020603050405020304" charset="0"/>
-            </a:endParaRPr>
-          </a:p>
-        </p:txBody>
-      </p:sp>
-      <p:grpSp>
-        <p:nvGrpSpPr>
-          <p:cNvPr id="96" name="组合 95"/>
-          <p:cNvGrpSpPr/>
-          <p:nvPr>
-            <p:custDataLst>
-              <p:tags r:id="rId1"/>
-            </p:custDataLst>
-          </p:nvPr>
-        </p:nvGrpSpPr>
-        <p:grpSpPr>
-          <a:xfrm>
-            <a:off x="219710" y="2963545"/>
-            <a:ext cx="8630920" cy="1564005"/>
-            <a:chOff x="348" y="7526"/>
-            <a:chExt cx="13592" cy="2928"/>
-          </a:xfrm>
-        </p:grpSpPr>
-        <p:grpSp>
-          <p:nvGrpSpPr>
-            <p:cNvPr id="90" name="组合 89"/>
-            <p:cNvGrpSpPr/>
-            <p:nvPr>
-              <p:custDataLst>
-                <p:tags r:id="rId2"/>
-              </p:custDataLst>
-            </p:nvPr>
-          </p:nvGrpSpPr>
-          <p:grpSpPr>
-            <a:xfrm rot="0">
-              <a:off x="348" y="7526"/>
-              <a:ext cx="13593" cy="2929"/>
-              <a:chOff x="790" y="4952"/>
-              <a:chExt cx="3791" cy="2929"/>
-            </a:xfrm>
-          </p:grpSpPr>
-          <p:grpSp>
-            <p:nvGrpSpPr>
-              <p:cNvPr id="91" name="组合 90"/>
-              <p:cNvGrpSpPr/>
-              <p:nvPr/>
-            </p:nvGrpSpPr>
-            <p:grpSpPr>
-              <a:xfrm>
-                <a:off x="790" y="4952"/>
-                <a:ext cx="3791" cy="2929"/>
-                <a:chOff x="334" y="5920"/>
-                <a:chExt cx="5673" cy="2929"/>
-              </a:xfrm>
-            </p:grpSpPr>
-            <p:sp>
-              <p:nvSpPr>
-                <p:cNvPr id="92" name="Shape 25"/>
-                <p:cNvSpPr/>
-                <p:nvPr>
-                  <p:custDataLst>
-                    <p:tags r:id="rId3"/>
-                  </p:custDataLst>
-                </p:nvPr>
-              </p:nvSpPr>
-              <p:spPr>
-                <a:xfrm>
-                  <a:off x="334" y="6936"/>
-                  <a:ext cx="5672" cy="1913"/>
-                </a:xfrm>
-                <a:prstGeom prst="rect">
-                  <a:avLst/>
-                </a:prstGeom>
-                <a:solidFill>
-                  <a:srgbClr val="F59E0B">
-                    <a:alpha val="10000"/>
-                  </a:srgbClr>
-                </a:solidFill>
-                <a:ln w="19050">
-                  <a:solidFill>
-                    <a:srgbClr val="F59E0B"/>
-                  </a:solidFill>
-                  <a:prstDash val="solid"/>
-                </a:ln>
-              </p:spPr>
-            </p:sp>
-            <p:sp>
-              <p:nvSpPr>
-                <p:cNvPr id="93" name="Shape 26"/>
-                <p:cNvSpPr/>
-                <p:nvPr>
-                  <p:custDataLst>
-                    <p:tags r:id="rId4"/>
-                  </p:custDataLst>
-                </p:nvPr>
-              </p:nvSpPr>
-              <p:spPr>
-                <a:xfrm>
-                  <a:off x="335" y="5920"/>
-                  <a:ext cx="5672" cy="1016"/>
-                </a:xfrm>
-                <a:prstGeom prst="rect">
-                  <a:avLst/>
-                </a:prstGeom>
-                <a:solidFill>
-                  <a:srgbClr val="F59E0B"/>
-                </a:solidFill>
-                <a:ln w="19050">
-                  <a:solidFill>
-                    <a:srgbClr val="F59E0B"/>
-                  </a:solidFill>
-                  <a:prstDash val="solid"/>
-                </a:ln>
-              </p:spPr>
-            </p:sp>
-          </p:grpSp>
-          <p:sp>
-            <p:nvSpPr>
-              <p:cNvPr id="94" name="Text 27"/>
-              <p:cNvSpPr/>
-              <p:nvPr>
-                <p:custDataLst>
-                  <p:tags r:id="rId5"/>
-                </p:custDataLst>
-              </p:nvPr>
-            </p:nvSpPr>
-            <p:spPr>
-              <a:xfrm>
-                <a:off x="790" y="4952"/>
-                <a:ext cx="3790" cy="1016"/>
-              </a:xfrm>
-              <a:prstGeom prst="rect">
-                <a:avLst/>
-              </a:prstGeom>
-              <a:noFill/>
-            </p:spPr>
-            <p:txBody>
-              <a:bodyPr wrap="square" lIns="0" tIns="0" rIns="0" bIns="0" rtlCol="0" anchor="ctr"/>
-              <a:lstStyle/>
-              <a:p>
-                <a:pPr marL="0" indent="0" algn="ctr">
-                  <a:buNone/>
-                </a:pPr>
-                <a:r>
-                  <a:rPr lang="en-US" altLang="zh-CN" b="1" dirty="0">
-                    <a:sym typeface="+mn-ea"/>
-                  </a:rPr>
-                  <a:t>RQ</a:t>
-                </a:r>
-                <a:r>
-                  <a:rPr lang="en-US" altLang="zh-CN" b="1" dirty="0">
-                    <a:sym typeface="Avenir Heavy"/>
-                  </a:rPr>
-                  <a:t>1</a:t>
-                </a:r>
-                <a:endParaRPr lang="en-US" altLang="zh-CN" b="1" dirty="0"/>
-              </a:p>
-            </p:txBody>
-          </p:sp>
-        </p:grpSp>
-        <p:sp>
-          <p:nvSpPr>
-            <p:cNvPr id="95" name="文本框 94"/>
-            <p:cNvSpPr txBox="1"/>
-            <p:nvPr>
-              <p:custDataLst>
-                <p:tags r:id="rId6"/>
-              </p:custDataLst>
-            </p:nvPr>
-          </p:nvSpPr>
-          <p:spPr>
-            <a:xfrm>
-              <a:off x="348" y="8542"/>
-              <a:ext cx="13590" cy="1913"/>
-            </a:xfrm>
-            <a:prstGeom prst="rect">
-              <a:avLst/>
-            </a:prstGeom>
-            <a:noFill/>
-          </p:spPr>
-          <p:txBody>
-            <a:bodyPr wrap="square" rtlCol="0" anchor="t">
-              <a:noAutofit/>
-            </a:bodyPr>
-            <a:p>
-              <a:r>
-                <a:rPr lang="en-US" altLang="zh-CN">
-                  <a:sym typeface="+mn-ea"/>
-                </a:rPr>
-                <a:t>Is there a consistent relationship between hand–object distance and fingertip aperture during reach-to-grasp movements</a:t>
-              </a:r>
-              <a:r>
-                <a:rPr lang="en-US" altLang="zh-CN">
-                  <a:ea typeface="SimSun" panose="02010600030101010101" pitchFamily="2" charset="-122"/>
-                </a:rPr>
-                <a:t>?</a:t>
-              </a:r>
-              <a:endParaRPr lang="en-US" altLang="zh-CN">
-                <a:ea typeface="SimSun" panose="02010600030101010101" pitchFamily="2" charset="-122"/>
-              </a:endParaRPr>
-            </a:p>
-          </p:txBody>
-        </p:sp>
-      </p:grpSp>
-      <p:sp>
-        <p:nvSpPr>
-          <p:cNvPr id="2" name="灯片编号占位符 1"/>
-          <p:cNvSpPr>
-            <a:spLocks noGrp="1"/>
-          </p:cNvSpPr>
-          <p:nvPr>
-            <p:ph type="sldNum" sz="quarter" idx="12"/>
-          </p:nvPr>
-        </p:nvSpPr>
-        <p:spPr/>
-        <p:txBody>
-          <a:bodyPr/>
-          <a:p>
-            <a:fld id="{6F00E456-75B8-4C92-99E8-A0CAB60115A8}" type="slidenum">
-              <a:rPr kumimoji="1" lang="ja-JP" altLang="en-US" smtClean="0"/>
-            </a:fld>
-            <a:endParaRPr kumimoji="1" lang="ja-JP" altLang="en-US"/>
-          </a:p>
-        </p:txBody>
-      </p:sp>
-      <p:grpSp>
-        <p:nvGrpSpPr>
-          <p:cNvPr id="3" name="组合 2"/>
-          <p:cNvGrpSpPr/>
-          <p:nvPr>
-            <p:custDataLst>
-              <p:tags r:id="rId7"/>
-            </p:custDataLst>
-          </p:nvPr>
-        </p:nvGrpSpPr>
-        <p:grpSpPr>
-          <a:xfrm>
-            <a:off x="219710" y="4939030"/>
-            <a:ext cx="8630920" cy="1564005"/>
-            <a:chOff x="348" y="7526"/>
-            <a:chExt cx="13592" cy="2928"/>
-          </a:xfrm>
-        </p:grpSpPr>
-        <p:grpSp>
-          <p:nvGrpSpPr>
-            <p:cNvPr id="4" name="组合 3"/>
-            <p:cNvGrpSpPr/>
-            <p:nvPr>
-              <p:custDataLst>
-                <p:tags r:id="rId8"/>
-              </p:custDataLst>
-            </p:nvPr>
-          </p:nvGrpSpPr>
-          <p:grpSpPr>
-            <a:xfrm rot="0">
-              <a:off x="348" y="7526"/>
-              <a:ext cx="13593" cy="2929"/>
-              <a:chOff x="790" y="4952"/>
-              <a:chExt cx="3791" cy="2929"/>
-            </a:xfrm>
-          </p:grpSpPr>
-          <p:grpSp>
-            <p:nvGrpSpPr>
-              <p:cNvPr id="5" name="组合 4"/>
-              <p:cNvGrpSpPr/>
-              <p:nvPr/>
-            </p:nvGrpSpPr>
-            <p:grpSpPr>
-              <a:xfrm>
-                <a:off x="790" y="4952"/>
-                <a:ext cx="3791" cy="2929"/>
-                <a:chOff x="334" y="5920"/>
-                <a:chExt cx="5673" cy="2929"/>
-              </a:xfrm>
-            </p:grpSpPr>
-            <p:sp>
-              <p:nvSpPr>
-                <p:cNvPr id="7" name="Shape 25"/>
-                <p:cNvSpPr/>
-                <p:nvPr>
-                  <p:custDataLst>
-                    <p:tags r:id="rId9"/>
-                  </p:custDataLst>
-                </p:nvPr>
-              </p:nvSpPr>
-              <p:spPr>
-                <a:xfrm>
-                  <a:off x="334" y="6936"/>
-                  <a:ext cx="5672" cy="1913"/>
-                </a:xfrm>
-                <a:prstGeom prst="rect">
-                  <a:avLst/>
-                </a:prstGeom>
-                <a:solidFill>
-                  <a:srgbClr val="F59E0B">
-                    <a:alpha val="10000"/>
-                  </a:srgbClr>
-                </a:solidFill>
-                <a:ln w="19050">
-                  <a:solidFill>
-                    <a:srgbClr val="F59E0B"/>
-                  </a:solidFill>
-                  <a:prstDash val="solid"/>
-                </a:ln>
-              </p:spPr>
-            </p:sp>
-            <p:sp>
-              <p:nvSpPr>
-                <p:cNvPr id="8" name="Shape 26"/>
-                <p:cNvSpPr/>
-                <p:nvPr>
-                  <p:custDataLst>
-                    <p:tags r:id="rId10"/>
-                  </p:custDataLst>
-                </p:nvPr>
-              </p:nvSpPr>
-              <p:spPr>
-                <a:xfrm>
-                  <a:off x="335" y="5920"/>
-                  <a:ext cx="5672" cy="1016"/>
-                </a:xfrm>
-                <a:prstGeom prst="rect">
-                  <a:avLst/>
-                </a:prstGeom>
-                <a:solidFill>
-                  <a:srgbClr val="F59E0B"/>
-                </a:solidFill>
-                <a:ln w="19050">
-                  <a:solidFill>
-                    <a:srgbClr val="F59E0B"/>
-                  </a:solidFill>
-                  <a:prstDash val="solid"/>
-                </a:ln>
-              </p:spPr>
-            </p:sp>
-          </p:grpSp>
-          <p:sp>
-            <p:nvSpPr>
-              <p:cNvPr id="9" name="Text 27"/>
-              <p:cNvSpPr/>
-              <p:nvPr>
-                <p:custDataLst>
-                  <p:tags r:id="rId11"/>
-                </p:custDataLst>
-              </p:nvPr>
-            </p:nvSpPr>
-            <p:spPr>
-              <a:xfrm>
-                <a:off x="790" y="4952"/>
-                <a:ext cx="3790" cy="1016"/>
-              </a:xfrm>
-              <a:prstGeom prst="rect">
-                <a:avLst/>
-              </a:prstGeom>
-              <a:noFill/>
-            </p:spPr>
-            <p:txBody>
-              <a:bodyPr wrap="square" lIns="0" tIns="0" rIns="0" bIns="0" rtlCol="0" anchor="ctr"/>
-              <a:lstStyle/>
-              <a:p>
-                <a:pPr marL="0" indent="0" algn="ctr">
-                  <a:buNone/>
-                </a:pPr>
-                <a:r>
-                  <a:rPr lang="en-US" altLang="zh-CN" b="1" dirty="0">
-                    <a:sym typeface="+mn-ea"/>
-                  </a:rPr>
-                  <a:t>RQ</a:t>
-                </a:r>
-                <a:r>
-                  <a:rPr lang="en-US" altLang="zh-CN" b="1" dirty="0">
-                    <a:sym typeface="Avenir Heavy"/>
-                  </a:rPr>
-                  <a:t>2</a:t>
-                </a:r>
-                <a:endParaRPr lang="en-US" altLang="zh-CN" b="1" dirty="0"/>
-              </a:p>
-            </p:txBody>
-          </p:sp>
-        </p:grpSp>
-        <p:sp>
-          <p:nvSpPr>
-            <p:cNvPr id="10" name="文本框 9"/>
-            <p:cNvSpPr txBox="1"/>
-            <p:nvPr>
-              <p:custDataLst>
-                <p:tags r:id="rId12"/>
-              </p:custDataLst>
-            </p:nvPr>
-          </p:nvSpPr>
-          <p:spPr>
-            <a:xfrm>
-              <a:off x="348" y="8542"/>
-              <a:ext cx="13590" cy="1913"/>
-            </a:xfrm>
-            <a:prstGeom prst="rect">
-              <a:avLst/>
-            </a:prstGeom>
-            <a:noFill/>
-          </p:spPr>
-          <p:txBody>
-            <a:bodyPr wrap="square" rtlCol="0" anchor="t">
-              <a:noAutofit/>
-            </a:bodyPr>
-            <a:p>
-              <a:r>
-                <a:rPr lang="en-US" altLang="zh-CN">
-                  <a:ea typeface="SimSun" panose="02010600030101010101" pitchFamily="2" charset="-122"/>
-                </a:rPr>
-                <a:t>How accurately can a regression model </a:t>
-              </a:r>
-              <a:r>
-                <a:rPr lang="en-US" altLang="zh-CN">
-                  <a:ea typeface="SimSun" panose="02010600030101010101" pitchFamily="2" charset="-122"/>
-                  <a:sym typeface="+mn-ea"/>
-                </a:rPr>
-                <a:t>predict </a:t>
-              </a:r>
-              <a:r>
-                <a:rPr lang="en-US" altLang="zh-CN">
-                  <a:ea typeface="SimSun" panose="02010600030101010101" pitchFamily="2" charset="-122"/>
-                </a:rPr>
-                <a:t>fingertip aperture </a:t>
-              </a:r>
-              <a:r>
-                <a:rPr lang="en-US" altLang="zh-CN">
-                  <a:sym typeface="+mn-ea"/>
-                </a:rPr>
-                <a:t>from hand–object distance</a:t>
-              </a:r>
-              <a:r>
-                <a:rPr lang="en-US" altLang="zh-CN">
-                  <a:ea typeface="SimSun" panose="02010600030101010101" pitchFamily="2" charset="-122"/>
-                </a:rPr>
-                <a:t> during reach-to-grasp movements?</a:t>
-              </a:r>
-              <a:endParaRPr lang="en-US" altLang="zh-CN">
-                <a:ea typeface="SimSun" panose="02010600030101010101" pitchFamily="2" charset="-122"/>
-              </a:endParaRPr>
-            </a:p>
-          </p:txBody>
-        </p:sp>
-      </p:grpSp>
-      <p:sp>
-        <p:nvSpPr>
-          <p:cNvPr id="11" name="文本框 10"/>
-          <p:cNvSpPr txBox="1"/>
-          <p:nvPr/>
-        </p:nvSpPr>
-        <p:spPr>
-          <a:xfrm>
-            <a:off x="275590" y="909320"/>
-            <a:ext cx="8573135" cy="1753235"/>
-          </a:xfrm>
-          <a:prstGeom prst="rect">
-            <a:avLst/>
-          </a:prstGeom>
-          <a:noFill/>
-        </p:spPr>
-        <p:txBody>
-          <a:bodyPr wrap="square" rtlCol="0">
-            <a:spAutoFit/>
-          </a:bodyPr>
-          <a:p>
-            <a:r>
-              <a:rPr lang="en-US" altLang="zh-CN"/>
-              <a:t>During reach-to-grasp movements, finger opening and closing are coordinated with the hand’s approach to an object.</a:t>
-            </a:r>
-            <a:endParaRPr lang="en-US" altLang="zh-CN"/>
-          </a:p>
-          <a:p>
-            <a:endParaRPr lang="en-US" altLang="zh-CN"/>
-          </a:p>
-          <a:p>
-            <a:r>
-              <a:rPr lang="en-US" altLang="zh-CN"/>
-              <a:t>This study aims to investigate the relationship between hand–object distance and fingertip aperture, and further examine whether a regression model can </a:t>
-            </a:r>
-            <a:r>
-              <a:rPr lang="en-US" altLang="zh-CN">
-                <a:ea typeface="SimSun" panose="02010600030101010101" pitchFamily="2" charset="-122"/>
-                <a:sym typeface="+mn-ea"/>
-              </a:rPr>
-              <a:t>predict </a:t>
-            </a:r>
-            <a:r>
-              <a:rPr lang="en-US" altLang="zh-CN"/>
-              <a:t>fingertip aperture from hand–object distance in real time.</a:t>
-            </a:r>
-            <a:endParaRPr lang="en-US" altLang="zh-CN"/>
-          </a:p>
-        </p:txBody>
-      </p:sp>
-    </p:spTree>
-  </p:cSld>
-  <p:clrMapOvr>
-    <a:masterClrMapping/>
-  </p:clrMapOvr>
-  <p:timing>
-    <p:tnLst>
-      <p:par>
-        <p:cTn id="1" dur="indefinite" restart="never" nodeType="tmRoot"/>
-      </p:par>
-    </p:tnLst>
-  </p:timing>
-</p:sld>
-</file>
-
-<file path=ppt/slides/slide3.xml><?xml version="1.0" encoding="utf-8"?>
-<p:sld xmlns:a="http://schemas.openxmlformats.org/drawingml/2006/main" xmlns:r="http://schemas.openxmlformats.org/officeDocument/2006/relationships" xmlns:p="http://schemas.openxmlformats.org/presentationml/2006/main">
-  <p:cSld>
-    <p:spTree>
-      <p:nvGrpSpPr>
-        <p:cNvPr id="1" name=""/>
-        <p:cNvGrpSpPr/>
-        <p:nvPr/>
-      </p:nvGrpSpPr>
-      <p:grpSpPr/>
-      <p:sp>
-        <p:nvSpPr>
-          <p:cNvPr id="6" name="文本框 5"/>
-          <p:cNvSpPr>
-            <a:spLocks noGrp="1"/>
-          </p:cNvSpPr>
-          <p:nvPr/>
-        </p:nvSpPr>
-        <p:spPr>
-          <a:xfrm>
-            <a:off x="275590" y="226695"/>
-            <a:ext cx="8522970" cy="583565"/>
-          </a:xfrm>
-          <a:prstGeom prst="rect">
-            <a:avLst/>
-          </a:prstGeom>
-          <a:noFill/>
-        </p:spPr>
-        <p:txBody>
-          <a:bodyPr wrap="square">
-            <a:spAutoFit/>
-          </a:bodyPr>
-          <a:lstStyle/>
-          <a:p>
-            <a:r>
-              <a:rPr lang="en-US" altLang="zh-CN" sz="3200" b="1">
-                <a:latin typeface="Times New Roman" panose="02020603050405020304"/>
-                <a:ea typeface="SimSun" panose="02010600030101010101" pitchFamily="2" charset="-122"/>
-                <a:cs typeface="Times New Roman" panose="02020603050405020304"/>
-                <a:sym typeface="+mn-ea"/>
-              </a:rPr>
-              <a:t>Experimental Setup</a:t>
-            </a:r>
-            <a:endParaRPr lang="en-US" altLang="zh-CN" sz="3200" b="1">
-              <a:latin typeface="Times New Roman" panose="02020603050405020304"/>
-              <a:ea typeface="SimSun" panose="02010600030101010101" pitchFamily="2" charset="-122"/>
-              <a:cs typeface="Times New Roman" panose="02020603050405020304"/>
-              <a:sym typeface="+mn-ea"/>
-            </a:endParaRPr>
-          </a:p>
-        </p:txBody>
-      </p:sp>
-      <p:grpSp>
-        <p:nvGrpSpPr>
-          <p:cNvPr id="5" name="组合 4"/>
-          <p:cNvGrpSpPr/>
-          <p:nvPr/>
-        </p:nvGrpSpPr>
-        <p:grpSpPr>
-          <a:xfrm>
-            <a:off x="490855" y="998855"/>
-            <a:ext cx="9027795" cy="5362575"/>
-            <a:chOff x="182" y="1685"/>
-            <a:chExt cx="14217" cy="8445"/>
-          </a:xfrm>
-        </p:grpSpPr>
-        <p:pic>
-          <p:nvPicPr>
-            <p:cNvPr id="4" name="图片 3"/>
-            <p:cNvPicPr>
-              <a:picLocks noChangeAspect="1"/>
-            </p:cNvPicPr>
-            <p:nvPr/>
-          </p:nvPicPr>
-          <p:blipFill>
-            <a:blip r:embed="rId1"/>
-            <a:srcRect l="2579" t="15949" b="21628"/>
-            <a:stretch>
-              <a:fillRect/>
-            </a:stretch>
-          </p:blipFill>
-          <p:spPr>
-            <a:xfrm>
-              <a:off x="2759" y="2616"/>
-              <a:ext cx="6597" cy="7514"/>
-            </a:xfrm>
-            <a:prstGeom prst="rect">
-              <a:avLst/>
-            </a:prstGeom>
-          </p:spPr>
-        </p:pic>
-        <p:sp>
-          <p:nvSpPr>
-            <p:cNvPr id="8" name="任意多边形 7"/>
-            <p:cNvSpPr/>
-            <p:nvPr/>
-          </p:nvSpPr>
-          <p:spPr>
-            <a:xfrm>
-              <a:off x="1531" y="9014"/>
-              <a:ext cx="1644" cy="17"/>
-            </a:xfrm>
-            <a:custGeom>
-              <a:avLst/>
-              <a:gdLst>
-                <a:gd name="connisteX0" fmla="*/ 2532380 w 2532380"/>
-                <a:gd name="connsiteY0" fmla="*/ 0 h 10795"/>
-                <a:gd name="connisteX1" fmla="*/ 0 w 2532380"/>
-                <a:gd name="connsiteY1" fmla="*/ 10795 h 10795"/>
-              </a:gdLst>
-              <a:ahLst/>
-              <a:cxnLst>
-                <a:cxn ang="0">
-                  <a:pos x="connisteX0" y="connsiteY0"/>
-                </a:cxn>
-                <a:cxn ang="0">
-                  <a:pos x="connisteX1" y="connsiteY1"/>
-                </a:cxn>
-              </a:cxnLst>
-              <a:rect l="l" t="t" r="r" b="b"/>
-              <a:pathLst>
-                <a:path w="2532380" h="10795">
-                  <a:moveTo>
-                    <a:pt x="2532380" y="0"/>
-                  </a:moveTo>
-                  <a:lnTo>
-                    <a:pt x="0" y="10795"/>
-                  </a:lnTo>
-                </a:path>
-              </a:pathLst>
-            </a:custGeom>
-            <a:noFill/>
-            <a:ln>
-              <a:solidFill>
-                <a:schemeClr val="tx1">
-                  <a:lumMod val="85000"/>
-                  <a:lumOff val="15000"/>
-                </a:schemeClr>
-              </a:solidFill>
-              <a:tailEnd type="oval"/>
-            </a:ln>
-          </p:spPr>
-          <p:style>
-            <a:lnRef idx="2">
-              <a:schemeClr val="accent1">
-                <a:lumMod val="75000"/>
-              </a:schemeClr>
-            </a:lnRef>
-            <a:fillRef idx="1">
-              <a:schemeClr val="accent1"/>
-            </a:fillRef>
-            <a:effectRef idx="0">
-              <a:srgbClr val="FFFFFF"/>
-            </a:effectRef>
-            <a:fontRef idx="minor">
-              <a:schemeClr val="lt1"/>
-            </a:fontRef>
-          </p:style>
-          <p:txBody>
-            <a:bodyPr rtlCol="0" anchor="ctr"/>
-            <a:p>
-              <a:pPr algn="ctr"/>
-              <a:endParaRPr lang="zh-CN" altLang="en-US"/>
-            </a:p>
-          </p:txBody>
-        </p:sp>
-        <p:sp>
-          <p:nvSpPr>
-            <p:cNvPr id="9" name="任意多边形 8"/>
-            <p:cNvSpPr/>
-            <p:nvPr/>
-          </p:nvSpPr>
-          <p:spPr>
-            <a:xfrm>
-              <a:off x="1531" y="2891"/>
-              <a:ext cx="1644" cy="17"/>
-            </a:xfrm>
-            <a:custGeom>
-              <a:avLst/>
-              <a:gdLst>
-                <a:gd name="connisteX0" fmla="*/ 2532380 w 2532380"/>
-                <a:gd name="connsiteY0" fmla="*/ 0 h 10795"/>
-                <a:gd name="connisteX1" fmla="*/ 0 w 2532380"/>
-                <a:gd name="connsiteY1" fmla="*/ 10795 h 10795"/>
-              </a:gdLst>
-              <a:ahLst/>
-              <a:cxnLst>
-                <a:cxn ang="0">
-                  <a:pos x="connisteX0" y="connsiteY0"/>
-                </a:cxn>
-                <a:cxn ang="0">
-                  <a:pos x="connisteX1" y="connsiteY1"/>
-                </a:cxn>
-              </a:cxnLst>
-              <a:rect l="l" t="t" r="r" b="b"/>
-              <a:pathLst>
-                <a:path w="2532380" h="10795">
-                  <a:moveTo>
-                    <a:pt x="2532380" y="0"/>
-                  </a:moveTo>
-                  <a:lnTo>
-                    <a:pt x="0" y="10795"/>
-                  </a:lnTo>
-                </a:path>
-              </a:pathLst>
-            </a:custGeom>
-            <a:noFill/>
-            <a:ln>
-              <a:solidFill>
-                <a:schemeClr val="tx1">
-                  <a:lumMod val="85000"/>
-                  <a:lumOff val="15000"/>
-                </a:schemeClr>
-              </a:solidFill>
-              <a:tailEnd type="oval"/>
-            </a:ln>
-          </p:spPr>
-          <p:style>
-            <a:lnRef idx="2">
-              <a:schemeClr val="accent1">
-                <a:lumMod val="75000"/>
-              </a:schemeClr>
-            </a:lnRef>
-            <a:fillRef idx="1">
-              <a:schemeClr val="accent1"/>
-            </a:fillRef>
-            <a:effectRef idx="0">
-              <a:srgbClr val="FFFFFF"/>
-            </a:effectRef>
-            <a:fontRef idx="minor">
-              <a:schemeClr val="lt1"/>
-            </a:fontRef>
-          </p:style>
-          <p:txBody>
-            <a:bodyPr rtlCol="0" anchor="ctr"/>
-            <a:p>
-              <a:pPr algn="ctr"/>
-              <a:endParaRPr lang="zh-CN" altLang="en-US"/>
-            </a:p>
-          </p:txBody>
-        </p:sp>
-        <p:sp>
-          <p:nvSpPr>
-            <p:cNvPr id="10" name="任意多边形 9"/>
-            <p:cNvSpPr/>
-            <p:nvPr/>
-          </p:nvSpPr>
-          <p:spPr>
-            <a:xfrm>
-              <a:off x="1494" y="2908"/>
-              <a:ext cx="35" cy="6066"/>
-            </a:xfrm>
-            <a:custGeom>
-              <a:avLst/>
-              <a:gdLst>
-                <a:gd name="connisteX0" fmla="*/ 0 w 22225"/>
-                <a:gd name="connsiteY0" fmla="*/ 0 h 2347595"/>
-                <a:gd name="connisteX1" fmla="*/ 22225 w 22225"/>
-                <a:gd name="connsiteY1" fmla="*/ 2347595 h 2347595"/>
-              </a:gdLst>
-              <a:ahLst/>
-              <a:cxnLst>
-                <a:cxn ang="0">
-                  <a:pos x="connisteX0" y="connsiteY0"/>
-                </a:cxn>
-                <a:cxn ang="0">
-                  <a:pos x="connisteX1" y="connsiteY1"/>
-                </a:cxn>
-              </a:cxnLst>
-              <a:rect l="l" t="t" r="r" b="b"/>
-              <a:pathLst>
-                <a:path w="22225" h="2347595">
-                  <a:moveTo>
-                    <a:pt x="0" y="0"/>
-                  </a:moveTo>
-                  <a:lnTo>
-                    <a:pt x="22225" y="2347595"/>
-                  </a:lnTo>
-                </a:path>
-              </a:pathLst>
-            </a:custGeom>
-            <a:noFill/>
-            <a:ln w="12700" cmpd="sng">
-              <a:solidFill>
-                <a:schemeClr val="accent1">
-                  <a:shade val="50000"/>
-                </a:schemeClr>
-              </a:solidFill>
-              <a:prstDash val="lgDash"/>
-              <a:tailEnd type="none"/>
-            </a:ln>
-          </p:spPr>
-          <p:style>
-            <a:lnRef idx="2">
-              <a:schemeClr val="accent1">
-                <a:lumMod val="75000"/>
-              </a:schemeClr>
-            </a:lnRef>
-            <a:fillRef idx="1">
-              <a:schemeClr val="accent1"/>
-            </a:fillRef>
-            <a:effectRef idx="0">
-              <a:srgbClr val="FFFFFF"/>
-            </a:effectRef>
-            <a:fontRef idx="minor">
-              <a:schemeClr val="lt1"/>
-            </a:fontRef>
-          </p:style>
-          <p:txBody>
-            <a:bodyPr rtlCol="0" anchor="ctr"/>
-            <a:p>
-              <a:pPr algn="ctr"/>
-              <a:endParaRPr lang="zh-CN" altLang="en-US"/>
-            </a:p>
-          </p:txBody>
-        </p:sp>
-        <p:sp>
-          <p:nvSpPr>
-            <p:cNvPr id="12" name="文本框 11"/>
-            <p:cNvSpPr txBox="1"/>
-            <p:nvPr/>
-          </p:nvSpPr>
-          <p:spPr>
-            <a:xfrm>
-              <a:off x="182" y="5470"/>
-              <a:ext cx="2113" cy="649"/>
-            </a:xfrm>
-            <a:prstGeom prst="rect">
-              <a:avLst/>
-            </a:prstGeom>
-            <a:noFill/>
-          </p:spPr>
-          <p:txBody>
-            <a:bodyPr wrap="square" rtlCol="0">
-              <a:noAutofit/>
-            </a:bodyPr>
-            <a:p>
-              <a:r>
-                <a:rPr lang="en-US" altLang="zh-CN"/>
-                <a:t>750mm</a:t>
-              </a:r>
-              <a:endParaRPr lang="en-US" altLang="zh-CN"/>
-            </a:p>
-          </p:txBody>
-        </p:sp>
-        <p:sp>
-          <p:nvSpPr>
-            <p:cNvPr id="16" name="文本框 15"/>
-            <p:cNvSpPr txBox="1"/>
-            <p:nvPr/>
-          </p:nvSpPr>
-          <p:spPr>
-            <a:xfrm>
-              <a:off x="3580" y="1685"/>
-              <a:ext cx="10063" cy="580"/>
-            </a:xfrm>
-            <a:prstGeom prst="rect">
-              <a:avLst/>
-            </a:prstGeom>
-            <a:noFill/>
-          </p:spPr>
-          <p:txBody>
-            <a:bodyPr wrap="square" rtlCol="0">
-              <a:spAutoFit/>
-            </a:bodyPr>
-            <a:p>
-              <a:r>
-                <a:rPr lang="en-US" altLang="zh-CN"/>
-                <a:t>An overhead web camera</a:t>
-              </a:r>
-              <a:r>
-                <a:rPr lang="en-US" altLang="zh-CN"/>
-                <a:t> captures visual data.</a:t>
-              </a:r>
-              <a:endParaRPr lang="en-US" altLang="zh-CN"/>
-            </a:p>
-          </p:txBody>
-        </p:sp>
-        <p:sp>
-          <p:nvSpPr>
-            <p:cNvPr id="18" name="任意多边形 17"/>
-            <p:cNvSpPr/>
-            <p:nvPr/>
-          </p:nvSpPr>
-          <p:spPr>
-            <a:xfrm>
-              <a:off x="5641" y="9395"/>
-              <a:ext cx="3798" cy="34"/>
-            </a:xfrm>
-            <a:custGeom>
-              <a:avLst/>
-              <a:gdLst>
-                <a:gd name="connisteX0" fmla="*/ 0 w 3412490"/>
-                <a:gd name="connsiteY0" fmla="*/ 0 h 21590"/>
-                <a:gd name="connisteX1" fmla="*/ 3412490 w 3412490"/>
-                <a:gd name="connsiteY1" fmla="*/ 21590 h 21590"/>
-              </a:gdLst>
-              <a:ahLst/>
-              <a:cxnLst>
-                <a:cxn ang="0">
-                  <a:pos x="connisteX0" y="connsiteY0"/>
-                </a:cxn>
-                <a:cxn ang="0">
-                  <a:pos x="connisteX1" y="connsiteY1"/>
-                </a:cxn>
-              </a:cxnLst>
-              <a:rect l="l" t="t" r="r" b="b"/>
-              <a:pathLst>
-                <a:path w="3412490" h="21590">
-                  <a:moveTo>
-                    <a:pt x="0" y="0"/>
-                  </a:moveTo>
-                  <a:lnTo>
-                    <a:pt x="3412490" y="21590"/>
-                  </a:lnTo>
-                </a:path>
-              </a:pathLst>
-            </a:custGeom>
-            <a:noFill/>
-            <a:ln>
-              <a:solidFill>
-                <a:schemeClr val="tx1">
-                  <a:lumMod val="85000"/>
-                  <a:lumOff val="15000"/>
-                </a:schemeClr>
-              </a:solidFill>
-              <a:tailEnd type="oval"/>
-            </a:ln>
-          </p:spPr>
-          <p:style>
-            <a:lnRef idx="2">
-              <a:schemeClr val="accent1">
-                <a:lumMod val="75000"/>
-              </a:schemeClr>
-            </a:lnRef>
-            <a:fillRef idx="1">
-              <a:schemeClr val="accent1"/>
-            </a:fillRef>
-            <a:effectRef idx="0">
-              <a:srgbClr val="FFFFFF"/>
-            </a:effectRef>
-            <a:fontRef idx="minor">
-              <a:schemeClr val="lt1"/>
-            </a:fontRef>
-          </p:style>
-          <p:txBody>
-            <a:bodyPr rtlCol="0" anchor="ctr"/>
-            <a:p>
-              <a:pPr algn="ctr"/>
-              <a:endParaRPr lang="zh-CN" altLang="en-US"/>
-            </a:p>
-          </p:txBody>
-        </p:sp>
-        <p:sp>
-          <p:nvSpPr>
-            <p:cNvPr id="21" name="文本框 20"/>
-            <p:cNvSpPr txBox="1"/>
-            <p:nvPr/>
-          </p:nvSpPr>
-          <p:spPr>
-            <a:xfrm>
-              <a:off x="9553" y="8974"/>
-              <a:ext cx="4847" cy="1016"/>
-            </a:xfrm>
-            <a:prstGeom prst="rect">
-              <a:avLst/>
-            </a:prstGeom>
-            <a:noFill/>
-          </p:spPr>
-          <p:txBody>
-            <a:bodyPr wrap="square" rtlCol="0">
-              <a:spAutoFit/>
-            </a:bodyPr>
-            <a:p>
-              <a:r>
-                <a:rPr lang="en-US" altLang="zh-CN">
-                  <a:ea typeface="SimSun" panose="02010600030101010101" pitchFamily="2" charset="-122"/>
-                </a:rPr>
-                <a:t>Initial hand position.</a:t>
-              </a:r>
-              <a:br>
-                <a:rPr lang="en-US" altLang="zh-CN">
-                  <a:ea typeface="SimSun" panose="02010600030101010101" pitchFamily="2" charset="-122"/>
-                </a:rPr>
-              </a:br>
-              <a:r>
-                <a:rPr lang="en-US" altLang="zh-CN">
-                  <a:ea typeface="SimSun" panose="02010600030101010101" pitchFamily="2" charset="-122"/>
-                </a:rPr>
-                <a:t>30 mm from the object.</a:t>
-              </a:r>
-              <a:endParaRPr lang="en-US" altLang="zh-CN">
-                <a:ea typeface="SimSun" panose="02010600030101010101" pitchFamily="2" charset="-122"/>
-              </a:endParaRPr>
-            </a:p>
-          </p:txBody>
-        </p:sp>
-        <p:sp>
-          <p:nvSpPr>
-            <p:cNvPr id="22" name="文本框 21"/>
-            <p:cNvSpPr txBox="1"/>
-            <p:nvPr/>
-          </p:nvSpPr>
-          <p:spPr>
-            <a:xfrm>
-              <a:off x="5212" y="8659"/>
-              <a:ext cx="4703" cy="647"/>
-            </a:xfrm>
-            <a:prstGeom prst="rect">
-              <a:avLst/>
-            </a:prstGeom>
-            <a:noFill/>
-          </p:spPr>
-          <p:txBody>
-            <a:bodyPr wrap="square" rtlCol="0">
-              <a:noAutofit/>
-            </a:bodyPr>
-            <a:p>
-              <a:r>
-                <a:rPr lang="en-US" altLang="zh-CN"/>
-                <a:t>30mm</a:t>
-              </a:r>
-              <a:endParaRPr lang="en-US" altLang="zh-CN"/>
-            </a:p>
-          </p:txBody>
-        </p:sp>
-        <p:cxnSp>
-          <p:nvCxnSpPr>
-            <p:cNvPr id="2" name="直接箭头连接符 1"/>
-            <p:cNvCxnSpPr/>
-            <p:nvPr/>
-          </p:nvCxnSpPr>
-          <p:spPr>
-            <a:xfrm flipV="1">
-              <a:off x="5076" y="8659"/>
-              <a:ext cx="228" cy="542"/>
-            </a:xfrm>
-            <a:prstGeom prst="straightConnector1">
-              <a:avLst/>
-            </a:prstGeom>
-            <a:ln w="12700">
-              <a:solidFill>
-                <a:schemeClr val="tx1">
-                  <a:lumMod val="95000"/>
-                  <a:lumOff val="5000"/>
-                </a:schemeClr>
-              </a:solidFill>
-              <a:prstDash val="dash"/>
-              <a:headEnd type="arrow"/>
-              <a:tailEnd type="arrow"/>
-            </a:ln>
-          </p:spPr>
-          <p:style>
-            <a:lnRef idx="0">
-              <a:schemeClr val="accent1"/>
-            </a:lnRef>
-            <a:fillRef idx="0">
-              <a:srgbClr val="FFFFFF"/>
-            </a:fillRef>
-            <a:effectRef idx="0">
-              <a:srgbClr val="FFFFFF"/>
-            </a:effectRef>
-            <a:fontRef idx="minor">
-              <a:schemeClr val="tx1"/>
-            </a:fontRef>
-          </p:style>
-        </p:cxnSp>
-        <p:sp>
-          <p:nvSpPr>
-            <p:cNvPr id="3" name="任意多边形 2"/>
-            <p:cNvSpPr/>
-            <p:nvPr/>
-          </p:nvSpPr>
-          <p:spPr>
-            <a:xfrm>
-              <a:off x="3435" y="1900"/>
-              <a:ext cx="18" cy="907"/>
-            </a:xfrm>
-            <a:custGeom>
-              <a:avLst/>
-              <a:gdLst>
-                <a:gd name="connisteX0" fmla="*/ 11430 w 11430"/>
-                <a:gd name="connsiteY0" fmla="*/ 427355 h 427355"/>
-                <a:gd name="connisteX1" fmla="*/ 0 w 11430"/>
-                <a:gd name="connsiteY1" fmla="*/ 0 h 427355"/>
-              </a:gdLst>
-              <a:ahLst/>
-              <a:cxnLst>
-                <a:cxn ang="0">
-                  <a:pos x="connisteX0" y="connsiteY0"/>
-                </a:cxn>
-                <a:cxn ang="0">
-                  <a:pos x="connisteX1" y="connsiteY1"/>
-                </a:cxn>
-              </a:cxnLst>
-              <a:rect l="l" t="t" r="r" b="b"/>
-              <a:pathLst>
-                <a:path w="11430" h="427355">
-                  <a:moveTo>
-                    <a:pt x="11430" y="427355"/>
-                  </a:moveTo>
-                  <a:lnTo>
-                    <a:pt x="0" y="0"/>
-                  </a:lnTo>
-                </a:path>
-              </a:pathLst>
-            </a:custGeom>
-            <a:noFill/>
-            <a:ln>
-              <a:solidFill>
-                <a:schemeClr val="tx1">
-                  <a:lumMod val="85000"/>
-                  <a:lumOff val="15000"/>
-                </a:schemeClr>
-              </a:solidFill>
-              <a:tailEnd type="oval"/>
-            </a:ln>
-          </p:spPr>
-          <p:style>
-            <a:lnRef idx="2">
-              <a:schemeClr val="accent1">
-                <a:lumMod val="75000"/>
-              </a:schemeClr>
-            </a:lnRef>
-            <a:fillRef idx="1">
-              <a:schemeClr val="accent1"/>
-            </a:fillRef>
-            <a:effectRef idx="0">
-              <a:srgbClr val="FFFFFF"/>
-            </a:effectRef>
-            <a:fontRef idx="minor">
-              <a:schemeClr val="lt1"/>
-            </a:fontRef>
-          </p:style>
-          <p:txBody>
-            <a:bodyPr rtlCol="0" anchor="ctr"/>
-            <a:p>
-              <a:pPr algn="ctr"/>
-              <a:endParaRPr lang="zh-CN" altLang="en-US"/>
-            </a:p>
-          </p:txBody>
-        </p:sp>
-      </p:grpSp>
-    </p:spTree>
-  </p:cSld>
-  <p:clrMapOvr>
-    <a:masterClrMapping/>
-  </p:clrMapOvr>
-  <p:timing>
-    <p:tnLst>
-      <p:par>
-        <p:cTn id="1" dur="indefinite" restart="never" nodeType="tmRoot"/>
-      </p:par>
-    </p:tnLst>
-  </p:timing>
-</p:sld>
-</file>
-
-<file path=ppt/slides/slide4.xml><?xml version="1.0" encoding="utf-8"?>
-<p:sld xmlns:a="http://schemas.openxmlformats.org/drawingml/2006/main" xmlns:r="http://schemas.openxmlformats.org/officeDocument/2006/relationships" xmlns:p="http://schemas.openxmlformats.org/presentationml/2006/main">
-  <p:cSld>
-    <p:spTree>
-      <p:nvGrpSpPr>
-        <p:cNvPr id="1" name=""/>
-        <p:cNvGrpSpPr/>
-        <p:nvPr/>
-      </p:nvGrpSpPr>
-      <p:grpSpPr/>
-      <p:sp>
-        <p:nvSpPr>
-          <p:cNvPr id="6" name="文本框 5"/>
-          <p:cNvSpPr>
-            <a:spLocks noGrp="1"/>
-          </p:cNvSpPr>
-          <p:nvPr/>
-        </p:nvSpPr>
-        <p:spPr>
-          <a:xfrm>
-            <a:off x="275590" y="226695"/>
-            <a:ext cx="8522970" cy="583565"/>
-          </a:xfrm>
-          <a:prstGeom prst="rect">
-            <a:avLst/>
-          </a:prstGeom>
-          <a:noFill/>
-        </p:spPr>
-        <p:txBody>
-          <a:bodyPr wrap="square">
-            <a:spAutoFit/>
-          </a:bodyPr>
-          <a:lstStyle/>
-          <a:p>
-            <a:r>
-              <a:rPr lang="en-US" altLang="zh-CN" sz="3200" b="1">
-                <a:latin typeface="Times New Roman" panose="02020603050405020304"/>
-                <a:ea typeface="SimSun" panose="02010600030101010101" pitchFamily="2" charset="-122"/>
-                <a:cs typeface="Times New Roman" panose="02020603050405020304"/>
-                <a:sym typeface="+mn-ea"/>
-              </a:rPr>
-              <a:t>Example Trial</a:t>
-            </a:r>
-            <a:endParaRPr lang="en-US" altLang="zh-CN" sz="3200" b="1">
-              <a:latin typeface="Times New Roman" panose="02020603050405020304"/>
-              <a:ea typeface="SimSun" panose="02010600030101010101" pitchFamily="2" charset="-122"/>
-              <a:cs typeface="Times New Roman" panose="02020603050405020304"/>
-              <a:sym typeface="+mn-ea"/>
-            </a:endParaRPr>
-          </a:p>
-        </p:txBody>
-      </p:sp>
-      <p:sp>
-        <p:nvSpPr>
-          <p:cNvPr id="2" name="文本框 1"/>
-          <p:cNvSpPr txBox="1"/>
-          <p:nvPr/>
-        </p:nvSpPr>
-        <p:spPr>
-          <a:xfrm>
-            <a:off x="1527175" y="1793875"/>
-            <a:ext cx="3048000" cy="368300"/>
-          </a:xfrm>
-          <a:prstGeom prst="rect">
-            <a:avLst/>
-          </a:prstGeom>
-          <a:noFill/>
-        </p:spPr>
-        <p:txBody>
-          <a:bodyPr wrap="square" rtlCol="0">
-            <a:spAutoFit/>
-          </a:bodyPr>
-          <a:p>
-            <a:r>
-              <a:rPr lang="en-US" altLang="zh-CN"/>
-              <a:t>Camera View:</a:t>
-            </a:r>
-            <a:endParaRPr lang="en-US" altLang="zh-CN"/>
-          </a:p>
-        </p:txBody>
-      </p:sp>
-      <p:sp>
-        <p:nvSpPr>
-          <p:cNvPr id="3" name="文本框 2"/>
-          <p:cNvSpPr txBox="1"/>
-          <p:nvPr/>
-        </p:nvSpPr>
-        <p:spPr>
-          <a:xfrm>
-            <a:off x="1046480" y="925830"/>
-            <a:ext cx="1504315" cy="368300"/>
-          </a:xfrm>
-          <a:prstGeom prst="rect">
-            <a:avLst/>
-          </a:prstGeom>
-          <a:noFill/>
-        </p:spPr>
-        <p:txBody>
-          <a:bodyPr wrap="square" rtlCol="0">
-            <a:spAutoFit/>
-          </a:bodyPr>
-          <a:p>
-            <a:pPr algn="ctr"/>
-            <a:r>
-              <a:rPr lang="en-US" altLang="zh-CN">
-                <a:ea typeface="SimSun" panose="02010600030101010101" pitchFamily="2" charset="-122"/>
-              </a:rPr>
-              <a:t>Initial Phase</a:t>
-            </a:r>
-            <a:endParaRPr lang="en-US">
-              <a:ea typeface="SimSun" panose="02010600030101010101" pitchFamily="2" charset="-122"/>
-            </a:endParaRPr>
-          </a:p>
-        </p:txBody>
-      </p:sp>
-      <p:sp>
-        <p:nvSpPr>
-          <p:cNvPr id="4" name="文本框 3"/>
-          <p:cNvSpPr txBox="1"/>
-          <p:nvPr/>
-        </p:nvSpPr>
-        <p:spPr>
-          <a:xfrm>
-            <a:off x="1151255" y="1294130"/>
-            <a:ext cx="1143635" cy="337185"/>
-          </a:xfrm>
-          <a:prstGeom prst="rect">
-            <a:avLst/>
-          </a:prstGeom>
-        </p:spPr>
-        <p:txBody>
-          <a:bodyPr wrap="square">
-            <a:spAutoFit/>
-          </a:bodyPr>
-          <a:p>
-            <a:pPr algn="ctr"/>
-            <a:r>
-              <a:rPr lang="en-US" altLang="zh-CN" sz="1600">
-                <a:solidFill>
-                  <a:srgbClr val="6E6E6E"/>
-                </a:solidFill>
-              </a:rPr>
-              <a:t>10 frames</a:t>
-            </a:r>
-            <a:endParaRPr lang="en-US" altLang="zh-CN" sz="1600">
-              <a:solidFill>
-                <a:srgbClr val="6E6E6E"/>
-              </a:solidFill>
-            </a:endParaRPr>
-          </a:p>
-        </p:txBody>
-      </p:sp>
-      <p:sp>
-        <p:nvSpPr>
-          <p:cNvPr id="5" name="右箭头 4"/>
-          <p:cNvSpPr/>
-          <p:nvPr/>
-        </p:nvSpPr>
-        <p:spPr>
-          <a:xfrm>
-            <a:off x="2667000" y="1160145"/>
-            <a:ext cx="658495" cy="253365"/>
-          </a:xfrm>
-          <a:prstGeom prst="rightArrow">
-            <a:avLst>
-              <a:gd name="adj1" fmla="val 50000"/>
-              <a:gd name="adj2" fmla="val 86215"/>
-            </a:avLst>
-          </a:prstGeom>
-          <a:solidFill>
-            <a:srgbClr val="00B050"/>
-          </a:solidFill>
-          <a:ln>
-            <a:noFill/>
-            <a:tailEnd type="oval"/>
-          </a:ln>
-        </p:spPr>
-        <p:style>
-          <a:lnRef idx="2">
-            <a:schemeClr val="accent1">
-              <a:lumMod val="75000"/>
-            </a:schemeClr>
-          </a:lnRef>
-          <a:fillRef idx="1">
-            <a:schemeClr val="accent1"/>
-          </a:fillRef>
-          <a:effectRef idx="0">
-            <a:srgbClr val="FFFFFF"/>
-          </a:effectRef>
-          <a:fontRef idx="minor">
-            <a:schemeClr val="lt1"/>
-          </a:fontRef>
-        </p:style>
-        <p:txBody>
-          <a:bodyPr rtlCol="0" anchor="ctr"/>
-          <a:p>
-            <a:pPr algn="ctr"/>
-            <a:endParaRPr lang="zh-CN" altLang="en-US"/>
-          </a:p>
-        </p:txBody>
-      </p:sp>
-      <p:sp>
-        <p:nvSpPr>
-          <p:cNvPr id="7" name="文本框 6"/>
-          <p:cNvSpPr txBox="1"/>
-          <p:nvPr/>
-        </p:nvSpPr>
-        <p:spPr>
-          <a:xfrm>
-            <a:off x="3441700" y="925830"/>
-            <a:ext cx="1919605" cy="368300"/>
-          </a:xfrm>
-          <a:prstGeom prst="rect">
-            <a:avLst/>
-          </a:prstGeom>
-          <a:noFill/>
-        </p:spPr>
-        <p:txBody>
-          <a:bodyPr wrap="square" rtlCol="0">
-            <a:spAutoFit/>
-          </a:bodyPr>
-          <a:p>
-            <a:pPr algn="ctr"/>
-            <a:r>
-              <a:rPr lang="en-US" altLang="zh-CN">
-                <a:ea typeface="SimSun" panose="02010600030101010101" pitchFamily="2" charset="-122"/>
-              </a:rPr>
-              <a:t>Grasping Phase</a:t>
-            </a:r>
-            <a:endParaRPr lang="en-US" altLang="zh-CN">
-              <a:ea typeface="SimSun" panose="02010600030101010101" pitchFamily="2" charset="-122"/>
-            </a:endParaRPr>
-          </a:p>
-        </p:txBody>
-      </p:sp>
-      <p:sp>
-        <p:nvSpPr>
-          <p:cNvPr id="9" name="右箭头 8"/>
-          <p:cNvSpPr/>
-          <p:nvPr/>
-        </p:nvSpPr>
-        <p:spPr>
-          <a:xfrm>
-            <a:off x="5588000" y="1160145"/>
-            <a:ext cx="658495" cy="253365"/>
-          </a:xfrm>
-          <a:prstGeom prst="rightArrow">
-            <a:avLst>
-              <a:gd name="adj1" fmla="val 50000"/>
-              <a:gd name="adj2" fmla="val 86215"/>
-            </a:avLst>
-          </a:prstGeom>
-          <a:solidFill>
-            <a:srgbClr val="00B050"/>
-          </a:solidFill>
-          <a:ln>
-            <a:noFill/>
-            <a:tailEnd type="oval"/>
-          </a:ln>
-        </p:spPr>
-        <p:style>
-          <a:lnRef idx="2">
-            <a:schemeClr val="accent1">
-              <a:lumMod val="75000"/>
-            </a:schemeClr>
-          </a:lnRef>
-          <a:fillRef idx="1">
-            <a:schemeClr val="accent1"/>
-          </a:fillRef>
-          <a:effectRef idx="0">
-            <a:srgbClr val="FFFFFF"/>
-          </a:effectRef>
-          <a:fontRef idx="minor">
-            <a:schemeClr val="lt1"/>
-          </a:fontRef>
-        </p:style>
-        <p:txBody>
-          <a:bodyPr rtlCol="0" anchor="ctr"/>
-          <a:p>
-            <a:pPr algn="ctr"/>
-            <a:endParaRPr lang="zh-CN" altLang="en-US"/>
-          </a:p>
-        </p:txBody>
-      </p:sp>
-      <p:sp>
-        <p:nvSpPr>
-          <p:cNvPr id="10" name="文本框 9"/>
-          <p:cNvSpPr txBox="1"/>
-          <p:nvPr/>
-        </p:nvSpPr>
-        <p:spPr>
-          <a:xfrm>
-            <a:off x="3634105" y="1288415"/>
-            <a:ext cx="1612900" cy="337185"/>
-          </a:xfrm>
-          <a:prstGeom prst="rect">
-            <a:avLst/>
-          </a:prstGeom>
-        </p:spPr>
-        <p:txBody>
-          <a:bodyPr wrap="square">
-            <a:spAutoFit/>
-          </a:bodyPr>
-          <a:p>
-            <a:pPr algn="ctr">
-              <a:buClrTx/>
-              <a:buSzTx/>
-              <a:buFontTx/>
-            </a:pPr>
-            <a:r>
-              <a:rPr lang="en-US" altLang="zh-CN" sz="1600">
-                <a:solidFill>
-                  <a:srgbClr val="6E6E6E"/>
-                </a:solidFill>
-              </a:rPr>
-              <a:t>Variable duration</a:t>
-            </a:r>
-            <a:endParaRPr lang="en-US" altLang="zh-CN" sz="1600">
-              <a:solidFill>
-                <a:srgbClr val="6E6E6E"/>
-              </a:solidFill>
-            </a:endParaRPr>
-          </a:p>
-        </p:txBody>
-      </p:sp>
-      <p:sp>
-        <p:nvSpPr>
-          <p:cNvPr id="11" name="文本框 10"/>
-          <p:cNvSpPr txBox="1"/>
-          <p:nvPr/>
-        </p:nvSpPr>
-        <p:spPr>
-          <a:xfrm>
-            <a:off x="6137910" y="925830"/>
-            <a:ext cx="1919605" cy="368300"/>
-          </a:xfrm>
-          <a:prstGeom prst="rect">
-            <a:avLst/>
-          </a:prstGeom>
-          <a:noFill/>
-        </p:spPr>
-        <p:txBody>
-          <a:bodyPr wrap="square" rtlCol="0">
-            <a:spAutoFit/>
-          </a:bodyPr>
-          <a:p>
-            <a:pPr algn="ctr"/>
-            <a:r>
-              <a:rPr lang="en-US" altLang="zh-CN">
-                <a:ea typeface="SimSun" panose="02010600030101010101" pitchFamily="2" charset="-122"/>
-              </a:rPr>
-              <a:t>Hold Phase</a:t>
-            </a:r>
-            <a:endParaRPr lang="en-US" altLang="zh-CN">
-              <a:ea typeface="SimSun" panose="02010600030101010101" pitchFamily="2" charset="-122"/>
-            </a:endParaRPr>
-          </a:p>
-        </p:txBody>
-      </p:sp>
-      <p:sp>
-        <p:nvSpPr>
-          <p:cNvPr id="12" name="文本框 11"/>
-          <p:cNvSpPr txBox="1"/>
-          <p:nvPr/>
-        </p:nvSpPr>
-        <p:spPr>
-          <a:xfrm>
-            <a:off x="6330315" y="1288415"/>
-            <a:ext cx="1612900" cy="337185"/>
-          </a:xfrm>
-          <a:prstGeom prst="rect">
-            <a:avLst/>
-          </a:prstGeom>
-        </p:spPr>
-        <p:txBody>
-          <a:bodyPr wrap="square">
-            <a:spAutoFit/>
-          </a:bodyPr>
-          <a:p>
-            <a:pPr algn="ctr">
-              <a:buClrTx/>
-              <a:buSzTx/>
-              <a:buFontTx/>
-            </a:pPr>
-            <a:r>
-              <a:rPr lang="en-US" altLang="zh-CN" sz="1600">
-                <a:solidFill>
-                  <a:srgbClr val="6E6E6E"/>
-                </a:solidFill>
-                <a:sym typeface="+mn-ea"/>
-              </a:rPr>
-              <a:t>10 frames</a:t>
-            </a:r>
-            <a:endParaRPr lang="en-US" altLang="zh-CN" sz="1600">
-              <a:solidFill>
-                <a:srgbClr val="6E6E6E"/>
-              </a:solidFill>
-            </a:endParaRPr>
-          </a:p>
-        </p:txBody>
-      </p:sp>
-      <p:pic>
-        <p:nvPicPr>
-          <p:cNvPr id="8" name="10月20日(1)">
-            <a:hlinkClick r:id="" action="ppaction://media"/>
-            <a:hlinkHover r:id="" action="ppaction://media"/>
-          </p:cNvPr>
-          <p:cNvPicPr>
-            <a:picLocks noChangeAspect="1"/>
-          </p:cNvPicPr>
-          <p:nvPr>
-            <a:videoFile r:link="rId1"/>
-            <p:extLst>
-              <p:ext uri="{DAA4B4D4-6D71-4841-9C94-3DE7FCFB9230}">
-                <p14:media xmlns:p14="http://schemas.microsoft.com/office/powerpoint/2010/main" r:embed="rId2"/>
-              </p:ext>
-            </p:extLst>
-          </p:nvPr>
-        </p:nvPicPr>
-        <p:blipFill>
-          <a:blip r:embed="rId3"/>
-          <a:stretch>
-            <a:fillRect/>
-          </a:stretch>
-        </p:blipFill>
-        <p:spPr>
-          <a:xfrm>
-            <a:off x="1527175" y="2141855"/>
-            <a:ext cx="6019800" cy="4514850"/>
-          </a:xfrm>
-          <a:prstGeom prst="rect">
-            <a:avLst/>
-          </a:prstGeom>
-        </p:spPr>
-      </p:pic>
-    </p:spTree>
-  </p:cSld>
-  <p:clrMapOvr>
-    <a:masterClrMapping/>
-  </p:clrMapOvr>
-  <p:timing>
-    <p:tnLst>
-      <p:par>
-        <p:cTn id="1" dur="indefinite" restart="never" nodeType="tmRoot">
-          <p:childTnLst>
-            <p:video fullScrn="0">
-              <p:cMediaNode>
-                <p:cTn id="2" fill="hold" display="1">
-                  <p:stCondLst>
-                    <p:cond delay="indefinite"/>
-                  </p:stCondLst>
-                </p:cTn>
-                <p:tgtEl>
-                  <p:spTgt spid="8"/>
-                </p:tgtEl>
-              </p:cMediaNode>
-            </p:video>
-            <p:seq concurrent="1" nextAc="seek">
-              <p:cTn id="3" restart="whenNotActive" fill="hold" evtFilter="cancelBubble" nodeType="interactiveSeq">
-                <p:stCondLst>
-                  <p:cond evt="onClick" delay="0">
-                    <p:tgtEl>
-                      <p:spTgt spid="8"/>
-                    </p:tgtEl>
-                  </p:cond>
-                </p:stCondLst>
-                <p:endSync evt="end" delay="0">
-                  <p:rtn val="all"/>
-                </p:endSync>
-                <p:childTnLst>
-                  <p:par>
-                    <p:cTn id="4" fill="hold">
-                      <p:stCondLst>
-                        <p:cond delay="0"/>
-                      </p:stCondLst>
-                      <p:childTnLst>
-                        <p:par>
-                          <p:cTn id="5" fill="hold">
-                            <p:stCondLst>
-                              <p:cond delay="0"/>
-                            </p:stCondLst>
-                            <p:childTnLst>
-                              <p:par>
-                                <p:cTn id="6" presetID="2" presetClass="mediacall" presetSubtype="0" fill="hold" nodeType="clickEffect">
-                                  <p:stCondLst>
-                                    <p:cond delay="0"/>
-                                  </p:stCondLst>
-                                  <p:childTnLst>
-                                    <p:cmd type="call" cmd="togglePause">
-                                      <p:cBhvr additive="base">
-                                        <p:cTn id="7" dur="1" fill="hold"/>
-                                        <p:tgtEl>
-                                          <p:spTgt spid="8"/>
-                                        </p:tgtEl>
-                                      </p:cBhvr>
-                                    </p:cmd>
-                                  </p:childTnLst>
-                                </p:cTn>
-                              </p:par>
-                            </p:childTnLst>
-                          </p:cTn>
-                        </p:par>
-                      </p:childTnLst>
-                    </p:cTn>
-                  </p:par>
-                </p:childTnLst>
-              </p:cTn>
-              <p:nextCondLst>
-                <p:cond evt="onClick" delay="0">
-                  <p:tgtEl>
-                    <p:spTgt spid="8"/>
-                  </p:tgtEl>
-                </p:cond>
-              </p:nextCondLst>
-            </p:seq>
-          </p:childTnLst>
-        </p:cTn>
-      </p:par>
-    </p:tnLst>
-  </p:timing>
-</p:sld>
-</file>
-
-<file path=ppt/slides/slide5.xml><?xml version="1.0" encoding="utf-8"?>
-<p:sld xmlns:a="http://schemas.openxmlformats.org/drawingml/2006/main" xmlns:r="http://schemas.openxmlformats.org/officeDocument/2006/relationships" xmlns:p="http://schemas.openxmlformats.org/presentationml/2006/main">
-  <p:cSld>
-    <p:spTree>
-      <p:nvGrpSpPr>
-        <p:cNvPr id="1" name=""/>
-        <p:cNvGrpSpPr/>
-        <p:nvPr/>
-      </p:nvGrpSpPr>
-      <p:grpSpPr/>
-      <p:sp>
-        <p:nvSpPr>
-          <p:cNvPr id="6" name="文本框 5"/>
-          <p:cNvSpPr>
-            <a:spLocks noGrp="1"/>
-          </p:cNvSpPr>
-          <p:nvPr/>
-        </p:nvSpPr>
-        <p:spPr>
-          <a:xfrm>
-            <a:off x="275590" y="226695"/>
-            <a:ext cx="8522970" cy="583565"/>
-          </a:xfrm>
-          <a:prstGeom prst="rect">
-            <a:avLst/>
-          </a:prstGeom>
-          <a:noFill/>
-        </p:spPr>
-        <p:txBody>
-          <a:bodyPr wrap="square">
-            <a:spAutoFit/>
-          </a:bodyPr>
-          <a:lstStyle/>
-          <a:p>
-            <a:r>
-              <a:rPr lang="en-US" altLang="zh-CN" sz="3200" b="1">
-                <a:latin typeface="Times New Roman" panose="02020603050405020304"/>
-                <a:ea typeface="SimSun" panose="02010600030101010101" pitchFamily="2" charset="-122"/>
-                <a:cs typeface="Times New Roman" panose="02020603050405020304"/>
-                <a:sym typeface="+mn-ea"/>
-              </a:rPr>
-              <a:t>Visual Processing</a:t>
-            </a:r>
-            <a:endParaRPr lang="en-US" altLang="zh-CN" sz="3200" b="1">
-              <a:latin typeface="Times New Roman" panose="02020603050405020304"/>
-              <a:ea typeface="SimSun" panose="02010600030101010101" pitchFamily="2" charset="-122"/>
-              <a:cs typeface="Times New Roman" panose="02020603050405020304"/>
-              <a:sym typeface="+mn-ea"/>
-            </a:endParaRPr>
-          </a:p>
-        </p:txBody>
-      </p:sp>
-      <p:pic>
-        <p:nvPicPr>
-          <p:cNvPr id="14" name="图片 13" descr="10月20日(1)"/>
-          <p:cNvPicPr>
-            <a:picLocks noChangeAspect="1"/>
-          </p:cNvPicPr>
-          <p:nvPr/>
-        </p:nvPicPr>
-        <p:blipFill>
-          <a:blip r:embed="rId1"/>
-          <a:srcRect l="10347" r="10146" b="7276"/>
-          <a:stretch>
-            <a:fillRect/>
-          </a:stretch>
-        </p:blipFill>
-        <p:spPr>
-          <a:xfrm>
-            <a:off x="3691255" y="2008505"/>
-            <a:ext cx="5107305" cy="4467225"/>
-          </a:xfrm>
-          <a:prstGeom prst="rect">
-            <a:avLst/>
-          </a:prstGeom>
-        </p:spPr>
-      </p:pic>
-      <p:sp>
-        <p:nvSpPr>
-          <p:cNvPr id="18" name="文本框 17"/>
-          <p:cNvSpPr txBox="1"/>
-          <p:nvPr/>
-        </p:nvSpPr>
-        <p:spPr>
-          <a:xfrm>
-            <a:off x="133350" y="1995805"/>
-            <a:ext cx="3437890" cy="3538220"/>
-          </a:xfrm>
-          <a:prstGeom prst="rect">
-            <a:avLst/>
-          </a:prstGeom>
-        </p:spPr>
-        <p:txBody>
-          <a:bodyPr wrap="square">
-            <a:spAutoFit/>
-          </a:bodyPr>
-          <a:p>
-            <a:pPr marL="285750" indent="-285750">
-              <a:buFont typeface="Arial" panose="020B0604020202020204" pitchFamily="34" charset="0"/>
-              <a:buChar char="•"/>
-            </a:pPr>
-            <a:r>
-              <a:rPr lang="en-US" altLang="ja-JP" sz="1600"/>
-              <a:t>Variable 1 </a:t>
-            </a:r>
-            <a:r>
-              <a:rPr lang="en-US" altLang="zh-CN" sz="1600"/>
-              <a:t>Hand–Object Distance:</a:t>
-            </a:r>
-            <a:endParaRPr lang="en-US" altLang="zh-CN" sz="1600"/>
-          </a:p>
-          <a:p>
-            <a:pPr indent="457200">
-              <a:buFont typeface="Arial" panose="020B0604020202020204" pitchFamily="34" charset="0"/>
-              <a:buNone/>
-            </a:pPr>
-            <a:r>
-              <a:rPr lang="en-US" altLang="zh-CN" sz="1600"/>
-              <a:t>The distance between the midpoint of the two fingertips and the center of the object's bounding box.</a:t>
-            </a:r>
-            <a:endParaRPr lang="en-US" altLang="zh-CN" sz="1600"/>
-          </a:p>
-          <a:p>
-            <a:pPr indent="457200">
-              <a:buFont typeface="Arial" panose="020B0604020202020204" pitchFamily="34" charset="0"/>
-              <a:buNone/>
-            </a:pPr>
-            <a:endParaRPr lang="en-US" altLang="zh-CN" sz="1600"/>
-          </a:p>
-          <a:p>
-            <a:pPr marL="285750" indent="-285750">
-              <a:buFont typeface="Arial" panose="020B0604020202020204" pitchFamily="34" charset="0"/>
-              <a:buChar char="•"/>
-            </a:pPr>
-            <a:endParaRPr lang="en-US" altLang="zh-CN" sz="1600"/>
-          </a:p>
-          <a:p>
-            <a:pPr marL="285750" indent="-285750">
-              <a:buFont typeface="Arial" panose="020B0604020202020204" pitchFamily="34" charset="0"/>
-              <a:buChar char="•"/>
-            </a:pPr>
-            <a:r>
-              <a:rPr lang="en-US" altLang="ja-JP" sz="1600">
-                <a:sym typeface="+mn-ea"/>
-              </a:rPr>
-              <a:t>Variable 2 </a:t>
-            </a:r>
-            <a:r>
-              <a:rPr lang="en-US" altLang="zh-CN" sz="1600">
-                <a:sym typeface="+mn-ea"/>
-              </a:rPr>
-              <a:t>Fingertip Aperture</a:t>
-            </a:r>
-            <a:r>
-              <a:rPr lang="en-US" altLang="zh-CN" sz="1600">
-                <a:sym typeface="+mn-ea"/>
-              </a:rPr>
-              <a:t>:</a:t>
-            </a:r>
-            <a:endParaRPr lang="en-US" altLang="zh-CN" sz="1600">
-              <a:sym typeface="+mn-ea"/>
-            </a:endParaRPr>
-          </a:p>
-          <a:p>
-            <a:pPr indent="457200">
-              <a:buFont typeface="Arial" panose="020B0604020202020204" pitchFamily="34" charset="0"/>
-              <a:buNone/>
-            </a:pPr>
-            <a:r>
-              <a:rPr lang="en-US" altLang="zh-CN" sz="1600">
-                <a:sym typeface="+mn-ea"/>
-              </a:rPr>
-              <a:t>The distance between the thumb tip and index fingertip.</a:t>
-            </a:r>
-            <a:endParaRPr lang="en-US" altLang="zh-CN" sz="1600">
-              <a:sym typeface="+mn-ea"/>
-            </a:endParaRPr>
-          </a:p>
-          <a:p>
-            <a:pPr indent="457200">
-              <a:buFont typeface="Arial" panose="020B0604020202020204" pitchFamily="34" charset="0"/>
-              <a:buNone/>
-            </a:pPr>
-            <a:endParaRPr lang="en-US" altLang="zh-CN" sz="1600">
-              <a:sym typeface="+mn-ea"/>
-            </a:endParaRPr>
-          </a:p>
-          <a:p>
-            <a:pPr marL="285750" indent="-285750">
-              <a:buFont typeface="Arial" panose="020B0604020202020204" pitchFamily="34" charset="0"/>
-              <a:buChar char="•"/>
-            </a:pPr>
-            <a:endParaRPr lang="en-US" altLang="zh-CN" sz="1600">
-              <a:sym typeface="+mn-ea"/>
-            </a:endParaRPr>
-          </a:p>
-          <a:p>
-            <a:pPr marL="285750" indent="-285750">
-              <a:buFont typeface="Arial" panose="020B0604020202020204" pitchFamily="34" charset="0"/>
-              <a:buChar char="•"/>
-            </a:pPr>
-            <a:r>
-              <a:rPr lang="en-US" altLang="zh-CN" sz="1600">
-                <a:sym typeface="+mn-ea"/>
-              </a:rPr>
-              <a:t>All distances are measured in pixels (px).</a:t>
-            </a:r>
-            <a:endParaRPr lang="en-US" altLang="zh-CN" sz="1600">
-              <a:sym typeface="+mn-ea"/>
-            </a:endParaRPr>
-          </a:p>
-          <a:p>
-            <a:pPr marL="285750" indent="-285750">
-              <a:buFont typeface="Arial" panose="020B0604020202020204" pitchFamily="34" charset="0"/>
-              <a:buChar char="•"/>
-            </a:pPr>
-            <a:endParaRPr lang="en-US" altLang="zh-CN" sz="1600"/>
-          </a:p>
-        </p:txBody>
-      </p:sp>
-      <p:sp>
-        <p:nvSpPr>
-          <p:cNvPr id="19" name="文本框 18"/>
-          <p:cNvSpPr txBox="1"/>
-          <p:nvPr/>
-        </p:nvSpPr>
-        <p:spPr>
-          <a:xfrm>
-            <a:off x="276225" y="944245"/>
-            <a:ext cx="8522335" cy="337185"/>
-          </a:xfrm>
-          <a:prstGeom prst="rect">
-            <a:avLst/>
-          </a:prstGeom>
-        </p:spPr>
-        <p:txBody>
-          <a:bodyPr wrap="square">
-            <a:spAutoFit/>
-          </a:bodyPr>
-          <a:p>
-            <a:r>
-              <a:rPr lang="en-US" altLang="ja-JP" sz="1600"/>
-              <a:t>MediaPipe and </a:t>
-            </a:r>
-            <a:r>
-              <a:rPr lang="en-US" altLang="zh-CN" sz="1600"/>
-              <a:t>OpenCV</a:t>
-            </a:r>
-            <a:r>
-              <a:rPr lang="en-US" altLang="ja-JP" sz="1600"/>
-              <a:t> is used to detect hand landmarks and cube</a:t>
-            </a:r>
-            <a:endParaRPr lang="en-US" altLang="ja-JP" sz="1600"/>
-          </a:p>
-        </p:txBody>
-      </p:sp>
-    </p:spTree>
-  </p:cSld>
-  <p:clrMapOvr>
-    <a:masterClrMapping/>
-  </p:clrMapOvr>
-  <p:timing>
-    <p:tnLst>
-      <p:par>
-        <p:cTn id="1" dur="indefinite" restart="never" nodeType="tmRoot"/>
-      </p:par>
-    </p:tnLst>
-  </p:timing>
-</p:sld>
-</file>
-
-<file path=ppt/slides/slide6.xml><?xml version="1.0" encoding="utf-8"?>
-<p:sld xmlns:a="http://schemas.openxmlformats.org/drawingml/2006/main" xmlns:r="http://schemas.openxmlformats.org/officeDocument/2006/relationships" xmlns:p="http://schemas.openxmlformats.org/presentationml/2006/main">
-  <p:cSld>
-    <p:spTree>
-      <p:nvGrpSpPr>
-        <p:cNvPr id="1" name=""/>
-        <p:cNvGrpSpPr/>
-        <p:nvPr/>
-      </p:nvGrpSpPr>
-      <p:grpSpPr/>
-      <p:sp>
-        <p:nvSpPr>
-          <p:cNvPr id="6" name="文本框 5"/>
-          <p:cNvSpPr>
-            <a:spLocks noGrp="1"/>
-          </p:cNvSpPr>
-          <p:nvPr/>
-        </p:nvSpPr>
-        <p:spPr>
-          <a:xfrm>
-            <a:off x="275590" y="226695"/>
-            <a:ext cx="8522970" cy="583565"/>
-          </a:xfrm>
-          <a:prstGeom prst="rect">
-            <a:avLst/>
-          </a:prstGeom>
-          <a:noFill/>
-        </p:spPr>
-        <p:txBody>
-          <a:bodyPr wrap="square">
-            <a:spAutoFit/>
-          </a:bodyPr>
-          <a:lstStyle/>
-          <a:p>
-            <a:r>
-              <a:rPr sz="3200" b="1">
-                <a:latin typeface="Times New Roman" panose="02020603050405020304"/>
-                <a:ea typeface="Times New Roman" panose="02020603050405020304"/>
-                <a:cs typeface="Times New Roman" panose="02020603050405020304"/>
-                <a:sym typeface="+mn-ea"/>
-              </a:rPr>
-              <a:t>Data Collection</a:t>
-            </a:r>
-            <a:endParaRPr lang="zh-CN" altLang="en-US" sz="3200" b="1">
-              <a:latin typeface="Times New Roman" panose="02020603050405020304"/>
-              <a:ea typeface="SimSun" panose="02010600030101010101" pitchFamily="2" charset="-122"/>
-              <a:cs typeface="Times New Roman" panose="02020603050405020304"/>
-            </a:endParaRPr>
-          </a:p>
-        </p:txBody>
-      </p:sp>
-      <p:sp>
-        <p:nvSpPr>
-          <p:cNvPr id="2" name="文本框 1"/>
-          <p:cNvSpPr txBox="1"/>
-          <p:nvPr/>
-        </p:nvSpPr>
-        <p:spPr>
-          <a:xfrm>
-            <a:off x="275590" y="2094230"/>
-            <a:ext cx="5217160" cy="2194560"/>
-          </a:xfrm>
-          <a:prstGeom prst="rect">
-            <a:avLst/>
-          </a:prstGeom>
-        </p:spPr>
-        <p:txBody>
-          <a:bodyPr wrap="square">
-            <a:spAutoFit/>
-          </a:bodyPr>
-          <a:p>
-            <a:pPr>
-              <a:lnSpc>
-                <a:spcPct val="190000"/>
-              </a:lnSpc>
-            </a:pPr>
-            <a:r>
-              <a:rPr lang="en-US" altLang="zh-CN">
-                <a:sym typeface="+mn-ea"/>
-              </a:rPr>
-              <a:t>Task: Natural reach-to-grasp movement</a:t>
-            </a:r>
-            <a:endParaRPr lang="en-US" altLang="zh-CN"/>
-          </a:p>
-          <a:p>
-            <a:pPr>
-              <a:lnSpc>
-                <a:spcPct val="190000"/>
-              </a:lnSpc>
-            </a:pPr>
-            <a:r>
-              <a:rPr lang="en-US" altLang="zh-CN"/>
-              <a:t>Initial hand position: table edge</a:t>
-            </a:r>
-            <a:endParaRPr lang="en-US" altLang="zh-CN"/>
-          </a:p>
-          <a:p>
-            <a:pPr>
-              <a:lnSpc>
-                <a:spcPct val="190000"/>
-              </a:lnSpc>
-            </a:pPr>
-            <a:r>
-              <a:rPr lang="en-US" altLang="zh-CN"/>
-              <a:t>Target position: 30 mm from the table edge</a:t>
-            </a:r>
-            <a:endParaRPr lang="en-US" altLang="zh-CN"/>
-          </a:p>
-          <a:p>
-            <a:pPr>
-              <a:lnSpc>
-                <a:spcPct val="190000"/>
-              </a:lnSpc>
-            </a:pPr>
-            <a:r>
-              <a:rPr lang="en-US" altLang="zh-CN"/>
-              <a:t>Target size: 20, 30, </a:t>
-            </a:r>
-            <a:r>
-              <a:rPr lang="en-US" altLang="zh-CN">
-                <a:sym typeface="+mn-ea"/>
-              </a:rPr>
-              <a:t>and </a:t>
-            </a:r>
-            <a:r>
-              <a:rPr lang="en-US" altLang="zh-CN"/>
-              <a:t>40 mm cubes</a:t>
-            </a:r>
-            <a:endParaRPr lang="en-US" altLang="zh-CN"/>
-          </a:p>
-        </p:txBody>
-      </p:sp>
-      <p:sp>
-        <p:nvSpPr>
-          <p:cNvPr id="28" name="Shape 25"/>
-          <p:cNvSpPr/>
-          <p:nvPr>
-            <p:custDataLst>
-              <p:tags r:id="rId1"/>
-            </p:custDataLst>
-          </p:nvPr>
-        </p:nvSpPr>
-        <p:spPr>
-          <a:xfrm>
-            <a:off x="275590" y="963930"/>
-            <a:ext cx="8522970" cy="388620"/>
-          </a:xfrm>
-          <a:prstGeom prst="rect">
-            <a:avLst/>
-          </a:prstGeom>
-          <a:solidFill>
-            <a:srgbClr val="F59E0B">
-              <a:alpha val="10000"/>
-            </a:srgbClr>
-          </a:solidFill>
-          <a:ln w="19050">
-            <a:solidFill>
-              <a:srgbClr val="F59E0B"/>
-            </a:solidFill>
-            <a:prstDash val="solid"/>
-          </a:ln>
-        </p:spPr>
-        <p:txBody>
-          <a:bodyPr/>
-          <a:p>
-            <a:pPr algn="ctr"/>
-            <a:r>
-              <a:rPr lang="en-US" altLang="zh-CN">
-                <a:sym typeface="+mn-ea"/>
-              </a:rPr>
-              <a:t>Collect grasping movement data from participants using cubes of different sizes.</a:t>
-            </a:r>
-            <a:endParaRPr lang="en-US" altLang="zh-CN">
-              <a:sym typeface="+mn-ea"/>
-            </a:endParaRPr>
-          </a:p>
-          <a:p>
-            <a:pPr algn="ctr"/>
-            <a:endParaRPr lang="en-US" altLang="zh-CN"/>
-          </a:p>
-        </p:txBody>
-      </p:sp>
-      <p:sp>
-        <p:nvSpPr>
-          <p:cNvPr id="93" name="Shape 26"/>
-          <p:cNvSpPr/>
-          <p:nvPr>
-            <p:custDataLst>
-              <p:tags r:id="rId2"/>
-            </p:custDataLst>
-          </p:nvPr>
-        </p:nvSpPr>
-        <p:spPr>
-          <a:xfrm>
-            <a:off x="275590" y="1724025"/>
-            <a:ext cx="3247390" cy="457200"/>
-          </a:xfrm>
-          <a:prstGeom prst="rect">
-            <a:avLst/>
-          </a:prstGeom>
-          <a:solidFill>
-            <a:srgbClr val="F59E0B"/>
-          </a:solidFill>
-          <a:ln w="19050">
-            <a:solidFill>
-              <a:srgbClr val="F59E0B"/>
-            </a:solidFill>
-            <a:prstDash val="solid"/>
-          </a:ln>
-        </p:spPr>
-        <p:txBody>
-          <a:bodyPr/>
-          <a:p>
-            <a:r>
-              <a:rPr lang="en-US" altLang="zh-CN" sz="2400">
-                <a:sym typeface="+mn-ea"/>
-              </a:rPr>
-              <a:t>Experimental Conditions</a:t>
-            </a:r>
-            <a:endParaRPr lang="zh-CN" altLang="en-US" sz="2400"/>
-          </a:p>
-        </p:txBody>
-      </p:sp>
-      <p:pic>
-        <p:nvPicPr>
-          <p:cNvPr id="4" name="10月20日 (1)(1)">
-            <a:hlinkClick r:id="" action="ppaction://media"/>
-            <a:hlinkHover r:id="" action="ppaction://media"/>
-          </p:cNvPr>
-          <p:cNvPicPr>
-            <a:picLocks noChangeAspect="1"/>
-          </p:cNvPicPr>
-          <p:nvPr>
-            <a:videoFile r:link="rId3"/>
-            <p:extLst>
-              <p:ext uri="{DAA4B4D4-6D71-4841-9C94-3DE7FCFB9230}">
-                <p14:media xmlns:p14="http://schemas.microsoft.com/office/powerpoint/2010/main" r:embed="rId4"/>
-              </p:ext>
-            </p:extLst>
-          </p:nvPr>
-        </p:nvPicPr>
-        <p:blipFill>
-          <a:blip r:embed="rId5"/>
-          <a:stretch>
-            <a:fillRect/>
-          </a:stretch>
-        </p:blipFill>
-        <p:spPr>
-          <a:xfrm>
-            <a:off x="5401945" y="1589405"/>
-            <a:ext cx="3467735" cy="5138420"/>
-          </a:xfrm>
-          <a:prstGeom prst="rect">
-            <a:avLst/>
-          </a:prstGeom>
-        </p:spPr>
-      </p:pic>
-    </p:spTree>
-  </p:cSld>
-  <p:clrMapOvr>
-    <a:masterClrMapping/>
-  </p:clrMapOvr>
-  <p:timing>
-    <p:tnLst>
-      <p:par>
-        <p:cTn id="1" dur="indefinite" restart="never" nodeType="tmRoot">
-          <p:childTnLst>
-            <p:video fullScrn="0">
-              <p:cMediaNode>
-                <p:cTn id="2" fill="hold" display="1">
-                  <p:stCondLst>
-                    <p:cond delay="indefinite"/>
-                  </p:stCondLst>
-                </p:cTn>
-                <p:tgtEl>
-                  <p:spTgt spid="4"/>
-                </p:tgtEl>
-              </p:cMediaNode>
-            </p:video>
-            <p:seq concurrent="1" nextAc="seek">
-              <p:cTn id="3" restart="whenNotActive" fill="hold" evtFilter="cancelBubble" nodeType="interactiveSeq">
-                <p:stCondLst>
-                  <p:cond evt="onClick" delay="0">
-                    <p:tgtEl>
-                      <p:spTgt spid="4"/>
-                    </p:tgtEl>
-                  </p:cond>
-                </p:stCondLst>
-                <p:endSync evt="end" delay="0">
-                  <p:rtn val="all"/>
-                </p:endSync>
-                <p:childTnLst>
-                  <p:par>
-                    <p:cTn id="4" fill="hold">
-                      <p:stCondLst>
-                        <p:cond delay="0"/>
-                      </p:stCondLst>
-                      <p:childTnLst>
-                        <p:par>
-                          <p:cTn id="5" fill="hold">
-                            <p:stCondLst>
-                              <p:cond delay="0"/>
-                            </p:stCondLst>
-                            <p:childTnLst>
-                              <p:par>
-                                <p:cTn id="6" presetID="2" presetClass="mediacall" presetSubtype="0" fill="hold" nodeType="clickEffect">
-                                  <p:stCondLst>
-                                    <p:cond delay="0"/>
-                                  </p:stCondLst>
-                                  <p:childTnLst>
-                                    <p:cmd type="call" cmd="togglePause">
-                                      <p:cBhvr additive="base">
-                                        <p:cTn id="7" dur="1" fill="hold"/>
-                                        <p:tgtEl>
-                                          <p:spTgt spid="4"/>
-                                        </p:tgtEl>
-                                      </p:cBhvr>
-                                    </p:cmd>
-                                  </p:childTnLst>
-                                </p:cTn>
-                              </p:par>
-                            </p:childTnLst>
-                          </p:cTn>
-                        </p:par>
-                      </p:childTnLst>
-                    </p:cTn>
-                  </p:par>
-                </p:childTnLst>
-              </p:cTn>
-              <p:nextCondLst>
-                <p:cond evt="onClick" delay="0">
-                  <p:tgtEl>
-                    <p:spTgt spid="4"/>
-                  </p:tgtEl>
-                </p:cond>
-              </p:nextCondLst>
-            </p:seq>
-          </p:childTnLst>
-        </p:cTn>
-      </p:par>
-    </p:tnLst>
-  </p:timing>
-</p:sld>
-</file>
-
-<file path=ppt/slides/slide7.xml><?xml version="1.0" encoding="utf-8"?>
-<p:sld xmlns:a="http://schemas.openxmlformats.org/drawingml/2006/main" xmlns:r="http://schemas.openxmlformats.org/officeDocument/2006/relationships" xmlns:p="http://schemas.openxmlformats.org/presentationml/2006/main">
-  <p:cSld>
-    <p:spTree>
-      <p:nvGrpSpPr>
-        <p:cNvPr id="1" name=""/>
-        <p:cNvGrpSpPr/>
-        <p:nvPr/>
-      </p:nvGrpSpPr>
-      <p:grpSpPr/>
-      <p:pic>
-        <p:nvPicPr>
-          <p:cNvPr id="2" name="图片 1" descr="C:/Users/Di/Desktop/crop45_normalized_overlay_horizontal.pngcrop45_normalized_overlay_horizontal"/>
-          <p:cNvPicPr>
-            <a:picLocks noChangeAspect="1"/>
-          </p:cNvPicPr>
-          <p:nvPr/>
-        </p:nvPicPr>
-        <p:blipFill>
-          <a:blip r:embed="rId1"/>
-          <a:srcRect/>
-          <a:stretch>
-            <a:fillRect/>
-          </a:stretch>
-        </p:blipFill>
-        <p:spPr>
-          <a:xfrm>
-            <a:off x="275590" y="1975485"/>
-            <a:ext cx="8522970" cy="2840990"/>
-          </a:xfrm>
-          <a:prstGeom prst="rect">
-            <a:avLst/>
-          </a:prstGeom>
-        </p:spPr>
-      </p:pic>
-      <p:sp>
-        <p:nvSpPr>
-          <p:cNvPr id="6" name="文本框 5"/>
-          <p:cNvSpPr>
-            <a:spLocks noGrp="1"/>
-          </p:cNvSpPr>
-          <p:nvPr/>
-        </p:nvSpPr>
-        <p:spPr>
-          <a:xfrm>
-            <a:off x="275590" y="226695"/>
-            <a:ext cx="8522970" cy="583565"/>
-          </a:xfrm>
-          <a:prstGeom prst="rect">
-            <a:avLst/>
-          </a:prstGeom>
-          <a:noFill/>
-        </p:spPr>
-        <p:txBody>
-          <a:bodyPr wrap="square">
-            <a:spAutoFit/>
-          </a:bodyPr>
-          <a:lstStyle/>
-          <a:p>
-            <a:r>
-              <a:rPr lang="en-US" altLang="zh-CN" sz="3200" b="1">
-                <a:latin typeface="Times New Roman" panose="02020603050405020304"/>
-                <a:ea typeface="Times New Roman" panose="02020603050405020304"/>
-                <a:cs typeface="Times New Roman" panose="02020603050405020304"/>
-              </a:rPr>
-              <a:t>Data Relationship Analysis</a:t>
-            </a:r>
-            <a:endParaRPr lang="en-US" altLang="zh-CN" sz="3200" b="1">
-              <a:latin typeface="Times New Roman" panose="02020603050405020304"/>
-              <a:ea typeface="Times New Roman" panose="02020603050405020304"/>
-              <a:cs typeface="Times New Roman" panose="02020603050405020304"/>
-            </a:endParaRPr>
-          </a:p>
-        </p:txBody>
-      </p:sp>
-      <p:sp>
-        <p:nvSpPr>
-          <p:cNvPr id="9" name="文本框 8"/>
-          <p:cNvSpPr txBox="1"/>
-          <p:nvPr/>
-        </p:nvSpPr>
-        <p:spPr>
-          <a:xfrm>
-            <a:off x="309245" y="712470"/>
-            <a:ext cx="8454390" cy="521970"/>
-          </a:xfrm>
-          <a:prstGeom prst="rect">
-            <a:avLst/>
-          </a:prstGeom>
-          <a:noFill/>
-        </p:spPr>
-        <p:txBody>
-          <a:bodyPr wrap="square" rtlCol="0">
-            <a:spAutoFit/>
-          </a:bodyPr>
-          <a:p>
-            <a:r>
-              <a:rPr lang="en-US" altLang="zh-CN" sz="2800" b="1">
-                <a:solidFill>
-                  <a:srgbClr val="C7051C"/>
-                </a:solidFill>
-              </a:rPr>
-              <a:t>30</a:t>
-            </a:r>
-            <a:r>
-              <a:rPr lang="en-US" altLang="zh-CN" sz="2000" b="1">
-                <a:solidFill>
-                  <a:srgbClr val="C7051C"/>
-                </a:solidFill>
-              </a:rPr>
-              <a:t> trial with a 20 mm cube</a:t>
-            </a:r>
-            <a:endParaRPr lang="en-US" altLang="zh-CN" sz="2000" b="1">
-              <a:solidFill>
-                <a:srgbClr val="C7051C"/>
-              </a:solidFill>
-            </a:endParaRPr>
-          </a:p>
-        </p:txBody>
-      </p:sp>
-      <p:sp>
-        <p:nvSpPr>
-          <p:cNvPr id="28" name="Shape 25"/>
-          <p:cNvSpPr/>
-          <p:nvPr>
-            <p:custDataLst>
-              <p:tags r:id="rId2"/>
-            </p:custDataLst>
-          </p:nvPr>
-        </p:nvSpPr>
-        <p:spPr>
-          <a:xfrm>
-            <a:off x="104140" y="5684520"/>
-            <a:ext cx="8870950" cy="763905"/>
-          </a:xfrm>
-          <a:prstGeom prst="rect">
-            <a:avLst/>
-          </a:prstGeom>
-          <a:solidFill>
-            <a:srgbClr val="F59E0B">
-              <a:alpha val="10000"/>
-            </a:srgbClr>
-          </a:solidFill>
-          <a:ln w="19050">
-            <a:solidFill>
-              <a:srgbClr val="F59E0B"/>
-            </a:solidFill>
-            <a:prstDash val="solid"/>
-          </a:ln>
-        </p:spPr>
-        <p:txBody>
-          <a:bodyPr/>
-          <a:p>
-            <a:pPr algn="ctr">
-              <a:lnSpc>
-                <a:spcPct val="110000"/>
-              </a:lnSpc>
-            </a:pPr>
-            <a:r>
-              <a:rPr lang="en-US" altLang="zh-CN">
-                <a:sym typeface="+mn-ea"/>
-              </a:rPr>
-              <a:t>The data showed high consistency across experiments, suggesting a consistent relationship </a:t>
-            </a:r>
-            <a:r>
-              <a:rPr lang="en-US" altLang="zh-CN">
-                <a:sym typeface="+mn-ea"/>
-              </a:rPr>
-              <a:t>between hand–object distance and fingertip aperture</a:t>
-            </a:r>
-            <a:r>
-              <a:rPr lang="en-US" altLang="zh-CN">
-                <a:sym typeface="+mn-ea"/>
-              </a:rPr>
-              <a:t> during reach-to-grasp movements.</a:t>
-            </a:r>
-            <a:endParaRPr lang="en-US" altLang="zh-CN"/>
-          </a:p>
-          <a:p>
-            <a:pPr algn="ctr"/>
-            <a:endParaRPr lang="en-US" altLang="zh-CN"/>
-          </a:p>
-        </p:txBody>
-      </p:sp>
-      <p:sp>
-        <p:nvSpPr>
-          <p:cNvPr id="3" name="文本框 2"/>
-          <p:cNvSpPr txBox="1"/>
-          <p:nvPr/>
-        </p:nvSpPr>
-        <p:spPr>
-          <a:xfrm>
-            <a:off x="275590" y="1430020"/>
-            <a:ext cx="4295775" cy="645160"/>
-          </a:xfrm>
-          <a:prstGeom prst="rect">
-            <a:avLst/>
-          </a:prstGeom>
-        </p:spPr>
-        <p:txBody>
-          <a:bodyPr wrap="square">
-            <a:spAutoFit/>
-          </a:bodyPr>
-          <a:p>
-            <a:pPr algn="ctr"/>
-            <a:r>
-              <a:rPr lang="en-US" altLang="zh-CN"/>
-              <a:t>Maximum Aperture Timing</a:t>
-            </a:r>
-            <a:endParaRPr lang="zh-CN" altLang="en-US"/>
-          </a:p>
-          <a:p>
-            <a:pPr algn="ctr"/>
-            <a:r>
-              <a:rPr lang="en-US" altLang="zh-CN">
-                <a:solidFill>
-                  <a:srgbClr val="9E4802"/>
-                </a:solidFill>
-              </a:rPr>
-              <a:t>44.32 ± 2.37%</a:t>
-            </a:r>
-            <a:endParaRPr lang="en-US" altLang="zh-CN">
-              <a:solidFill>
-                <a:srgbClr val="9E4802"/>
-              </a:solidFill>
-            </a:endParaRPr>
-          </a:p>
-        </p:txBody>
-      </p:sp>
-      <p:sp>
-        <p:nvSpPr>
-          <p:cNvPr id="17" name="文本框 16"/>
-          <p:cNvSpPr txBox="1"/>
-          <p:nvPr/>
-        </p:nvSpPr>
-        <p:spPr>
-          <a:xfrm>
-            <a:off x="4679315" y="1430020"/>
-            <a:ext cx="4295775" cy="645160"/>
-          </a:xfrm>
-          <a:prstGeom prst="rect">
-            <a:avLst/>
-          </a:prstGeom>
-        </p:spPr>
-        <p:txBody>
-          <a:bodyPr wrap="square">
-            <a:spAutoFit/>
-          </a:bodyPr>
-          <a:p>
-            <a:pPr algn="ctr"/>
-            <a:r>
-              <a:rPr lang="en-US" altLang="ja-JP">
-                <a:sym typeface="+mn-ea"/>
-              </a:rPr>
-              <a:t>Distance at Maximum Aperture (%)</a:t>
-            </a:r>
-            <a:endParaRPr lang="en-US" altLang="ja-JP">
-              <a:sym typeface="+mn-ea"/>
-            </a:endParaRPr>
-          </a:p>
-          <a:p>
-            <a:pPr algn="ctr"/>
-            <a:r>
-              <a:rPr lang="en-US" altLang="zh-CN">
-                <a:solidFill>
-                  <a:srgbClr val="9E4802"/>
-                </a:solidFill>
-                <a:sym typeface="+mn-ea"/>
-              </a:rPr>
-              <a:t>52.15 ± 6.70%</a:t>
-            </a:r>
-            <a:endParaRPr lang="en-US" altLang="zh-CN">
-              <a:solidFill>
-                <a:srgbClr val="9E4802"/>
-              </a:solidFill>
-              <a:sym typeface="+mn-ea"/>
-            </a:endParaRPr>
-          </a:p>
-        </p:txBody>
-      </p:sp>
-      <p:sp>
-        <p:nvSpPr>
-          <p:cNvPr id="5" name="文本框 4"/>
-          <p:cNvSpPr txBox="1"/>
-          <p:nvPr/>
-        </p:nvSpPr>
-        <p:spPr>
-          <a:xfrm>
-            <a:off x="383540" y="4728845"/>
-            <a:ext cx="4295775" cy="645160"/>
-          </a:xfrm>
-          <a:prstGeom prst="rect">
-            <a:avLst/>
-          </a:prstGeom>
-        </p:spPr>
-        <p:txBody>
-          <a:bodyPr wrap="square">
-            <a:spAutoFit/>
-          </a:bodyPr>
-          <a:p>
-            <a:pPr algn="ctr"/>
-            <a:r>
-              <a:rPr lang="en-US" altLang="zh-CN"/>
-              <a:t>Fingertip Aperture Nomalized RMSE</a:t>
-            </a:r>
-            <a:endParaRPr lang="en-US" altLang="zh-CN"/>
-          </a:p>
-          <a:p>
-            <a:pPr algn="ctr"/>
-            <a:r>
-              <a:rPr lang="en-US" altLang="zh-CN">
-                <a:solidFill>
-                  <a:srgbClr val="9E4802"/>
-                </a:solidFill>
-              </a:rPr>
-              <a:t>0.0530 ± 0.0186</a:t>
-            </a:r>
-            <a:endParaRPr lang="en-US" altLang="zh-CN">
-              <a:solidFill>
-                <a:srgbClr val="9E4802"/>
-              </a:solidFill>
-            </a:endParaRPr>
-          </a:p>
-        </p:txBody>
-      </p:sp>
-      <p:sp>
-        <p:nvSpPr>
-          <p:cNvPr id="7" name="文本框 6"/>
-          <p:cNvSpPr txBox="1"/>
-          <p:nvPr/>
-        </p:nvSpPr>
-        <p:spPr>
-          <a:xfrm>
-            <a:off x="4679315" y="4728845"/>
-            <a:ext cx="4295775" cy="645160"/>
-          </a:xfrm>
-          <a:prstGeom prst="rect">
-            <a:avLst/>
-          </a:prstGeom>
-        </p:spPr>
-        <p:txBody>
-          <a:bodyPr wrap="square">
-            <a:spAutoFit/>
-          </a:bodyPr>
-          <a:p>
-            <a:pPr algn="ctr"/>
-            <a:r>
-              <a:rPr lang="en-US" altLang="zh-CN"/>
-              <a:t>Hand–Object Distance Nomalized RMSE</a:t>
-            </a:r>
-            <a:endParaRPr lang="en-US" altLang="zh-CN"/>
-          </a:p>
-          <a:p>
-            <a:pPr algn="ctr"/>
-            <a:r>
-              <a:rPr lang="en-US" altLang="zh-CN">
-                <a:solidFill>
-                  <a:srgbClr val="9E4802"/>
-                </a:solidFill>
-              </a:rPr>
-              <a:t>0.0226 ± 0.0112</a:t>
-            </a:r>
-            <a:endParaRPr lang="en-US" altLang="zh-CN">
-              <a:solidFill>
-                <a:srgbClr val="9E4802"/>
-              </a:solidFill>
-            </a:endParaRPr>
-          </a:p>
-        </p:txBody>
-      </p:sp>
-    </p:spTree>
-  </p:cSld>
-  <p:clrMapOvr>
-    <a:masterClrMapping/>
-  </p:clrMapOvr>
-  <p:timing>
-    <p:tnLst>
-      <p:par>
-        <p:cTn id="1" dur="indefinite" restart="never" nodeType="tmRoot"/>
-      </p:par>
-    </p:tnLst>
-  </p:timing>
-</p:sld>
-</file>
-
-<file path=ppt/slides/slide8.xml><?xml version="1.0" encoding="utf-8"?>
 <p:sld xmlns:a="http://schemas.openxmlformats.org/drawingml/2006/main" xmlns:r="http://schemas.openxmlformats.org/officeDocument/2006/relationships" xmlns:p="http://schemas.openxmlformats.org/presentationml/2006/main">
   <p:cSld>
     <p:spTree>
@@ -10373,7 +7095,7 @@
             <a:pPr algn="ctr"/>
             <a:r>
               <a:rPr lang="en-US" altLang="zh-CN">
-                <a:ea typeface="SimSun" panose="02010600030101010101" pitchFamily="2" charset="-122"/>
+                <a:ea typeface="宋体" panose="02010600030101010101" pitchFamily="2" charset="-122"/>
                 <a:sym typeface="+mn-ea"/>
               </a:rPr>
               <a:t>Can fingertip aperture during reach-to-grasp be predicted from </a:t>
@@ -10386,13 +7108,13 @@
             </a:r>
             <a:r>
               <a:rPr lang="en-US" altLang="zh-CN">
-                <a:ea typeface="SimSun" panose="02010600030101010101" pitchFamily="2" charset="-122"/>
+                <a:ea typeface="宋体" panose="02010600030101010101" pitchFamily="2" charset="-122"/>
                 <a:sym typeface="+mn-ea"/>
               </a:rPr>
               <a:t>?</a:t>
             </a:r>
             <a:endParaRPr lang="en-US" altLang="zh-CN">
-              <a:ea typeface="SimSun" panose="02010600030101010101" pitchFamily="2" charset="-122"/>
+              <a:ea typeface="宋体" panose="02010600030101010101" pitchFamily="2" charset="-122"/>
             </a:endParaRPr>
           </a:p>
           <a:p>
@@ -10827,7 +7549,7 @@
 </p:sld>
 </file>
 
-<file path=ppt/slides/slide9.xml><?xml version="1.0" encoding="utf-8"?>
+<file path=ppt/slides/slide11.xml><?xml version="1.0" encoding="utf-8"?>
 <p:sld xmlns:a="http://schemas.openxmlformats.org/drawingml/2006/main" xmlns:r="http://schemas.openxmlformats.org/officeDocument/2006/relationships" xmlns:p="http://schemas.openxmlformats.org/presentationml/2006/main">
   <p:cSld>
     <p:spTree>
@@ -11460,6 +8182,3634 @@
           </a:prstGeom>
         </p:spPr>
       </p:pic>
+    </p:spTree>
+  </p:cSld>
+  <p:clrMapOvr>
+    <a:masterClrMapping/>
+  </p:clrMapOvr>
+  <p:timing>
+    <p:tnLst>
+      <p:par>
+        <p:cTn id="1" dur="indefinite" restart="never" nodeType="tmRoot"/>
+      </p:par>
+    </p:tnLst>
+  </p:timing>
+</p:sld>
+</file>
+
+<file path=ppt/slides/slide12.xml><?xml version="1.0" encoding="utf-8"?>
+<p:sld xmlns:a="http://schemas.openxmlformats.org/drawingml/2006/main" xmlns:r="http://schemas.openxmlformats.org/officeDocument/2006/relationships" xmlns:p="http://schemas.openxmlformats.org/presentationml/2006/main">
+  <p:cSld>
+    <p:spTree>
+      <p:nvGrpSpPr>
+        <p:cNvPr id="1" name=""/>
+        <p:cNvGrpSpPr/>
+        <p:nvPr/>
+      </p:nvGrpSpPr>
+      <p:grpSpPr/>
+      <p:sp>
+        <p:nvSpPr>
+          <p:cNvPr id="6" name="文本框 5"/>
+          <p:cNvSpPr>
+            <a:spLocks noGrp="1"/>
+          </p:cNvSpPr>
+          <p:nvPr/>
+        </p:nvSpPr>
+        <p:spPr>
+          <a:xfrm>
+            <a:off x="275590" y="226695"/>
+            <a:ext cx="8522970" cy="583565"/>
+          </a:xfrm>
+          <a:prstGeom prst="rect">
+            <a:avLst/>
+          </a:prstGeom>
+          <a:noFill/>
+        </p:spPr>
+        <p:txBody>
+          <a:bodyPr wrap="square">
+            <a:spAutoFit/>
+          </a:bodyPr>
+          <a:lstStyle/>
+          <a:p>
+            <a:r>
+              <a:rPr lang="en-US" altLang="zh-CN" sz="3200" b="1">
+                <a:latin typeface="Times New Roman" panose="02020603050405020304"/>
+                <a:ea typeface="Times New Roman" panose="02020603050405020304"/>
+                <a:cs typeface="Times New Roman" panose="02020603050405020304"/>
+                <a:sym typeface="+mn-ea"/>
+              </a:rPr>
+              <a:t>Offline Validation – Phase-Wise Analysis</a:t>
+            </a:r>
+            <a:endParaRPr lang="en-US" altLang="zh-CN" sz="3200" b="1">
+              <a:latin typeface="Times New Roman" panose="02020603050405020304"/>
+              <a:ea typeface="Times New Roman" panose="02020603050405020304"/>
+              <a:cs typeface="Times New Roman" panose="02020603050405020304"/>
+              <a:sym typeface="+mn-ea"/>
+            </a:endParaRPr>
+          </a:p>
+        </p:txBody>
+      </p:sp>
+      <p:sp>
+        <p:nvSpPr>
+          <p:cNvPr id="16" name="文本框 15"/>
+          <p:cNvSpPr txBox="1"/>
+          <p:nvPr/>
+        </p:nvSpPr>
+        <p:spPr>
+          <a:xfrm>
+            <a:off x="275590" y="931545"/>
+            <a:ext cx="7620000" cy="645160"/>
+          </a:xfrm>
+          <a:prstGeom prst="rect">
+            <a:avLst/>
+          </a:prstGeom>
+          <a:noFill/>
+        </p:spPr>
+        <p:txBody>
+          <a:bodyPr wrap="square" rtlCol="0">
+            <a:spAutoFit/>
+          </a:bodyPr>
+          <a:p>
+            <a:r>
+              <a:rPr lang="en-US" altLang="zh-CN"/>
+              <a:t>The grasping phase is the most challenging to predict.</a:t>
+            </a:r>
+            <a:br>
+              <a:rPr lang="en-US" altLang="zh-CN"/>
+            </a:br>
+            <a:r>
+              <a:rPr lang="en-US" altLang="zh-CN"/>
+              <a:t>However, the current model can reduce prediction errors during this phase.</a:t>
+            </a:r>
+            <a:endParaRPr lang="en-US" altLang="zh-CN"/>
+          </a:p>
+        </p:txBody>
+      </p:sp>
+      <p:pic>
+        <p:nvPicPr>
+          <p:cNvPr id="3" name="图片 2" descr="06_overall_phase_errors_window5"/>
+          <p:cNvPicPr>
+            <a:picLocks noChangeAspect="1"/>
+          </p:cNvPicPr>
+          <p:nvPr/>
+        </p:nvPicPr>
+        <p:blipFill>
+          <a:blip r:embed="rId1"/>
+          <a:stretch>
+            <a:fillRect/>
+          </a:stretch>
+        </p:blipFill>
+        <p:spPr>
+          <a:xfrm>
+            <a:off x="1002030" y="1843405"/>
+            <a:ext cx="7070090" cy="4860925"/>
+          </a:xfrm>
+          <a:prstGeom prst="rect">
+            <a:avLst/>
+          </a:prstGeom>
+        </p:spPr>
+      </p:pic>
+      <p:sp>
+        <p:nvSpPr>
+          <p:cNvPr id="5" name="上箭头 4"/>
+          <p:cNvSpPr/>
+          <p:nvPr/>
+        </p:nvSpPr>
+        <p:spPr>
+          <a:xfrm rot="8460000">
+            <a:off x="3138170" y="2391410"/>
+            <a:ext cx="799465" cy="1100455"/>
+          </a:xfrm>
+          <a:prstGeom prst="upArrow">
+            <a:avLst/>
+          </a:prstGeom>
+          <a:solidFill>
+            <a:schemeClr val="tx2">
+              <a:lumMod val="75000"/>
+              <a:lumOff val="25000"/>
+            </a:schemeClr>
+          </a:solidFill>
+          <a:ln>
+            <a:noFill/>
+            <a:tailEnd type="triangle"/>
+          </a:ln>
+        </p:spPr>
+        <p:style>
+          <a:lnRef idx="2">
+            <a:schemeClr val="accent1">
+              <a:lumMod val="75000"/>
+            </a:schemeClr>
+          </a:lnRef>
+          <a:fillRef idx="1">
+            <a:schemeClr val="accent1"/>
+          </a:fillRef>
+          <a:effectRef idx="0">
+            <a:srgbClr val="FFFFFF"/>
+          </a:effectRef>
+          <a:fontRef idx="minor">
+            <a:schemeClr val="lt1"/>
+          </a:fontRef>
+        </p:style>
+        <p:txBody>
+          <a:bodyPr rtlCol="0" anchor="ctr"/>
+          <a:p>
+            <a:pPr algn="ctr"/>
+            <a:endParaRPr lang="zh-CN" altLang="en-US"/>
+          </a:p>
+        </p:txBody>
+      </p:sp>
+    </p:spTree>
+  </p:cSld>
+  <p:clrMapOvr>
+    <a:masterClrMapping/>
+  </p:clrMapOvr>
+  <p:timing>
+    <p:tnLst>
+      <p:par>
+        <p:cTn id="1" dur="indefinite" restart="never" nodeType="tmRoot"/>
+      </p:par>
+    </p:tnLst>
+  </p:timing>
+</p:sld>
+</file>
+
+<file path=ppt/slides/slide13.xml><?xml version="1.0" encoding="utf-8"?>
+<p:sld xmlns:a="http://schemas.openxmlformats.org/drawingml/2006/main" xmlns:r="http://schemas.openxmlformats.org/officeDocument/2006/relationships" xmlns:p="http://schemas.openxmlformats.org/presentationml/2006/main">
+  <p:cSld>
+    <p:spTree>
+      <p:nvGrpSpPr>
+        <p:cNvPr id="1" name=""/>
+        <p:cNvGrpSpPr/>
+        <p:nvPr/>
+      </p:nvGrpSpPr>
+      <p:grpSpPr/>
+      <p:sp>
+        <p:nvSpPr>
+          <p:cNvPr id="6" name="文本框 5"/>
+          <p:cNvSpPr>
+            <a:spLocks noGrp="1"/>
+          </p:cNvSpPr>
+          <p:nvPr/>
+        </p:nvSpPr>
+        <p:spPr>
+          <a:xfrm>
+            <a:off x="275590" y="226695"/>
+            <a:ext cx="8522970" cy="583565"/>
+          </a:xfrm>
+          <a:prstGeom prst="rect">
+            <a:avLst/>
+          </a:prstGeom>
+          <a:noFill/>
+        </p:spPr>
+        <p:txBody>
+          <a:bodyPr wrap="square">
+            <a:spAutoFit/>
+          </a:bodyPr>
+          <a:lstStyle/>
+          <a:p>
+            <a:r>
+              <a:rPr lang="en-US" altLang="zh-CN" sz="3200" b="1">
+                <a:latin typeface="Times New Roman" panose="02020603050405020304"/>
+                <a:ea typeface="Times New Roman" panose="02020603050405020304"/>
+                <a:cs typeface="Times New Roman" panose="02020603050405020304"/>
+              </a:rPr>
+              <a:t>Effect of Temporal Window</a:t>
+            </a:r>
+            <a:endParaRPr lang="en-US" altLang="zh-CN" sz="3200" b="1">
+              <a:latin typeface="Times New Roman" panose="02020603050405020304"/>
+              <a:ea typeface="Times New Roman" panose="02020603050405020304"/>
+              <a:cs typeface="Times New Roman" panose="02020603050405020304"/>
+            </a:endParaRPr>
+          </a:p>
+        </p:txBody>
+      </p:sp>
+      <p:sp>
+        <p:nvSpPr>
+          <p:cNvPr id="31" name="文本框 30"/>
+          <p:cNvSpPr txBox="1"/>
+          <p:nvPr/>
+        </p:nvSpPr>
+        <p:spPr>
+          <a:xfrm>
+            <a:off x="240665" y="5895340"/>
+            <a:ext cx="8556625" cy="521970"/>
+          </a:xfrm>
+          <a:prstGeom prst="rect">
+            <a:avLst/>
+          </a:prstGeom>
+          <a:noFill/>
+        </p:spPr>
+        <p:txBody>
+          <a:bodyPr wrap="square" rtlCol="0">
+            <a:spAutoFit/>
+          </a:bodyPr>
+          <a:p>
+            <a:r>
+              <a:rPr lang="en-US" altLang="zh-CN" sz="1400"/>
+              <a:t>Comparison between predicted and ground-truth curves, In the red-highlighted region, the model without a temporal window shows poor prediction performance.</a:t>
+            </a:r>
+            <a:endParaRPr lang="en-US" altLang="zh-CN" sz="1400"/>
+          </a:p>
+        </p:txBody>
+      </p:sp>
+      <p:sp>
+        <p:nvSpPr>
+          <p:cNvPr id="33" name="文本框 32"/>
+          <p:cNvSpPr txBox="1"/>
+          <p:nvPr/>
+        </p:nvSpPr>
+        <p:spPr>
+          <a:xfrm>
+            <a:off x="275590" y="792000"/>
+            <a:ext cx="8522970" cy="1476375"/>
+          </a:xfrm>
+          <a:prstGeom prst="rect">
+            <a:avLst/>
+          </a:prstGeom>
+        </p:spPr>
+        <p:txBody>
+          <a:bodyPr wrap="square">
+            <a:spAutoFit/>
+          </a:bodyPr>
+          <a:p>
+            <a:pPr marL="285750" indent="-285750">
+              <a:buFont typeface="Wingdings" panose="05000000000000000000" charset="0"/>
+              <a:buChar char="l"/>
+            </a:pPr>
+            <a:r>
+              <a:rPr lang="en-US" altLang="zh-CN"/>
+              <a:t>Without a temporal window : The model learns only the mapping between distance and fingertip aperture, resulting in larger errors during rapid changes.</a:t>
+            </a:r>
+            <a:endParaRPr lang="en-US" altLang="zh-CN"/>
+          </a:p>
+          <a:p>
+            <a:pPr marL="285750" indent="-285750">
+              <a:buFont typeface="Wingdings" panose="05000000000000000000" charset="0"/>
+              <a:buChar char="l"/>
+            </a:pPr>
+            <a:endParaRPr lang="en-US" altLang="zh-CN"/>
+          </a:p>
+          <a:p>
+            <a:pPr marL="285750" indent="-285750">
+              <a:buFont typeface="Wingdings" panose="05000000000000000000" charset="0"/>
+              <a:buChar char="l"/>
+            </a:pPr>
+            <a:r>
+              <a:rPr lang="en-US" altLang="zh-CN"/>
+              <a:t>With a temporal window:The model can utilize short-term motion context to learn temporal trends, improving prediction accuracy.</a:t>
+            </a:r>
+            <a:endParaRPr lang="en-US" altLang="zh-CN"/>
+          </a:p>
+        </p:txBody>
+      </p:sp>
+      <p:pic>
+        <p:nvPicPr>
+          <p:cNvPr id="34" name="图片 33" descr="download"/>
+          <p:cNvPicPr>
+            <a:picLocks noChangeAspect="1"/>
+          </p:cNvPicPr>
+          <p:nvPr/>
+        </p:nvPicPr>
+        <p:blipFill>
+          <a:blip r:embed="rId1"/>
+          <a:stretch>
+            <a:fillRect/>
+          </a:stretch>
+        </p:blipFill>
+        <p:spPr>
+          <a:xfrm>
+            <a:off x="275590" y="2753995"/>
+            <a:ext cx="2640965" cy="3215640"/>
+          </a:xfrm>
+          <a:prstGeom prst="rect">
+            <a:avLst/>
+          </a:prstGeom>
+        </p:spPr>
+      </p:pic>
+      <p:pic>
+        <p:nvPicPr>
+          <p:cNvPr id="36" name="图片 35" descr="C:/Users/Di/Downloads/download (1).pngdownload (1)"/>
+          <p:cNvPicPr>
+            <a:picLocks noChangeAspect="1"/>
+          </p:cNvPicPr>
+          <p:nvPr/>
+        </p:nvPicPr>
+        <p:blipFill>
+          <a:blip r:embed="rId2"/>
+          <a:srcRect r="20"/>
+          <a:stretch>
+            <a:fillRect/>
+          </a:stretch>
+        </p:blipFill>
+        <p:spPr>
+          <a:xfrm>
+            <a:off x="3216275" y="2753995"/>
+            <a:ext cx="2640965" cy="3215640"/>
+          </a:xfrm>
+          <a:prstGeom prst="rect">
+            <a:avLst/>
+          </a:prstGeom>
+        </p:spPr>
+      </p:pic>
+      <p:pic>
+        <p:nvPicPr>
+          <p:cNvPr id="37" name="图片 36" descr="C:/Users/Di/Downloads/download (2).pngdownload (2)"/>
+          <p:cNvPicPr>
+            <a:picLocks noChangeAspect="1"/>
+          </p:cNvPicPr>
+          <p:nvPr/>
+        </p:nvPicPr>
+        <p:blipFill>
+          <a:blip r:embed="rId3"/>
+          <a:srcRect r="20"/>
+          <a:stretch>
+            <a:fillRect/>
+          </a:stretch>
+        </p:blipFill>
+        <p:spPr>
+          <a:xfrm>
+            <a:off x="6156960" y="2753995"/>
+            <a:ext cx="2640965" cy="3215640"/>
+          </a:xfrm>
+          <a:prstGeom prst="rect">
+            <a:avLst/>
+          </a:prstGeom>
+        </p:spPr>
+      </p:pic>
+    </p:spTree>
+  </p:cSld>
+  <p:clrMapOvr>
+    <a:masterClrMapping/>
+  </p:clrMapOvr>
+  <p:timing>
+    <p:tnLst>
+      <p:par>
+        <p:cTn id="1" dur="indefinite" restart="never" nodeType="tmRoot"/>
+      </p:par>
+    </p:tnLst>
+  </p:timing>
+</p:sld>
+</file>
+
+<file path=ppt/slides/slide14.xml><?xml version="1.0" encoding="utf-8"?>
+<p:sld xmlns:a="http://schemas.openxmlformats.org/drawingml/2006/main" xmlns:r="http://schemas.openxmlformats.org/officeDocument/2006/relationships" xmlns:p="http://schemas.openxmlformats.org/presentationml/2006/main">
+  <p:cSld>
+    <p:spTree>
+      <p:nvGrpSpPr>
+        <p:cNvPr id="1" name=""/>
+        <p:cNvGrpSpPr/>
+        <p:nvPr/>
+      </p:nvGrpSpPr>
+      <p:grpSpPr/>
+      <p:sp>
+        <p:nvSpPr>
+          <p:cNvPr id="6" name="文本框 5"/>
+          <p:cNvSpPr>
+            <a:spLocks noGrp="1"/>
+          </p:cNvSpPr>
+          <p:nvPr/>
+        </p:nvSpPr>
+        <p:spPr>
+          <a:xfrm>
+            <a:off x="275590" y="226695"/>
+            <a:ext cx="8522970" cy="583565"/>
+          </a:xfrm>
+          <a:prstGeom prst="rect">
+            <a:avLst/>
+          </a:prstGeom>
+          <a:noFill/>
+        </p:spPr>
+        <p:txBody>
+          <a:bodyPr wrap="square">
+            <a:spAutoFit/>
+          </a:bodyPr>
+          <a:lstStyle/>
+          <a:p>
+            <a:r>
+              <a:rPr lang="en-US" altLang="zh-CN" sz="3200" b="1">
+                <a:latin typeface="Times New Roman" panose="02020603050405020304"/>
+                <a:ea typeface="Times New Roman" panose="02020603050405020304"/>
+                <a:cs typeface="Times New Roman" panose="02020603050405020304"/>
+                <a:sym typeface="+mn-ea"/>
+              </a:rPr>
+              <a:t>Real-Time Experiment</a:t>
+            </a:r>
+            <a:endParaRPr lang="en-US" altLang="zh-CN" sz="3200" b="1">
+              <a:latin typeface="Times New Roman" panose="02020603050405020304"/>
+              <a:ea typeface="Times New Roman" panose="02020603050405020304"/>
+              <a:cs typeface="Times New Roman" panose="02020603050405020304"/>
+            </a:endParaRPr>
+          </a:p>
+        </p:txBody>
+      </p:sp>
+      <p:pic>
+        <p:nvPicPr>
+          <p:cNvPr id="5" name="图片 4" descr="02_trial_metrics"/>
+          <p:cNvPicPr>
+            <a:picLocks noChangeAspect="1"/>
+          </p:cNvPicPr>
+          <p:nvPr/>
+        </p:nvPicPr>
+        <p:blipFill>
+          <a:blip r:embed="rId1"/>
+          <a:stretch>
+            <a:fillRect/>
+          </a:stretch>
+        </p:blipFill>
+        <p:spPr>
+          <a:xfrm>
+            <a:off x="176530" y="3528000"/>
+            <a:ext cx="8792210" cy="2930525"/>
+          </a:xfrm>
+          <a:prstGeom prst="rect">
+            <a:avLst/>
+          </a:prstGeom>
+        </p:spPr>
+      </p:pic>
+      <p:sp>
+        <p:nvSpPr>
+          <p:cNvPr id="16" name="文本框 15"/>
+          <p:cNvSpPr txBox="1"/>
+          <p:nvPr/>
+        </p:nvSpPr>
+        <p:spPr>
+          <a:xfrm>
+            <a:off x="310515" y="737870"/>
+            <a:ext cx="8523605" cy="337185"/>
+          </a:xfrm>
+          <a:prstGeom prst="rect">
+            <a:avLst/>
+          </a:prstGeom>
+          <a:noFill/>
+        </p:spPr>
+        <p:txBody>
+          <a:bodyPr wrap="square" rtlCol="0">
+            <a:spAutoFit/>
+          </a:bodyPr>
+          <a:p>
+            <a:r>
+              <a:rPr lang="en-US" altLang="zh-CN" sz="1600">
+                <a:solidFill>
+                  <a:srgbClr val="6A6A6A"/>
+                </a:solidFill>
+              </a:rPr>
+              <a:t>9 validation trials across three cube sizes (3 trials per size)</a:t>
+            </a:r>
+            <a:endParaRPr lang="en-US" altLang="zh-CN" sz="1600">
+              <a:solidFill>
+                <a:srgbClr val="6A6A6A"/>
+              </a:solidFill>
+            </a:endParaRPr>
+          </a:p>
+        </p:txBody>
+      </p:sp>
+    </p:spTree>
+  </p:cSld>
+  <p:clrMapOvr>
+    <a:masterClrMapping/>
+  </p:clrMapOvr>
+  <p:timing>
+    <p:tnLst>
+      <p:par>
+        <p:cTn id="1" dur="indefinite" restart="never" nodeType="tmRoot"/>
+      </p:par>
+    </p:tnLst>
+  </p:timing>
+</p:sld>
+</file>
+
+<file path=ppt/slides/slide15.xml><?xml version="1.0" encoding="utf-8"?>
+<p:sld xmlns:a="http://schemas.openxmlformats.org/drawingml/2006/main" xmlns:r="http://schemas.openxmlformats.org/officeDocument/2006/relationships" xmlns:p="http://schemas.openxmlformats.org/presentationml/2006/main">
+  <p:cSld>
+    <p:spTree>
+      <p:nvGrpSpPr>
+        <p:cNvPr id="1" name=""/>
+        <p:cNvGrpSpPr/>
+        <p:nvPr/>
+      </p:nvGrpSpPr>
+      <p:grpSpPr/>
+      <p:sp>
+        <p:nvSpPr>
+          <p:cNvPr id="6" name="文本框 5"/>
+          <p:cNvSpPr>
+            <a:spLocks noGrp="1"/>
+          </p:cNvSpPr>
+          <p:nvPr/>
+        </p:nvSpPr>
+        <p:spPr>
+          <a:xfrm>
+            <a:off x="275590" y="226695"/>
+            <a:ext cx="8522970" cy="583565"/>
+          </a:xfrm>
+          <a:prstGeom prst="rect">
+            <a:avLst/>
+          </a:prstGeom>
+          <a:noFill/>
+        </p:spPr>
+        <p:txBody>
+          <a:bodyPr wrap="square">
+            <a:spAutoFit/>
+          </a:bodyPr>
+          <a:lstStyle/>
+          <a:p>
+            <a:r>
+              <a:rPr lang="en-US" altLang="zh-CN" sz="3200" b="1">
+                <a:latin typeface="Times New Roman" panose="02020603050405020304"/>
+                <a:ea typeface="Times New Roman" panose="02020603050405020304"/>
+                <a:cs typeface="Times New Roman" panose="02020603050405020304"/>
+                <a:sym typeface="+mn-ea"/>
+              </a:rPr>
+              <a:t>Real-Time Experiment</a:t>
+            </a:r>
+            <a:endParaRPr lang="en-US" altLang="zh-CN" sz="3200" b="1">
+              <a:latin typeface="Times New Roman" panose="02020603050405020304"/>
+              <a:ea typeface="Times New Roman" panose="02020603050405020304"/>
+              <a:cs typeface="Times New Roman" panose="02020603050405020304"/>
+            </a:endParaRPr>
+          </a:p>
+        </p:txBody>
+      </p:sp>
+      <p:sp>
+        <p:nvSpPr>
+          <p:cNvPr id="3" name="文本框 2"/>
+          <p:cNvSpPr txBox="1"/>
+          <p:nvPr/>
+        </p:nvSpPr>
+        <p:spPr>
+          <a:xfrm>
+            <a:off x="275590" y="941070"/>
+            <a:ext cx="3048000" cy="368300"/>
+          </a:xfrm>
+          <a:prstGeom prst="rect">
+            <a:avLst/>
+          </a:prstGeom>
+          <a:noFill/>
+        </p:spPr>
+        <p:txBody>
+          <a:bodyPr wrap="square" rtlCol="0">
+            <a:spAutoFit/>
+          </a:bodyPr>
+          <a:p>
+            <a:r>
+              <a:rPr lang="en-US" altLang="zh-CN">
+                <a:ea typeface="宋体" panose="02010600030101010101" pitchFamily="2" charset="-122"/>
+              </a:rPr>
+              <a:t>Three phase comparison</a:t>
+            </a:r>
+            <a:endParaRPr lang="en-US" altLang="zh-CN">
+              <a:ea typeface="宋体" panose="02010600030101010101" pitchFamily="2" charset="-122"/>
+            </a:endParaRPr>
+          </a:p>
+        </p:txBody>
+      </p:sp>
+      <p:pic>
+        <p:nvPicPr>
+          <p:cNvPr id="4" name="图片 3" descr="C:/Users/Di/Downloads/download (3).pngdownload (3)"/>
+          <p:cNvPicPr>
+            <a:picLocks noChangeAspect="1"/>
+          </p:cNvPicPr>
+          <p:nvPr/>
+        </p:nvPicPr>
+        <p:blipFill>
+          <a:blip r:embed="rId1"/>
+          <a:srcRect/>
+          <a:stretch>
+            <a:fillRect/>
+          </a:stretch>
+        </p:blipFill>
+        <p:spPr>
+          <a:xfrm>
+            <a:off x="879475" y="1828800"/>
+            <a:ext cx="7315200" cy="5029200"/>
+          </a:xfrm>
+          <a:prstGeom prst="rect">
+            <a:avLst/>
+          </a:prstGeom>
+        </p:spPr>
+      </p:pic>
+    </p:spTree>
+  </p:cSld>
+  <p:clrMapOvr>
+    <a:masterClrMapping/>
+  </p:clrMapOvr>
+  <p:timing>
+    <p:tnLst>
+      <p:par>
+        <p:cTn id="1" dur="indefinite" restart="never" nodeType="tmRoot"/>
+      </p:par>
+    </p:tnLst>
+  </p:timing>
+</p:sld>
+</file>
+
+<file path=ppt/slides/slide16.xml><?xml version="1.0" encoding="utf-8"?>
+<p:sld xmlns:a="http://schemas.openxmlformats.org/drawingml/2006/main" xmlns:r="http://schemas.openxmlformats.org/officeDocument/2006/relationships" xmlns:p="http://schemas.openxmlformats.org/presentationml/2006/main">
+  <p:cSld>
+    <p:spTree>
+      <p:nvGrpSpPr>
+        <p:cNvPr id="1" name=""/>
+        <p:cNvGrpSpPr/>
+        <p:nvPr/>
+      </p:nvGrpSpPr>
+      <p:grpSpPr/>
+      <p:sp>
+        <p:nvSpPr>
+          <p:cNvPr id="6" name="文本框 5"/>
+          <p:cNvSpPr>
+            <a:spLocks noGrp="1"/>
+          </p:cNvSpPr>
+          <p:nvPr/>
+        </p:nvSpPr>
+        <p:spPr>
+          <a:xfrm>
+            <a:off x="275590" y="226695"/>
+            <a:ext cx="8522970" cy="583565"/>
+          </a:xfrm>
+          <a:prstGeom prst="rect">
+            <a:avLst/>
+          </a:prstGeom>
+          <a:noFill/>
+        </p:spPr>
+        <p:txBody>
+          <a:bodyPr wrap="square">
+            <a:spAutoFit/>
+          </a:bodyPr>
+          <a:lstStyle/>
+          <a:p>
+            <a:r>
+              <a:rPr lang="en-US" altLang="zh-CN" sz="3200" b="1">
+                <a:latin typeface="Times New Roman" panose="02020603050405020304"/>
+                <a:ea typeface="Times New Roman" panose="02020603050405020304"/>
+                <a:cs typeface="Times New Roman" panose="02020603050405020304"/>
+              </a:rPr>
+              <a:t>Summary</a:t>
+            </a:r>
+            <a:endParaRPr lang="en-US" altLang="zh-CN" sz="3200" b="1">
+              <a:latin typeface="Times New Roman" panose="02020603050405020304"/>
+              <a:ea typeface="Times New Roman" panose="02020603050405020304"/>
+              <a:cs typeface="Times New Roman" panose="02020603050405020304"/>
+            </a:endParaRPr>
+          </a:p>
+        </p:txBody>
+      </p:sp>
+      <p:sp>
+        <p:nvSpPr>
+          <p:cNvPr id="3" name="文本框 5"/>
+          <p:cNvSpPr>
+            <a:spLocks noGrp="1"/>
+          </p:cNvSpPr>
+          <p:nvPr/>
+        </p:nvSpPr>
+        <p:spPr>
+          <a:xfrm>
+            <a:off x="275590" y="4140000"/>
+            <a:ext cx="8522970" cy="583565"/>
+          </a:xfrm>
+          <a:prstGeom prst="rect">
+            <a:avLst/>
+          </a:prstGeom>
+          <a:noFill/>
+        </p:spPr>
+        <p:txBody>
+          <a:bodyPr wrap="square">
+            <a:spAutoFit/>
+          </a:bodyPr>
+          <a:lstStyle/>
+          <a:p>
+            <a:r>
+              <a:rPr lang="en-US" altLang="zh-CN" sz="3200" b="1">
+                <a:latin typeface="Times New Roman" panose="02020603050405020304"/>
+                <a:ea typeface="Times New Roman" panose="02020603050405020304"/>
+                <a:cs typeface="Times New Roman" panose="02020603050405020304"/>
+              </a:rPr>
+              <a:t>Future Work</a:t>
+            </a:r>
+            <a:endParaRPr lang="en-US" altLang="zh-CN" sz="3200" b="1">
+              <a:latin typeface="Times New Roman" panose="02020603050405020304"/>
+              <a:ea typeface="Times New Roman" panose="02020603050405020304"/>
+              <a:cs typeface="Times New Roman" panose="02020603050405020304"/>
+            </a:endParaRPr>
+          </a:p>
+        </p:txBody>
+      </p:sp>
+    </p:spTree>
+  </p:cSld>
+  <p:clrMapOvr>
+    <a:masterClrMapping/>
+  </p:clrMapOvr>
+  <p:timing>
+    <p:tnLst>
+      <p:par>
+        <p:cTn id="1" dur="indefinite" restart="never" nodeType="tmRoot"/>
+      </p:par>
+    </p:tnLst>
+  </p:timing>
+</p:sld>
+</file>
+
+<file path=ppt/slides/slide2.xml><?xml version="1.0" encoding="utf-8"?>
+<p:sld xmlns:a="http://schemas.openxmlformats.org/drawingml/2006/main" xmlns:r="http://schemas.openxmlformats.org/officeDocument/2006/relationships" xmlns:p="http://schemas.openxmlformats.org/presentationml/2006/main">
+  <p:cSld>
+    <p:spTree>
+      <p:nvGrpSpPr>
+        <p:cNvPr id="1" name=""/>
+        <p:cNvGrpSpPr/>
+        <p:nvPr/>
+      </p:nvGrpSpPr>
+      <p:grpSpPr/>
+      <p:sp>
+        <p:nvSpPr>
+          <p:cNvPr id="6" name="文本框 5"/>
+          <p:cNvSpPr txBox="1"/>
+          <p:nvPr/>
+        </p:nvSpPr>
+        <p:spPr>
+          <a:xfrm>
+            <a:off x="220980" y="226695"/>
+            <a:ext cx="8717915" cy="583565"/>
+          </a:xfrm>
+          <a:prstGeom prst="rect">
+            <a:avLst/>
+          </a:prstGeom>
+          <a:noFill/>
+        </p:spPr>
+        <p:txBody>
+          <a:bodyPr wrap="square" rtlCol="0">
+            <a:spAutoFit/>
+          </a:bodyPr>
+          <a:p>
+            <a:r>
+              <a:rPr lang="en-US" altLang="zh-CN" sz="3200" b="1">
+                <a:latin typeface="Times New Roman" panose="02020603050405020304" charset="0"/>
+                <a:ea typeface="宋体" panose="02010600030101010101" pitchFamily="2" charset="-122"/>
+                <a:cs typeface="Times New Roman" panose="02020603050405020304" charset="0"/>
+              </a:rPr>
+              <a:t>Background</a:t>
+            </a:r>
+            <a:endParaRPr lang="en-US" altLang="zh-CN" sz="3200" b="1">
+              <a:latin typeface="Times New Roman" panose="02020603050405020304" charset="0"/>
+              <a:ea typeface="宋体" panose="02010600030101010101" pitchFamily="2" charset="-122"/>
+              <a:cs typeface="Times New Roman" panose="02020603050405020304" charset="0"/>
+            </a:endParaRPr>
+          </a:p>
+        </p:txBody>
+      </p:sp>
+    </p:spTree>
+  </p:cSld>
+  <p:clrMapOvr>
+    <a:masterClrMapping/>
+  </p:clrMapOvr>
+  <p:timing>
+    <p:tnLst>
+      <p:par>
+        <p:cTn id="1" dur="indefinite" restart="never" nodeType="tmRoot"/>
+      </p:par>
+    </p:tnLst>
+  </p:timing>
+</p:sld>
+</file>
+
+<file path=ppt/slides/slide3.xml><?xml version="1.0" encoding="utf-8"?>
+<p:sld xmlns:a="http://schemas.openxmlformats.org/drawingml/2006/main" xmlns:r="http://schemas.openxmlformats.org/officeDocument/2006/relationships" xmlns:p="http://schemas.openxmlformats.org/presentationml/2006/main">
+  <p:cSld>
+    <p:spTree>
+      <p:nvGrpSpPr>
+        <p:cNvPr id="1" name=""/>
+        <p:cNvGrpSpPr/>
+        <p:nvPr/>
+      </p:nvGrpSpPr>
+      <p:grpSpPr/>
+      <p:sp>
+        <p:nvSpPr>
+          <p:cNvPr id="6" name="文本框 5"/>
+          <p:cNvSpPr txBox="1"/>
+          <p:nvPr/>
+        </p:nvSpPr>
+        <p:spPr>
+          <a:xfrm>
+            <a:off x="220980" y="226695"/>
+            <a:ext cx="8717915" cy="615950"/>
+          </a:xfrm>
+          <a:prstGeom prst="rect">
+            <a:avLst/>
+          </a:prstGeom>
+          <a:noFill/>
+        </p:spPr>
+        <p:txBody>
+          <a:bodyPr wrap="square" rtlCol="0">
+            <a:noAutofit/>
+          </a:bodyPr>
+          <a:p>
+            <a:r>
+              <a:rPr lang="en-US" altLang="zh-CN" sz="3200" b="1">
+                <a:latin typeface="Times New Roman" panose="02020603050405020304" charset="0"/>
+                <a:ea typeface="宋体" panose="02010600030101010101" pitchFamily="2" charset="-122"/>
+                <a:cs typeface="Times New Roman" panose="02020603050405020304" charset="0"/>
+                <a:sym typeface="+mn-ea"/>
+              </a:rPr>
+              <a:t>Related</a:t>
+            </a:r>
+            <a:r>
+              <a:rPr lang="en-US" altLang="zh-CN" sz="3200" b="1">
+                <a:latin typeface="Times New Roman" panose="02020603050405020304" charset="0"/>
+                <a:ea typeface="宋体" panose="02010600030101010101" pitchFamily="2" charset="-122"/>
+                <a:cs typeface="Times New Roman" panose="02020603050405020304" charset="0"/>
+                <a:sym typeface="+mn-ea"/>
+              </a:rPr>
+              <a:t> Study</a:t>
+            </a:r>
+            <a:endParaRPr lang="en-US" altLang="zh-CN" sz="3200" b="1">
+              <a:latin typeface="Times New Roman" panose="02020603050405020304" charset="0"/>
+              <a:ea typeface="宋体" panose="02010600030101010101" pitchFamily="2" charset="-122"/>
+              <a:cs typeface="Times New Roman" panose="02020603050405020304" charset="0"/>
+            </a:endParaRPr>
+          </a:p>
+          <a:p>
+            <a:endParaRPr lang="en-US" altLang="zh-CN" sz="3200" b="1">
+              <a:latin typeface="Times New Roman" panose="02020603050405020304" charset="0"/>
+              <a:ea typeface="宋体" panose="02010600030101010101" pitchFamily="2" charset="-122"/>
+              <a:cs typeface="Times New Roman" panose="02020603050405020304" charset="0"/>
+            </a:endParaRPr>
+          </a:p>
+        </p:txBody>
+      </p:sp>
+    </p:spTree>
+  </p:cSld>
+  <p:clrMapOvr>
+    <a:masterClrMapping/>
+  </p:clrMapOvr>
+  <p:timing>
+    <p:tnLst>
+      <p:par>
+        <p:cTn id="1" dur="indefinite" restart="never" nodeType="tmRoot"/>
+      </p:par>
+    </p:tnLst>
+  </p:timing>
+</p:sld>
+</file>
+
+<file path=ppt/slides/slide4.xml><?xml version="1.0" encoding="utf-8"?>
+<p:sld xmlns:a="http://schemas.openxmlformats.org/drawingml/2006/main" xmlns:r="http://schemas.openxmlformats.org/officeDocument/2006/relationships" xmlns:p="http://schemas.openxmlformats.org/presentationml/2006/main">
+  <p:cSld>
+    <p:spTree>
+      <p:nvGrpSpPr>
+        <p:cNvPr id="1" name=""/>
+        <p:cNvGrpSpPr/>
+        <p:nvPr/>
+      </p:nvGrpSpPr>
+      <p:grpSpPr/>
+      <p:sp>
+        <p:nvSpPr>
+          <p:cNvPr id="6" name="文本框 5"/>
+          <p:cNvSpPr txBox="1"/>
+          <p:nvPr/>
+        </p:nvSpPr>
+        <p:spPr>
+          <a:xfrm>
+            <a:off x="220980" y="226695"/>
+            <a:ext cx="8717915" cy="760730"/>
+          </a:xfrm>
+          <a:prstGeom prst="rect">
+            <a:avLst/>
+          </a:prstGeom>
+          <a:noFill/>
+        </p:spPr>
+        <p:txBody>
+          <a:bodyPr wrap="square" rtlCol="0">
+            <a:noAutofit/>
+          </a:bodyPr>
+          <a:p>
+            <a:r>
+              <a:rPr lang="en-US" altLang="zh-CN" sz="3200" b="1" dirty="0"/>
+              <a:t>Research Objective </a:t>
+            </a:r>
+            <a:r>
+              <a:rPr lang="en-US" altLang="zh-CN" sz="3200" b="1" dirty="0">
+                <a:sym typeface="Avenir Heavy"/>
+              </a:rPr>
+              <a:t>&amp; Question</a:t>
+            </a:r>
+            <a:endParaRPr lang="en-US" altLang="zh-CN" sz="3200" b="1" dirty="0"/>
+          </a:p>
+          <a:p>
+            <a:endParaRPr lang="en-US" altLang="zh-CN" sz="3200" b="1">
+              <a:latin typeface="Times New Roman" panose="02020603050405020304" charset="0"/>
+              <a:ea typeface="宋体" panose="02010600030101010101" pitchFamily="2" charset="-122"/>
+              <a:cs typeface="Times New Roman" panose="02020603050405020304" charset="0"/>
+            </a:endParaRPr>
+          </a:p>
+        </p:txBody>
+      </p:sp>
+      <p:grpSp>
+        <p:nvGrpSpPr>
+          <p:cNvPr id="96" name="组合 95"/>
+          <p:cNvGrpSpPr/>
+          <p:nvPr>
+            <p:custDataLst>
+              <p:tags r:id="rId1"/>
+            </p:custDataLst>
+          </p:nvPr>
+        </p:nvGrpSpPr>
+        <p:grpSpPr>
+          <a:xfrm>
+            <a:off x="219710" y="2963545"/>
+            <a:ext cx="8630920" cy="1564005"/>
+            <a:chOff x="348" y="7526"/>
+            <a:chExt cx="13592" cy="2928"/>
+          </a:xfrm>
+        </p:grpSpPr>
+        <p:grpSp>
+          <p:nvGrpSpPr>
+            <p:cNvPr id="90" name="组合 89"/>
+            <p:cNvGrpSpPr/>
+            <p:nvPr>
+              <p:custDataLst>
+                <p:tags r:id="rId2"/>
+              </p:custDataLst>
+            </p:nvPr>
+          </p:nvGrpSpPr>
+          <p:grpSpPr>
+            <a:xfrm rot="0">
+              <a:off x="348" y="7526"/>
+              <a:ext cx="13593" cy="2929"/>
+              <a:chOff x="790" y="4952"/>
+              <a:chExt cx="3791" cy="2929"/>
+            </a:xfrm>
+          </p:grpSpPr>
+          <p:grpSp>
+            <p:nvGrpSpPr>
+              <p:cNvPr id="91" name="组合 90"/>
+              <p:cNvGrpSpPr/>
+              <p:nvPr/>
+            </p:nvGrpSpPr>
+            <p:grpSpPr>
+              <a:xfrm>
+                <a:off x="790" y="4952"/>
+                <a:ext cx="3791" cy="2929"/>
+                <a:chOff x="334" y="5920"/>
+                <a:chExt cx="5673" cy="2929"/>
+              </a:xfrm>
+            </p:grpSpPr>
+            <p:sp>
+              <p:nvSpPr>
+                <p:cNvPr id="92" name="Shape 25"/>
+                <p:cNvSpPr/>
+                <p:nvPr>
+                  <p:custDataLst>
+                    <p:tags r:id="rId3"/>
+                  </p:custDataLst>
+                </p:nvPr>
+              </p:nvSpPr>
+              <p:spPr>
+                <a:xfrm>
+                  <a:off x="334" y="6936"/>
+                  <a:ext cx="5672" cy="1913"/>
+                </a:xfrm>
+                <a:prstGeom prst="rect">
+                  <a:avLst/>
+                </a:prstGeom>
+                <a:solidFill>
+                  <a:srgbClr val="F59E0B">
+                    <a:alpha val="10000"/>
+                  </a:srgbClr>
+                </a:solidFill>
+                <a:ln w="19050">
+                  <a:solidFill>
+                    <a:srgbClr val="F59E0B"/>
+                  </a:solidFill>
+                  <a:prstDash val="solid"/>
+                </a:ln>
+              </p:spPr>
+            </p:sp>
+            <p:sp>
+              <p:nvSpPr>
+                <p:cNvPr id="93" name="Shape 26"/>
+                <p:cNvSpPr/>
+                <p:nvPr>
+                  <p:custDataLst>
+                    <p:tags r:id="rId4"/>
+                  </p:custDataLst>
+                </p:nvPr>
+              </p:nvSpPr>
+              <p:spPr>
+                <a:xfrm>
+                  <a:off x="335" y="5920"/>
+                  <a:ext cx="5672" cy="1016"/>
+                </a:xfrm>
+                <a:prstGeom prst="rect">
+                  <a:avLst/>
+                </a:prstGeom>
+                <a:solidFill>
+                  <a:srgbClr val="F59E0B"/>
+                </a:solidFill>
+                <a:ln w="19050">
+                  <a:solidFill>
+                    <a:srgbClr val="F59E0B"/>
+                  </a:solidFill>
+                  <a:prstDash val="solid"/>
+                </a:ln>
+              </p:spPr>
+            </p:sp>
+          </p:grpSp>
+          <p:sp>
+            <p:nvSpPr>
+              <p:cNvPr id="94" name="Text 27"/>
+              <p:cNvSpPr/>
+              <p:nvPr>
+                <p:custDataLst>
+                  <p:tags r:id="rId5"/>
+                </p:custDataLst>
+              </p:nvPr>
+            </p:nvSpPr>
+            <p:spPr>
+              <a:xfrm>
+                <a:off x="790" y="4952"/>
+                <a:ext cx="3790" cy="1016"/>
+              </a:xfrm>
+              <a:prstGeom prst="rect">
+                <a:avLst/>
+              </a:prstGeom>
+              <a:noFill/>
+            </p:spPr>
+            <p:txBody>
+              <a:bodyPr wrap="square" lIns="0" tIns="0" rIns="0" bIns="0" rtlCol="0" anchor="ctr"/>
+              <a:lstStyle/>
+              <a:p>
+                <a:pPr marL="0" indent="0" algn="ctr">
+                  <a:buNone/>
+                </a:pPr>
+                <a:r>
+                  <a:rPr lang="en-US" altLang="zh-CN" b="1" dirty="0">
+                    <a:sym typeface="+mn-ea"/>
+                  </a:rPr>
+                  <a:t>RQ</a:t>
+                </a:r>
+                <a:r>
+                  <a:rPr lang="en-US" altLang="zh-CN" b="1" dirty="0">
+                    <a:sym typeface="Avenir Heavy"/>
+                  </a:rPr>
+                  <a:t>1</a:t>
+                </a:r>
+                <a:endParaRPr lang="en-US" altLang="zh-CN" b="1" dirty="0"/>
+              </a:p>
+            </p:txBody>
+          </p:sp>
+        </p:grpSp>
+        <p:sp>
+          <p:nvSpPr>
+            <p:cNvPr id="95" name="文本框 94"/>
+            <p:cNvSpPr txBox="1"/>
+            <p:nvPr>
+              <p:custDataLst>
+                <p:tags r:id="rId6"/>
+              </p:custDataLst>
+            </p:nvPr>
+          </p:nvSpPr>
+          <p:spPr>
+            <a:xfrm>
+              <a:off x="348" y="8542"/>
+              <a:ext cx="13590" cy="1913"/>
+            </a:xfrm>
+            <a:prstGeom prst="rect">
+              <a:avLst/>
+            </a:prstGeom>
+            <a:noFill/>
+          </p:spPr>
+          <p:txBody>
+            <a:bodyPr wrap="square" rtlCol="0" anchor="t">
+              <a:noAutofit/>
+            </a:bodyPr>
+            <a:p>
+              <a:r>
+                <a:rPr lang="en-US" altLang="zh-CN">
+                  <a:sym typeface="+mn-ea"/>
+                </a:rPr>
+                <a:t>Is there a consistent relationship between hand–object distance and fingertip aperture during reach-to-grasp movements</a:t>
+              </a:r>
+              <a:r>
+                <a:rPr lang="en-US" altLang="zh-CN">
+                  <a:ea typeface="宋体" panose="02010600030101010101" pitchFamily="2" charset="-122"/>
+                </a:rPr>
+                <a:t>?</a:t>
+              </a:r>
+              <a:endParaRPr lang="en-US" altLang="zh-CN">
+                <a:ea typeface="宋体" panose="02010600030101010101" pitchFamily="2" charset="-122"/>
+              </a:endParaRPr>
+            </a:p>
+          </p:txBody>
+        </p:sp>
+      </p:grpSp>
+      <p:sp>
+        <p:nvSpPr>
+          <p:cNvPr id="2" name="灯片编号占位符 1"/>
+          <p:cNvSpPr>
+            <a:spLocks noGrp="1"/>
+          </p:cNvSpPr>
+          <p:nvPr>
+            <p:ph type="sldNum" sz="quarter" idx="12"/>
+          </p:nvPr>
+        </p:nvSpPr>
+        <p:spPr/>
+        <p:txBody>
+          <a:bodyPr/>
+          <a:p>
+            <a:fld id="{6F00E456-75B8-4C92-99E8-A0CAB60115A8}" type="slidenum">
+              <a:rPr kumimoji="1" lang="ja-JP" altLang="en-US" smtClean="0"/>
+            </a:fld>
+            <a:endParaRPr kumimoji="1" lang="ja-JP" altLang="en-US"/>
+          </a:p>
+        </p:txBody>
+      </p:sp>
+      <p:grpSp>
+        <p:nvGrpSpPr>
+          <p:cNvPr id="3" name="组合 2"/>
+          <p:cNvGrpSpPr/>
+          <p:nvPr>
+            <p:custDataLst>
+              <p:tags r:id="rId7"/>
+            </p:custDataLst>
+          </p:nvPr>
+        </p:nvGrpSpPr>
+        <p:grpSpPr>
+          <a:xfrm>
+            <a:off x="219710" y="4939030"/>
+            <a:ext cx="8630920" cy="1564005"/>
+            <a:chOff x="348" y="7526"/>
+            <a:chExt cx="13592" cy="2928"/>
+          </a:xfrm>
+        </p:grpSpPr>
+        <p:grpSp>
+          <p:nvGrpSpPr>
+            <p:cNvPr id="4" name="组合 3"/>
+            <p:cNvGrpSpPr/>
+            <p:nvPr>
+              <p:custDataLst>
+                <p:tags r:id="rId8"/>
+              </p:custDataLst>
+            </p:nvPr>
+          </p:nvGrpSpPr>
+          <p:grpSpPr>
+            <a:xfrm rot="0">
+              <a:off x="348" y="7526"/>
+              <a:ext cx="13593" cy="2929"/>
+              <a:chOff x="790" y="4952"/>
+              <a:chExt cx="3791" cy="2929"/>
+            </a:xfrm>
+          </p:grpSpPr>
+          <p:grpSp>
+            <p:nvGrpSpPr>
+              <p:cNvPr id="5" name="组合 4"/>
+              <p:cNvGrpSpPr/>
+              <p:nvPr/>
+            </p:nvGrpSpPr>
+            <p:grpSpPr>
+              <a:xfrm>
+                <a:off x="790" y="4952"/>
+                <a:ext cx="3791" cy="2929"/>
+                <a:chOff x="334" y="5920"/>
+                <a:chExt cx="5673" cy="2929"/>
+              </a:xfrm>
+            </p:grpSpPr>
+            <p:sp>
+              <p:nvSpPr>
+                <p:cNvPr id="7" name="Shape 25"/>
+                <p:cNvSpPr/>
+                <p:nvPr>
+                  <p:custDataLst>
+                    <p:tags r:id="rId9"/>
+                  </p:custDataLst>
+                </p:nvPr>
+              </p:nvSpPr>
+              <p:spPr>
+                <a:xfrm>
+                  <a:off x="334" y="6936"/>
+                  <a:ext cx="5672" cy="1913"/>
+                </a:xfrm>
+                <a:prstGeom prst="rect">
+                  <a:avLst/>
+                </a:prstGeom>
+                <a:solidFill>
+                  <a:srgbClr val="F59E0B">
+                    <a:alpha val="10000"/>
+                  </a:srgbClr>
+                </a:solidFill>
+                <a:ln w="19050">
+                  <a:solidFill>
+                    <a:srgbClr val="F59E0B"/>
+                  </a:solidFill>
+                  <a:prstDash val="solid"/>
+                </a:ln>
+              </p:spPr>
+            </p:sp>
+            <p:sp>
+              <p:nvSpPr>
+                <p:cNvPr id="8" name="Shape 26"/>
+                <p:cNvSpPr/>
+                <p:nvPr>
+                  <p:custDataLst>
+                    <p:tags r:id="rId10"/>
+                  </p:custDataLst>
+                </p:nvPr>
+              </p:nvSpPr>
+              <p:spPr>
+                <a:xfrm>
+                  <a:off x="335" y="5920"/>
+                  <a:ext cx="5672" cy="1016"/>
+                </a:xfrm>
+                <a:prstGeom prst="rect">
+                  <a:avLst/>
+                </a:prstGeom>
+                <a:solidFill>
+                  <a:srgbClr val="F59E0B"/>
+                </a:solidFill>
+                <a:ln w="19050">
+                  <a:solidFill>
+                    <a:srgbClr val="F59E0B"/>
+                  </a:solidFill>
+                  <a:prstDash val="solid"/>
+                </a:ln>
+              </p:spPr>
+            </p:sp>
+          </p:grpSp>
+          <p:sp>
+            <p:nvSpPr>
+              <p:cNvPr id="9" name="Text 27"/>
+              <p:cNvSpPr/>
+              <p:nvPr>
+                <p:custDataLst>
+                  <p:tags r:id="rId11"/>
+                </p:custDataLst>
+              </p:nvPr>
+            </p:nvSpPr>
+            <p:spPr>
+              <a:xfrm>
+                <a:off x="790" y="4952"/>
+                <a:ext cx="3790" cy="1016"/>
+              </a:xfrm>
+              <a:prstGeom prst="rect">
+                <a:avLst/>
+              </a:prstGeom>
+              <a:noFill/>
+            </p:spPr>
+            <p:txBody>
+              <a:bodyPr wrap="square" lIns="0" tIns="0" rIns="0" bIns="0" rtlCol="0" anchor="ctr"/>
+              <a:lstStyle/>
+              <a:p>
+                <a:pPr marL="0" indent="0" algn="ctr">
+                  <a:buNone/>
+                </a:pPr>
+                <a:r>
+                  <a:rPr lang="en-US" altLang="zh-CN" b="1" dirty="0">
+                    <a:sym typeface="+mn-ea"/>
+                  </a:rPr>
+                  <a:t>RQ</a:t>
+                </a:r>
+                <a:r>
+                  <a:rPr lang="en-US" altLang="zh-CN" b="1" dirty="0">
+                    <a:sym typeface="Avenir Heavy"/>
+                  </a:rPr>
+                  <a:t>2</a:t>
+                </a:r>
+                <a:endParaRPr lang="en-US" altLang="zh-CN" b="1" dirty="0"/>
+              </a:p>
+            </p:txBody>
+          </p:sp>
+        </p:grpSp>
+        <p:sp>
+          <p:nvSpPr>
+            <p:cNvPr id="10" name="文本框 9"/>
+            <p:cNvSpPr txBox="1"/>
+            <p:nvPr>
+              <p:custDataLst>
+                <p:tags r:id="rId12"/>
+              </p:custDataLst>
+            </p:nvPr>
+          </p:nvSpPr>
+          <p:spPr>
+            <a:xfrm>
+              <a:off x="348" y="8542"/>
+              <a:ext cx="13590" cy="1913"/>
+            </a:xfrm>
+            <a:prstGeom prst="rect">
+              <a:avLst/>
+            </a:prstGeom>
+            <a:noFill/>
+          </p:spPr>
+          <p:txBody>
+            <a:bodyPr wrap="square" rtlCol="0" anchor="t">
+              <a:noAutofit/>
+            </a:bodyPr>
+            <a:p>
+              <a:r>
+                <a:rPr lang="en-US" altLang="zh-CN">
+                  <a:ea typeface="宋体" panose="02010600030101010101" pitchFamily="2" charset="-122"/>
+                </a:rPr>
+                <a:t>How accurately can a regression model </a:t>
+              </a:r>
+              <a:r>
+                <a:rPr lang="en-US" altLang="zh-CN">
+                  <a:ea typeface="宋体" panose="02010600030101010101" pitchFamily="2" charset="-122"/>
+                  <a:sym typeface="+mn-ea"/>
+                </a:rPr>
+                <a:t>predict </a:t>
+              </a:r>
+              <a:r>
+                <a:rPr lang="en-US" altLang="zh-CN">
+                  <a:ea typeface="宋体" panose="02010600030101010101" pitchFamily="2" charset="-122"/>
+                </a:rPr>
+                <a:t>fingertip aperture </a:t>
+              </a:r>
+              <a:r>
+                <a:rPr lang="en-US" altLang="zh-CN">
+                  <a:sym typeface="+mn-ea"/>
+                </a:rPr>
+                <a:t>from hand–object distance</a:t>
+              </a:r>
+              <a:r>
+                <a:rPr lang="en-US" altLang="zh-CN">
+                  <a:ea typeface="宋体" panose="02010600030101010101" pitchFamily="2" charset="-122"/>
+                </a:rPr>
+                <a:t> during reach-to-grasp movements?</a:t>
+              </a:r>
+              <a:endParaRPr lang="en-US" altLang="zh-CN">
+                <a:ea typeface="宋体" panose="02010600030101010101" pitchFamily="2" charset="-122"/>
+              </a:endParaRPr>
+            </a:p>
+          </p:txBody>
+        </p:sp>
+      </p:grpSp>
+      <p:sp>
+        <p:nvSpPr>
+          <p:cNvPr id="11" name="文本框 10"/>
+          <p:cNvSpPr txBox="1"/>
+          <p:nvPr/>
+        </p:nvSpPr>
+        <p:spPr>
+          <a:xfrm>
+            <a:off x="275590" y="909320"/>
+            <a:ext cx="8573135" cy="1753235"/>
+          </a:xfrm>
+          <a:prstGeom prst="rect">
+            <a:avLst/>
+          </a:prstGeom>
+          <a:noFill/>
+        </p:spPr>
+        <p:txBody>
+          <a:bodyPr wrap="square" rtlCol="0">
+            <a:spAutoFit/>
+          </a:bodyPr>
+          <a:p>
+            <a:r>
+              <a:rPr lang="en-US" altLang="zh-CN"/>
+              <a:t>During reach-to-grasp movements, finger opening and closing are coordinated with the hand’s approach to an object.</a:t>
+            </a:r>
+            <a:endParaRPr lang="en-US" altLang="zh-CN"/>
+          </a:p>
+          <a:p>
+            <a:endParaRPr lang="en-US" altLang="zh-CN"/>
+          </a:p>
+          <a:p>
+            <a:r>
+              <a:rPr lang="en-US" altLang="zh-CN"/>
+              <a:t>This study aims to investigate the relationship between hand–object distance and fingertip aperture, and further examine whether a regression model can </a:t>
+            </a:r>
+            <a:r>
+              <a:rPr lang="en-US" altLang="zh-CN">
+                <a:ea typeface="宋体" panose="02010600030101010101" pitchFamily="2" charset="-122"/>
+                <a:sym typeface="+mn-ea"/>
+              </a:rPr>
+              <a:t>predict </a:t>
+            </a:r>
+            <a:r>
+              <a:rPr lang="en-US" altLang="zh-CN"/>
+              <a:t>fingertip aperture from hand–object distance in real time.</a:t>
+            </a:r>
+            <a:endParaRPr lang="en-US" altLang="zh-CN"/>
+          </a:p>
+        </p:txBody>
+      </p:sp>
+    </p:spTree>
+  </p:cSld>
+  <p:clrMapOvr>
+    <a:masterClrMapping/>
+  </p:clrMapOvr>
+  <p:timing>
+    <p:tnLst>
+      <p:par>
+        <p:cTn id="1" dur="indefinite" restart="never" nodeType="tmRoot"/>
+      </p:par>
+    </p:tnLst>
+  </p:timing>
+</p:sld>
+</file>
+
+<file path=ppt/slides/slide5.xml><?xml version="1.0" encoding="utf-8"?>
+<p:sld xmlns:a="http://schemas.openxmlformats.org/drawingml/2006/main" xmlns:r="http://schemas.openxmlformats.org/officeDocument/2006/relationships" xmlns:p="http://schemas.openxmlformats.org/presentationml/2006/main">
+  <p:cSld>
+    <p:spTree>
+      <p:nvGrpSpPr>
+        <p:cNvPr id="1" name=""/>
+        <p:cNvGrpSpPr/>
+        <p:nvPr/>
+      </p:nvGrpSpPr>
+      <p:grpSpPr/>
+      <p:sp>
+        <p:nvSpPr>
+          <p:cNvPr id="6" name="文本框 5"/>
+          <p:cNvSpPr>
+            <a:spLocks noGrp="1"/>
+          </p:cNvSpPr>
+          <p:nvPr/>
+        </p:nvSpPr>
+        <p:spPr>
+          <a:xfrm>
+            <a:off x="275590" y="226695"/>
+            <a:ext cx="8522970" cy="583565"/>
+          </a:xfrm>
+          <a:prstGeom prst="rect">
+            <a:avLst/>
+          </a:prstGeom>
+          <a:noFill/>
+        </p:spPr>
+        <p:txBody>
+          <a:bodyPr wrap="square">
+            <a:spAutoFit/>
+          </a:bodyPr>
+          <a:lstStyle/>
+          <a:p>
+            <a:r>
+              <a:rPr lang="en-US" altLang="zh-CN" sz="3200" b="1">
+                <a:latin typeface="Times New Roman" panose="02020603050405020304"/>
+                <a:ea typeface="宋体" panose="02010600030101010101" pitchFamily="2" charset="-122"/>
+                <a:cs typeface="Times New Roman" panose="02020603050405020304"/>
+                <a:sym typeface="+mn-ea"/>
+              </a:rPr>
+              <a:t>Experimental Setup</a:t>
+            </a:r>
+            <a:endParaRPr lang="en-US" altLang="zh-CN" sz="3200" b="1">
+              <a:latin typeface="Times New Roman" panose="02020603050405020304"/>
+              <a:ea typeface="宋体" panose="02010600030101010101" pitchFamily="2" charset="-122"/>
+              <a:cs typeface="Times New Roman" panose="02020603050405020304"/>
+              <a:sym typeface="+mn-ea"/>
+            </a:endParaRPr>
+          </a:p>
+        </p:txBody>
+      </p:sp>
+      <p:grpSp>
+        <p:nvGrpSpPr>
+          <p:cNvPr id="5" name="组合 4"/>
+          <p:cNvGrpSpPr/>
+          <p:nvPr/>
+        </p:nvGrpSpPr>
+        <p:grpSpPr>
+          <a:xfrm>
+            <a:off x="490855" y="998855"/>
+            <a:ext cx="9027795" cy="5362575"/>
+            <a:chOff x="182" y="1685"/>
+            <a:chExt cx="14217" cy="8445"/>
+          </a:xfrm>
+        </p:grpSpPr>
+        <p:pic>
+          <p:nvPicPr>
+            <p:cNvPr id="4" name="图片 3"/>
+            <p:cNvPicPr>
+              <a:picLocks noChangeAspect="1"/>
+            </p:cNvPicPr>
+            <p:nvPr/>
+          </p:nvPicPr>
+          <p:blipFill>
+            <a:blip r:embed="rId1"/>
+            <a:srcRect l="2579" t="15949" b="21628"/>
+            <a:stretch>
+              <a:fillRect/>
+            </a:stretch>
+          </p:blipFill>
+          <p:spPr>
+            <a:xfrm>
+              <a:off x="2759" y="2616"/>
+              <a:ext cx="6597" cy="7514"/>
+            </a:xfrm>
+            <a:prstGeom prst="rect">
+              <a:avLst/>
+            </a:prstGeom>
+          </p:spPr>
+        </p:pic>
+        <p:sp>
+          <p:nvSpPr>
+            <p:cNvPr id="8" name="任意多边形 7"/>
+            <p:cNvSpPr/>
+            <p:nvPr/>
+          </p:nvSpPr>
+          <p:spPr>
+            <a:xfrm>
+              <a:off x="1531" y="9014"/>
+              <a:ext cx="1644" cy="17"/>
+            </a:xfrm>
+            <a:custGeom>
+              <a:avLst/>
+              <a:gdLst>
+                <a:gd name="connisteX0" fmla="*/ 2532380 w 2532380"/>
+                <a:gd name="connsiteY0" fmla="*/ 0 h 10795"/>
+                <a:gd name="connisteX1" fmla="*/ 0 w 2532380"/>
+                <a:gd name="connsiteY1" fmla="*/ 10795 h 10795"/>
+              </a:gdLst>
+              <a:ahLst/>
+              <a:cxnLst>
+                <a:cxn ang="0">
+                  <a:pos x="connisteX0" y="connsiteY0"/>
+                </a:cxn>
+                <a:cxn ang="0">
+                  <a:pos x="connisteX1" y="connsiteY1"/>
+                </a:cxn>
+              </a:cxnLst>
+              <a:rect l="l" t="t" r="r" b="b"/>
+              <a:pathLst>
+                <a:path w="2532380" h="10795">
+                  <a:moveTo>
+                    <a:pt x="2532380" y="0"/>
+                  </a:moveTo>
+                  <a:lnTo>
+                    <a:pt x="0" y="10795"/>
+                  </a:lnTo>
+                </a:path>
+              </a:pathLst>
+            </a:custGeom>
+            <a:noFill/>
+            <a:ln>
+              <a:solidFill>
+                <a:schemeClr val="tx1">
+                  <a:lumMod val="85000"/>
+                  <a:lumOff val="15000"/>
+                </a:schemeClr>
+              </a:solidFill>
+              <a:tailEnd type="oval"/>
+            </a:ln>
+          </p:spPr>
+          <p:style>
+            <a:lnRef idx="2">
+              <a:schemeClr val="accent1">
+                <a:lumMod val="75000"/>
+              </a:schemeClr>
+            </a:lnRef>
+            <a:fillRef idx="1">
+              <a:schemeClr val="accent1"/>
+            </a:fillRef>
+            <a:effectRef idx="0">
+              <a:srgbClr val="FFFFFF"/>
+            </a:effectRef>
+            <a:fontRef idx="minor">
+              <a:schemeClr val="lt1"/>
+            </a:fontRef>
+          </p:style>
+          <p:txBody>
+            <a:bodyPr rtlCol="0" anchor="ctr"/>
+            <a:p>
+              <a:pPr algn="ctr"/>
+              <a:endParaRPr lang="zh-CN" altLang="en-US"/>
+            </a:p>
+          </p:txBody>
+        </p:sp>
+        <p:sp>
+          <p:nvSpPr>
+            <p:cNvPr id="9" name="任意多边形 8"/>
+            <p:cNvSpPr/>
+            <p:nvPr/>
+          </p:nvSpPr>
+          <p:spPr>
+            <a:xfrm>
+              <a:off x="1531" y="2891"/>
+              <a:ext cx="1644" cy="17"/>
+            </a:xfrm>
+            <a:custGeom>
+              <a:avLst/>
+              <a:gdLst>
+                <a:gd name="connisteX0" fmla="*/ 2532380 w 2532380"/>
+                <a:gd name="connsiteY0" fmla="*/ 0 h 10795"/>
+                <a:gd name="connisteX1" fmla="*/ 0 w 2532380"/>
+                <a:gd name="connsiteY1" fmla="*/ 10795 h 10795"/>
+              </a:gdLst>
+              <a:ahLst/>
+              <a:cxnLst>
+                <a:cxn ang="0">
+                  <a:pos x="connisteX0" y="connsiteY0"/>
+                </a:cxn>
+                <a:cxn ang="0">
+                  <a:pos x="connisteX1" y="connsiteY1"/>
+                </a:cxn>
+              </a:cxnLst>
+              <a:rect l="l" t="t" r="r" b="b"/>
+              <a:pathLst>
+                <a:path w="2532380" h="10795">
+                  <a:moveTo>
+                    <a:pt x="2532380" y="0"/>
+                  </a:moveTo>
+                  <a:lnTo>
+                    <a:pt x="0" y="10795"/>
+                  </a:lnTo>
+                </a:path>
+              </a:pathLst>
+            </a:custGeom>
+            <a:noFill/>
+            <a:ln>
+              <a:solidFill>
+                <a:schemeClr val="tx1">
+                  <a:lumMod val="85000"/>
+                  <a:lumOff val="15000"/>
+                </a:schemeClr>
+              </a:solidFill>
+              <a:tailEnd type="oval"/>
+            </a:ln>
+          </p:spPr>
+          <p:style>
+            <a:lnRef idx="2">
+              <a:schemeClr val="accent1">
+                <a:lumMod val="75000"/>
+              </a:schemeClr>
+            </a:lnRef>
+            <a:fillRef idx="1">
+              <a:schemeClr val="accent1"/>
+            </a:fillRef>
+            <a:effectRef idx="0">
+              <a:srgbClr val="FFFFFF"/>
+            </a:effectRef>
+            <a:fontRef idx="minor">
+              <a:schemeClr val="lt1"/>
+            </a:fontRef>
+          </p:style>
+          <p:txBody>
+            <a:bodyPr rtlCol="0" anchor="ctr"/>
+            <a:p>
+              <a:pPr algn="ctr"/>
+              <a:endParaRPr lang="zh-CN" altLang="en-US"/>
+            </a:p>
+          </p:txBody>
+        </p:sp>
+        <p:sp>
+          <p:nvSpPr>
+            <p:cNvPr id="10" name="任意多边形 9"/>
+            <p:cNvSpPr/>
+            <p:nvPr/>
+          </p:nvSpPr>
+          <p:spPr>
+            <a:xfrm>
+              <a:off x="1494" y="2908"/>
+              <a:ext cx="35" cy="6066"/>
+            </a:xfrm>
+            <a:custGeom>
+              <a:avLst/>
+              <a:gdLst>
+                <a:gd name="connisteX0" fmla="*/ 0 w 22225"/>
+                <a:gd name="connsiteY0" fmla="*/ 0 h 2347595"/>
+                <a:gd name="connisteX1" fmla="*/ 22225 w 22225"/>
+                <a:gd name="connsiteY1" fmla="*/ 2347595 h 2347595"/>
+              </a:gdLst>
+              <a:ahLst/>
+              <a:cxnLst>
+                <a:cxn ang="0">
+                  <a:pos x="connisteX0" y="connsiteY0"/>
+                </a:cxn>
+                <a:cxn ang="0">
+                  <a:pos x="connisteX1" y="connsiteY1"/>
+                </a:cxn>
+              </a:cxnLst>
+              <a:rect l="l" t="t" r="r" b="b"/>
+              <a:pathLst>
+                <a:path w="22225" h="2347595">
+                  <a:moveTo>
+                    <a:pt x="0" y="0"/>
+                  </a:moveTo>
+                  <a:lnTo>
+                    <a:pt x="22225" y="2347595"/>
+                  </a:lnTo>
+                </a:path>
+              </a:pathLst>
+            </a:custGeom>
+            <a:noFill/>
+            <a:ln w="12700" cmpd="sng">
+              <a:solidFill>
+                <a:schemeClr val="accent1">
+                  <a:shade val="50000"/>
+                </a:schemeClr>
+              </a:solidFill>
+              <a:prstDash val="lgDash"/>
+              <a:tailEnd type="none"/>
+            </a:ln>
+          </p:spPr>
+          <p:style>
+            <a:lnRef idx="2">
+              <a:schemeClr val="accent1">
+                <a:lumMod val="75000"/>
+              </a:schemeClr>
+            </a:lnRef>
+            <a:fillRef idx="1">
+              <a:schemeClr val="accent1"/>
+            </a:fillRef>
+            <a:effectRef idx="0">
+              <a:srgbClr val="FFFFFF"/>
+            </a:effectRef>
+            <a:fontRef idx="minor">
+              <a:schemeClr val="lt1"/>
+            </a:fontRef>
+          </p:style>
+          <p:txBody>
+            <a:bodyPr rtlCol="0" anchor="ctr"/>
+            <a:p>
+              <a:pPr algn="ctr"/>
+              <a:endParaRPr lang="zh-CN" altLang="en-US"/>
+            </a:p>
+          </p:txBody>
+        </p:sp>
+        <p:sp>
+          <p:nvSpPr>
+            <p:cNvPr id="12" name="文本框 11"/>
+            <p:cNvSpPr txBox="1"/>
+            <p:nvPr/>
+          </p:nvSpPr>
+          <p:spPr>
+            <a:xfrm>
+              <a:off x="182" y="5470"/>
+              <a:ext cx="2113" cy="649"/>
+            </a:xfrm>
+            <a:prstGeom prst="rect">
+              <a:avLst/>
+            </a:prstGeom>
+            <a:noFill/>
+          </p:spPr>
+          <p:txBody>
+            <a:bodyPr wrap="square" rtlCol="0">
+              <a:noAutofit/>
+            </a:bodyPr>
+            <a:p>
+              <a:r>
+                <a:rPr lang="en-US" altLang="zh-CN"/>
+                <a:t>750mm</a:t>
+              </a:r>
+              <a:endParaRPr lang="en-US" altLang="zh-CN"/>
+            </a:p>
+          </p:txBody>
+        </p:sp>
+        <p:sp>
+          <p:nvSpPr>
+            <p:cNvPr id="16" name="文本框 15"/>
+            <p:cNvSpPr txBox="1"/>
+            <p:nvPr/>
+          </p:nvSpPr>
+          <p:spPr>
+            <a:xfrm>
+              <a:off x="3580" y="1685"/>
+              <a:ext cx="10063" cy="580"/>
+            </a:xfrm>
+            <a:prstGeom prst="rect">
+              <a:avLst/>
+            </a:prstGeom>
+            <a:noFill/>
+          </p:spPr>
+          <p:txBody>
+            <a:bodyPr wrap="square" rtlCol="0">
+              <a:spAutoFit/>
+            </a:bodyPr>
+            <a:p>
+              <a:r>
+                <a:rPr lang="en-US" altLang="zh-CN"/>
+                <a:t>An overhead web camera</a:t>
+              </a:r>
+              <a:r>
+                <a:rPr lang="en-US" altLang="zh-CN"/>
+                <a:t> captures visual data.</a:t>
+              </a:r>
+              <a:endParaRPr lang="en-US" altLang="zh-CN"/>
+            </a:p>
+          </p:txBody>
+        </p:sp>
+        <p:sp>
+          <p:nvSpPr>
+            <p:cNvPr id="18" name="任意多边形 17"/>
+            <p:cNvSpPr/>
+            <p:nvPr/>
+          </p:nvSpPr>
+          <p:spPr>
+            <a:xfrm>
+              <a:off x="5641" y="9395"/>
+              <a:ext cx="3798" cy="34"/>
+            </a:xfrm>
+            <a:custGeom>
+              <a:avLst/>
+              <a:gdLst>
+                <a:gd name="connisteX0" fmla="*/ 0 w 3412490"/>
+                <a:gd name="connsiteY0" fmla="*/ 0 h 21590"/>
+                <a:gd name="connisteX1" fmla="*/ 3412490 w 3412490"/>
+                <a:gd name="connsiteY1" fmla="*/ 21590 h 21590"/>
+              </a:gdLst>
+              <a:ahLst/>
+              <a:cxnLst>
+                <a:cxn ang="0">
+                  <a:pos x="connisteX0" y="connsiteY0"/>
+                </a:cxn>
+                <a:cxn ang="0">
+                  <a:pos x="connisteX1" y="connsiteY1"/>
+                </a:cxn>
+              </a:cxnLst>
+              <a:rect l="l" t="t" r="r" b="b"/>
+              <a:pathLst>
+                <a:path w="3412490" h="21590">
+                  <a:moveTo>
+                    <a:pt x="0" y="0"/>
+                  </a:moveTo>
+                  <a:lnTo>
+                    <a:pt x="3412490" y="21590"/>
+                  </a:lnTo>
+                </a:path>
+              </a:pathLst>
+            </a:custGeom>
+            <a:noFill/>
+            <a:ln>
+              <a:solidFill>
+                <a:schemeClr val="tx1">
+                  <a:lumMod val="85000"/>
+                  <a:lumOff val="15000"/>
+                </a:schemeClr>
+              </a:solidFill>
+              <a:tailEnd type="oval"/>
+            </a:ln>
+          </p:spPr>
+          <p:style>
+            <a:lnRef idx="2">
+              <a:schemeClr val="accent1">
+                <a:lumMod val="75000"/>
+              </a:schemeClr>
+            </a:lnRef>
+            <a:fillRef idx="1">
+              <a:schemeClr val="accent1"/>
+            </a:fillRef>
+            <a:effectRef idx="0">
+              <a:srgbClr val="FFFFFF"/>
+            </a:effectRef>
+            <a:fontRef idx="minor">
+              <a:schemeClr val="lt1"/>
+            </a:fontRef>
+          </p:style>
+          <p:txBody>
+            <a:bodyPr rtlCol="0" anchor="ctr"/>
+            <a:p>
+              <a:pPr algn="ctr"/>
+              <a:endParaRPr lang="zh-CN" altLang="en-US"/>
+            </a:p>
+          </p:txBody>
+        </p:sp>
+        <p:sp>
+          <p:nvSpPr>
+            <p:cNvPr id="21" name="文本框 20"/>
+            <p:cNvSpPr txBox="1"/>
+            <p:nvPr/>
+          </p:nvSpPr>
+          <p:spPr>
+            <a:xfrm>
+              <a:off x="9553" y="8974"/>
+              <a:ext cx="4847" cy="1016"/>
+            </a:xfrm>
+            <a:prstGeom prst="rect">
+              <a:avLst/>
+            </a:prstGeom>
+            <a:noFill/>
+          </p:spPr>
+          <p:txBody>
+            <a:bodyPr wrap="square" rtlCol="0">
+              <a:spAutoFit/>
+            </a:bodyPr>
+            <a:p>
+              <a:r>
+                <a:rPr lang="en-US" altLang="zh-CN">
+                  <a:ea typeface="宋体" panose="02010600030101010101" pitchFamily="2" charset="-122"/>
+                </a:rPr>
+                <a:t>Initial hand position.</a:t>
+              </a:r>
+              <a:br>
+                <a:rPr lang="en-US" altLang="zh-CN">
+                  <a:ea typeface="宋体" panose="02010600030101010101" pitchFamily="2" charset="-122"/>
+                </a:rPr>
+              </a:br>
+              <a:r>
+                <a:rPr lang="en-US" altLang="zh-CN">
+                  <a:ea typeface="宋体" panose="02010600030101010101" pitchFamily="2" charset="-122"/>
+                </a:rPr>
+                <a:t>30 mm from the object.</a:t>
+              </a:r>
+              <a:endParaRPr lang="en-US" altLang="zh-CN">
+                <a:ea typeface="宋体" panose="02010600030101010101" pitchFamily="2" charset="-122"/>
+              </a:endParaRPr>
+            </a:p>
+          </p:txBody>
+        </p:sp>
+        <p:sp>
+          <p:nvSpPr>
+            <p:cNvPr id="22" name="文本框 21"/>
+            <p:cNvSpPr txBox="1"/>
+            <p:nvPr/>
+          </p:nvSpPr>
+          <p:spPr>
+            <a:xfrm>
+              <a:off x="5212" y="8659"/>
+              <a:ext cx="4703" cy="647"/>
+            </a:xfrm>
+            <a:prstGeom prst="rect">
+              <a:avLst/>
+            </a:prstGeom>
+            <a:noFill/>
+          </p:spPr>
+          <p:txBody>
+            <a:bodyPr wrap="square" rtlCol="0">
+              <a:noAutofit/>
+            </a:bodyPr>
+            <a:p>
+              <a:r>
+                <a:rPr lang="en-US" altLang="zh-CN"/>
+                <a:t>30mm</a:t>
+              </a:r>
+              <a:endParaRPr lang="en-US" altLang="zh-CN"/>
+            </a:p>
+          </p:txBody>
+        </p:sp>
+        <p:cxnSp>
+          <p:nvCxnSpPr>
+            <p:cNvPr id="2" name="直接箭头连接符 1"/>
+            <p:cNvCxnSpPr/>
+            <p:nvPr/>
+          </p:nvCxnSpPr>
+          <p:spPr>
+            <a:xfrm flipV="1">
+              <a:off x="5076" y="8659"/>
+              <a:ext cx="228" cy="542"/>
+            </a:xfrm>
+            <a:prstGeom prst="straightConnector1">
+              <a:avLst/>
+            </a:prstGeom>
+            <a:ln w="12700">
+              <a:solidFill>
+                <a:schemeClr val="tx1">
+                  <a:lumMod val="95000"/>
+                  <a:lumOff val="5000"/>
+                </a:schemeClr>
+              </a:solidFill>
+              <a:prstDash val="dash"/>
+              <a:headEnd type="arrow"/>
+              <a:tailEnd type="arrow"/>
+            </a:ln>
+          </p:spPr>
+          <p:style>
+            <a:lnRef idx="0">
+              <a:schemeClr val="accent1"/>
+            </a:lnRef>
+            <a:fillRef idx="0">
+              <a:srgbClr val="FFFFFF"/>
+            </a:fillRef>
+            <a:effectRef idx="0">
+              <a:srgbClr val="FFFFFF"/>
+            </a:effectRef>
+            <a:fontRef idx="minor">
+              <a:schemeClr val="tx1"/>
+            </a:fontRef>
+          </p:style>
+        </p:cxnSp>
+        <p:sp>
+          <p:nvSpPr>
+            <p:cNvPr id="3" name="任意多边形 2"/>
+            <p:cNvSpPr/>
+            <p:nvPr/>
+          </p:nvSpPr>
+          <p:spPr>
+            <a:xfrm>
+              <a:off x="3435" y="1900"/>
+              <a:ext cx="18" cy="907"/>
+            </a:xfrm>
+            <a:custGeom>
+              <a:avLst/>
+              <a:gdLst>
+                <a:gd name="connisteX0" fmla="*/ 11430 w 11430"/>
+                <a:gd name="connsiteY0" fmla="*/ 427355 h 427355"/>
+                <a:gd name="connisteX1" fmla="*/ 0 w 11430"/>
+                <a:gd name="connsiteY1" fmla="*/ 0 h 427355"/>
+              </a:gdLst>
+              <a:ahLst/>
+              <a:cxnLst>
+                <a:cxn ang="0">
+                  <a:pos x="connisteX0" y="connsiteY0"/>
+                </a:cxn>
+                <a:cxn ang="0">
+                  <a:pos x="connisteX1" y="connsiteY1"/>
+                </a:cxn>
+              </a:cxnLst>
+              <a:rect l="l" t="t" r="r" b="b"/>
+              <a:pathLst>
+                <a:path w="11430" h="427355">
+                  <a:moveTo>
+                    <a:pt x="11430" y="427355"/>
+                  </a:moveTo>
+                  <a:lnTo>
+                    <a:pt x="0" y="0"/>
+                  </a:lnTo>
+                </a:path>
+              </a:pathLst>
+            </a:custGeom>
+            <a:noFill/>
+            <a:ln>
+              <a:solidFill>
+                <a:schemeClr val="tx1">
+                  <a:lumMod val="85000"/>
+                  <a:lumOff val="15000"/>
+                </a:schemeClr>
+              </a:solidFill>
+              <a:tailEnd type="oval"/>
+            </a:ln>
+          </p:spPr>
+          <p:style>
+            <a:lnRef idx="2">
+              <a:schemeClr val="accent1">
+                <a:lumMod val="75000"/>
+              </a:schemeClr>
+            </a:lnRef>
+            <a:fillRef idx="1">
+              <a:schemeClr val="accent1"/>
+            </a:fillRef>
+            <a:effectRef idx="0">
+              <a:srgbClr val="FFFFFF"/>
+            </a:effectRef>
+            <a:fontRef idx="minor">
+              <a:schemeClr val="lt1"/>
+            </a:fontRef>
+          </p:style>
+          <p:txBody>
+            <a:bodyPr rtlCol="0" anchor="ctr"/>
+            <a:p>
+              <a:pPr algn="ctr"/>
+              <a:endParaRPr lang="zh-CN" altLang="en-US"/>
+            </a:p>
+          </p:txBody>
+        </p:sp>
+      </p:grpSp>
+    </p:spTree>
+  </p:cSld>
+  <p:clrMapOvr>
+    <a:masterClrMapping/>
+  </p:clrMapOvr>
+  <p:timing>
+    <p:tnLst>
+      <p:par>
+        <p:cTn id="1" dur="indefinite" restart="never" nodeType="tmRoot"/>
+      </p:par>
+    </p:tnLst>
+  </p:timing>
+</p:sld>
+</file>
+
+<file path=ppt/slides/slide6.xml><?xml version="1.0" encoding="utf-8"?>
+<p:sld xmlns:a="http://schemas.openxmlformats.org/drawingml/2006/main" xmlns:r="http://schemas.openxmlformats.org/officeDocument/2006/relationships" xmlns:p="http://schemas.openxmlformats.org/presentationml/2006/main">
+  <p:cSld>
+    <p:spTree>
+      <p:nvGrpSpPr>
+        <p:cNvPr id="1" name=""/>
+        <p:cNvGrpSpPr/>
+        <p:nvPr/>
+      </p:nvGrpSpPr>
+      <p:grpSpPr/>
+      <p:sp>
+        <p:nvSpPr>
+          <p:cNvPr id="6" name="文本框 5"/>
+          <p:cNvSpPr>
+            <a:spLocks noGrp="1"/>
+          </p:cNvSpPr>
+          <p:nvPr/>
+        </p:nvSpPr>
+        <p:spPr>
+          <a:xfrm>
+            <a:off x="275590" y="226695"/>
+            <a:ext cx="8522970" cy="583565"/>
+          </a:xfrm>
+          <a:prstGeom prst="rect">
+            <a:avLst/>
+          </a:prstGeom>
+          <a:noFill/>
+        </p:spPr>
+        <p:txBody>
+          <a:bodyPr wrap="square">
+            <a:spAutoFit/>
+          </a:bodyPr>
+          <a:lstStyle/>
+          <a:p>
+            <a:r>
+              <a:rPr lang="en-US" altLang="zh-CN" sz="3200" b="1">
+                <a:latin typeface="Times New Roman" panose="02020603050405020304"/>
+                <a:ea typeface="宋体" panose="02010600030101010101" pitchFamily="2" charset="-122"/>
+                <a:cs typeface="Times New Roman" panose="02020603050405020304"/>
+                <a:sym typeface="+mn-ea"/>
+              </a:rPr>
+              <a:t>Example Trial</a:t>
+            </a:r>
+            <a:endParaRPr lang="en-US" altLang="zh-CN" sz="3200" b="1">
+              <a:latin typeface="Times New Roman" panose="02020603050405020304"/>
+              <a:ea typeface="宋体" panose="02010600030101010101" pitchFamily="2" charset="-122"/>
+              <a:cs typeface="Times New Roman" panose="02020603050405020304"/>
+              <a:sym typeface="+mn-ea"/>
+            </a:endParaRPr>
+          </a:p>
+        </p:txBody>
+      </p:sp>
+      <p:sp>
+        <p:nvSpPr>
+          <p:cNvPr id="2" name="文本框 1"/>
+          <p:cNvSpPr txBox="1"/>
+          <p:nvPr/>
+        </p:nvSpPr>
+        <p:spPr>
+          <a:xfrm>
+            <a:off x="1527175" y="1793875"/>
+            <a:ext cx="3048000" cy="368300"/>
+          </a:xfrm>
+          <a:prstGeom prst="rect">
+            <a:avLst/>
+          </a:prstGeom>
+          <a:noFill/>
+        </p:spPr>
+        <p:txBody>
+          <a:bodyPr wrap="square" rtlCol="0">
+            <a:spAutoFit/>
+          </a:bodyPr>
+          <a:p>
+            <a:r>
+              <a:rPr lang="en-US" altLang="zh-CN"/>
+              <a:t>Camera View:</a:t>
+            </a:r>
+            <a:endParaRPr lang="en-US" altLang="zh-CN"/>
+          </a:p>
+        </p:txBody>
+      </p:sp>
+      <p:sp>
+        <p:nvSpPr>
+          <p:cNvPr id="3" name="文本框 2"/>
+          <p:cNvSpPr txBox="1"/>
+          <p:nvPr/>
+        </p:nvSpPr>
+        <p:spPr>
+          <a:xfrm>
+            <a:off x="1046480" y="925830"/>
+            <a:ext cx="1504315" cy="368300"/>
+          </a:xfrm>
+          <a:prstGeom prst="rect">
+            <a:avLst/>
+          </a:prstGeom>
+          <a:noFill/>
+        </p:spPr>
+        <p:txBody>
+          <a:bodyPr wrap="square" rtlCol="0">
+            <a:spAutoFit/>
+          </a:bodyPr>
+          <a:p>
+            <a:pPr algn="ctr"/>
+            <a:r>
+              <a:rPr lang="en-US" altLang="zh-CN">
+                <a:ea typeface="宋体" panose="02010600030101010101" pitchFamily="2" charset="-122"/>
+              </a:rPr>
+              <a:t>Initial Phase</a:t>
+            </a:r>
+            <a:endParaRPr lang="en-US">
+              <a:ea typeface="宋体" panose="02010600030101010101" pitchFamily="2" charset="-122"/>
+            </a:endParaRPr>
+          </a:p>
+        </p:txBody>
+      </p:sp>
+      <p:sp>
+        <p:nvSpPr>
+          <p:cNvPr id="4" name="文本框 3"/>
+          <p:cNvSpPr txBox="1"/>
+          <p:nvPr/>
+        </p:nvSpPr>
+        <p:spPr>
+          <a:xfrm>
+            <a:off x="1151255" y="1294130"/>
+            <a:ext cx="1143635" cy="337185"/>
+          </a:xfrm>
+          <a:prstGeom prst="rect">
+            <a:avLst/>
+          </a:prstGeom>
+        </p:spPr>
+        <p:txBody>
+          <a:bodyPr wrap="square">
+            <a:spAutoFit/>
+          </a:bodyPr>
+          <a:p>
+            <a:pPr algn="ctr"/>
+            <a:r>
+              <a:rPr lang="en-US" altLang="zh-CN" sz="1600">
+                <a:solidFill>
+                  <a:srgbClr val="6E6E6E"/>
+                </a:solidFill>
+              </a:rPr>
+              <a:t>10 frames</a:t>
+            </a:r>
+            <a:endParaRPr lang="en-US" altLang="zh-CN" sz="1600">
+              <a:solidFill>
+                <a:srgbClr val="6E6E6E"/>
+              </a:solidFill>
+            </a:endParaRPr>
+          </a:p>
+        </p:txBody>
+      </p:sp>
+      <p:sp>
+        <p:nvSpPr>
+          <p:cNvPr id="5" name="右箭头 4"/>
+          <p:cNvSpPr/>
+          <p:nvPr/>
+        </p:nvSpPr>
+        <p:spPr>
+          <a:xfrm>
+            <a:off x="2667000" y="1160145"/>
+            <a:ext cx="658495" cy="253365"/>
+          </a:xfrm>
+          <a:prstGeom prst="rightArrow">
+            <a:avLst>
+              <a:gd name="adj1" fmla="val 50000"/>
+              <a:gd name="adj2" fmla="val 86215"/>
+            </a:avLst>
+          </a:prstGeom>
+          <a:solidFill>
+            <a:srgbClr val="00B050"/>
+          </a:solidFill>
+          <a:ln>
+            <a:noFill/>
+            <a:tailEnd type="oval"/>
+          </a:ln>
+        </p:spPr>
+        <p:style>
+          <a:lnRef idx="2">
+            <a:schemeClr val="accent1">
+              <a:lumMod val="75000"/>
+            </a:schemeClr>
+          </a:lnRef>
+          <a:fillRef idx="1">
+            <a:schemeClr val="accent1"/>
+          </a:fillRef>
+          <a:effectRef idx="0">
+            <a:srgbClr val="FFFFFF"/>
+          </a:effectRef>
+          <a:fontRef idx="minor">
+            <a:schemeClr val="lt1"/>
+          </a:fontRef>
+        </p:style>
+        <p:txBody>
+          <a:bodyPr rtlCol="0" anchor="ctr"/>
+          <a:p>
+            <a:pPr algn="ctr"/>
+            <a:endParaRPr lang="zh-CN" altLang="en-US"/>
+          </a:p>
+        </p:txBody>
+      </p:sp>
+      <p:sp>
+        <p:nvSpPr>
+          <p:cNvPr id="7" name="文本框 6"/>
+          <p:cNvSpPr txBox="1"/>
+          <p:nvPr/>
+        </p:nvSpPr>
+        <p:spPr>
+          <a:xfrm>
+            <a:off x="3441700" y="925830"/>
+            <a:ext cx="1919605" cy="368300"/>
+          </a:xfrm>
+          <a:prstGeom prst="rect">
+            <a:avLst/>
+          </a:prstGeom>
+          <a:noFill/>
+        </p:spPr>
+        <p:txBody>
+          <a:bodyPr wrap="square" rtlCol="0">
+            <a:spAutoFit/>
+          </a:bodyPr>
+          <a:p>
+            <a:pPr algn="ctr"/>
+            <a:r>
+              <a:rPr lang="en-US" altLang="zh-CN">
+                <a:ea typeface="宋体" panose="02010600030101010101" pitchFamily="2" charset="-122"/>
+              </a:rPr>
+              <a:t>Grasping Phase</a:t>
+            </a:r>
+            <a:endParaRPr lang="en-US" altLang="zh-CN">
+              <a:ea typeface="宋体" panose="02010600030101010101" pitchFamily="2" charset="-122"/>
+            </a:endParaRPr>
+          </a:p>
+        </p:txBody>
+      </p:sp>
+      <p:sp>
+        <p:nvSpPr>
+          <p:cNvPr id="9" name="右箭头 8"/>
+          <p:cNvSpPr/>
+          <p:nvPr/>
+        </p:nvSpPr>
+        <p:spPr>
+          <a:xfrm>
+            <a:off x="5588000" y="1160145"/>
+            <a:ext cx="658495" cy="253365"/>
+          </a:xfrm>
+          <a:prstGeom prst="rightArrow">
+            <a:avLst>
+              <a:gd name="adj1" fmla="val 50000"/>
+              <a:gd name="adj2" fmla="val 86215"/>
+            </a:avLst>
+          </a:prstGeom>
+          <a:solidFill>
+            <a:srgbClr val="00B050"/>
+          </a:solidFill>
+          <a:ln>
+            <a:noFill/>
+            <a:tailEnd type="oval"/>
+          </a:ln>
+        </p:spPr>
+        <p:style>
+          <a:lnRef idx="2">
+            <a:schemeClr val="accent1">
+              <a:lumMod val="75000"/>
+            </a:schemeClr>
+          </a:lnRef>
+          <a:fillRef idx="1">
+            <a:schemeClr val="accent1"/>
+          </a:fillRef>
+          <a:effectRef idx="0">
+            <a:srgbClr val="FFFFFF"/>
+          </a:effectRef>
+          <a:fontRef idx="minor">
+            <a:schemeClr val="lt1"/>
+          </a:fontRef>
+        </p:style>
+        <p:txBody>
+          <a:bodyPr rtlCol="0" anchor="ctr"/>
+          <a:p>
+            <a:pPr algn="ctr"/>
+            <a:endParaRPr lang="zh-CN" altLang="en-US"/>
+          </a:p>
+        </p:txBody>
+      </p:sp>
+      <p:sp>
+        <p:nvSpPr>
+          <p:cNvPr id="10" name="文本框 9"/>
+          <p:cNvSpPr txBox="1"/>
+          <p:nvPr/>
+        </p:nvSpPr>
+        <p:spPr>
+          <a:xfrm>
+            <a:off x="3634105" y="1288415"/>
+            <a:ext cx="1612900" cy="337185"/>
+          </a:xfrm>
+          <a:prstGeom prst="rect">
+            <a:avLst/>
+          </a:prstGeom>
+        </p:spPr>
+        <p:txBody>
+          <a:bodyPr wrap="square">
+            <a:spAutoFit/>
+          </a:bodyPr>
+          <a:p>
+            <a:pPr algn="ctr">
+              <a:buClrTx/>
+              <a:buSzTx/>
+              <a:buFontTx/>
+            </a:pPr>
+            <a:r>
+              <a:rPr lang="en-US" altLang="zh-CN" sz="1600">
+                <a:solidFill>
+                  <a:srgbClr val="6E6E6E"/>
+                </a:solidFill>
+              </a:rPr>
+              <a:t>Variable duration</a:t>
+            </a:r>
+            <a:endParaRPr lang="en-US" altLang="zh-CN" sz="1600">
+              <a:solidFill>
+                <a:srgbClr val="6E6E6E"/>
+              </a:solidFill>
+            </a:endParaRPr>
+          </a:p>
+        </p:txBody>
+      </p:sp>
+      <p:sp>
+        <p:nvSpPr>
+          <p:cNvPr id="11" name="文本框 10"/>
+          <p:cNvSpPr txBox="1"/>
+          <p:nvPr/>
+        </p:nvSpPr>
+        <p:spPr>
+          <a:xfrm>
+            <a:off x="6137910" y="925830"/>
+            <a:ext cx="1919605" cy="368300"/>
+          </a:xfrm>
+          <a:prstGeom prst="rect">
+            <a:avLst/>
+          </a:prstGeom>
+          <a:noFill/>
+        </p:spPr>
+        <p:txBody>
+          <a:bodyPr wrap="square" rtlCol="0">
+            <a:spAutoFit/>
+          </a:bodyPr>
+          <a:p>
+            <a:pPr algn="ctr"/>
+            <a:r>
+              <a:rPr lang="en-US" altLang="zh-CN">
+                <a:ea typeface="宋体" panose="02010600030101010101" pitchFamily="2" charset="-122"/>
+              </a:rPr>
+              <a:t>Hold Phase</a:t>
+            </a:r>
+            <a:endParaRPr lang="en-US" altLang="zh-CN">
+              <a:ea typeface="宋体" panose="02010600030101010101" pitchFamily="2" charset="-122"/>
+            </a:endParaRPr>
+          </a:p>
+        </p:txBody>
+      </p:sp>
+      <p:sp>
+        <p:nvSpPr>
+          <p:cNvPr id="12" name="文本框 11"/>
+          <p:cNvSpPr txBox="1"/>
+          <p:nvPr/>
+        </p:nvSpPr>
+        <p:spPr>
+          <a:xfrm>
+            <a:off x="6330315" y="1288415"/>
+            <a:ext cx="1612900" cy="337185"/>
+          </a:xfrm>
+          <a:prstGeom prst="rect">
+            <a:avLst/>
+          </a:prstGeom>
+        </p:spPr>
+        <p:txBody>
+          <a:bodyPr wrap="square">
+            <a:spAutoFit/>
+          </a:bodyPr>
+          <a:p>
+            <a:pPr algn="ctr">
+              <a:buClrTx/>
+              <a:buSzTx/>
+              <a:buFontTx/>
+            </a:pPr>
+            <a:r>
+              <a:rPr lang="en-US" altLang="zh-CN" sz="1600">
+                <a:solidFill>
+                  <a:srgbClr val="6E6E6E"/>
+                </a:solidFill>
+                <a:sym typeface="+mn-ea"/>
+              </a:rPr>
+              <a:t>10 frames</a:t>
+            </a:r>
+            <a:endParaRPr lang="en-US" altLang="zh-CN" sz="1600">
+              <a:solidFill>
+                <a:srgbClr val="6E6E6E"/>
+              </a:solidFill>
+            </a:endParaRPr>
+          </a:p>
+        </p:txBody>
+      </p:sp>
+      <p:pic>
+        <p:nvPicPr>
+          <p:cNvPr id="8" name="10月20日(1)">
+            <a:hlinkClick r:id="" action="ppaction://media"/>
+            <a:hlinkHover r:id="" action="ppaction://media"/>
+          </p:cNvPr>
+          <p:cNvPicPr>
+            <a:picLocks noChangeAspect="1"/>
+          </p:cNvPicPr>
+          <p:nvPr>
+            <a:videoFile r:link="rId1"/>
+            <p:extLst>
+              <p:ext uri="{DAA4B4D4-6D71-4841-9C94-3DE7FCFB9230}">
+                <p14:media xmlns:p14="http://schemas.microsoft.com/office/powerpoint/2010/main" r:embed="rId2"/>
+              </p:ext>
+            </p:extLst>
+          </p:nvPr>
+        </p:nvPicPr>
+        <p:blipFill>
+          <a:blip r:embed="rId3"/>
+          <a:stretch>
+            <a:fillRect/>
+          </a:stretch>
+        </p:blipFill>
+        <p:spPr>
+          <a:xfrm>
+            <a:off x="1527175" y="2141855"/>
+            <a:ext cx="6019800" cy="4514850"/>
+          </a:xfrm>
+          <a:prstGeom prst="rect">
+            <a:avLst/>
+          </a:prstGeom>
+        </p:spPr>
+      </p:pic>
+    </p:spTree>
+  </p:cSld>
+  <p:clrMapOvr>
+    <a:masterClrMapping/>
+  </p:clrMapOvr>
+  <p:timing>
+    <p:tnLst>
+      <p:par>
+        <p:cTn id="1" dur="indefinite" restart="never" nodeType="tmRoot">
+          <p:childTnLst>
+            <p:video fullScrn="0">
+              <p:cMediaNode>
+                <p:cTn id="2" fill="hold" display="1">
+                  <p:stCondLst>
+                    <p:cond delay="indefinite"/>
+                  </p:stCondLst>
+                </p:cTn>
+                <p:tgtEl>
+                  <p:spTgt spid="8"/>
+                </p:tgtEl>
+              </p:cMediaNode>
+            </p:video>
+            <p:seq concurrent="1" nextAc="seek">
+              <p:cTn id="3" restart="whenNotActive" fill="hold" evtFilter="cancelBubble" nodeType="interactiveSeq">
+                <p:stCondLst>
+                  <p:cond evt="onClick" delay="0">
+                    <p:tgtEl>
+                      <p:spTgt spid="8"/>
+                    </p:tgtEl>
+                  </p:cond>
+                </p:stCondLst>
+                <p:endSync evt="end" delay="0">
+                  <p:rtn val="all"/>
+                </p:endSync>
+                <p:childTnLst>
+                  <p:par>
+                    <p:cTn id="4" fill="hold">
+                      <p:stCondLst>
+                        <p:cond delay="0"/>
+                      </p:stCondLst>
+                      <p:childTnLst>
+                        <p:par>
+                          <p:cTn id="5" fill="hold">
+                            <p:stCondLst>
+                              <p:cond delay="0"/>
+                            </p:stCondLst>
+                            <p:childTnLst>
+                              <p:par>
+                                <p:cTn id="6" presetID="2" presetClass="mediacall" presetSubtype="0" fill="hold" nodeType="clickEffect">
+                                  <p:stCondLst>
+                                    <p:cond delay="0"/>
+                                  </p:stCondLst>
+                                  <p:childTnLst>
+                                    <p:cmd type="call" cmd="togglePause">
+                                      <p:cBhvr additive="base">
+                                        <p:cTn id="7" dur="1" fill="hold"/>
+                                        <p:tgtEl>
+                                          <p:spTgt spid="8"/>
+                                        </p:tgtEl>
+                                      </p:cBhvr>
+                                    </p:cmd>
+                                  </p:childTnLst>
+                                </p:cTn>
+                              </p:par>
+                            </p:childTnLst>
+                          </p:cTn>
+                        </p:par>
+                      </p:childTnLst>
+                    </p:cTn>
+                  </p:par>
+                </p:childTnLst>
+              </p:cTn>
+              <p:nextCondLst>
+                <p:cond evt="onClick" delay="0">
+                  <p:tgtEl>
+                    <p:spTgt spid="8"/>
+                  </p:tgtEl>
+                </p:cond>
+              </p:nextCondLst>
+            </p:seq>
+          </p:childTnLst>
+        </p:cTn>
+      </p:par>
+    </p:tnLst>
+  </p:timing>
+</p:sld>
+</file>
+
+<file path=ppt/slides/slide7.xml><?xml version="1.0" encoding="utf-8"?>
+<p:sld xmlns:a="http://schemas.openxmlformats.org/drawingml/2006/main" xmlns:r="http://schemas.openxmlformats.org/officeDocument/2006/relationships" xmlns:p="http://schemas.openxmlformats.org/presentationml/2006/main">
+  <p:cSld>
+    <p:spTree>
+      <p:nvGrpSpPr>
+        <p:cNvPr id="1" name=""/>
+        <p:cNvGrpSpPr/>
+        <p:nvPr/>
+      </p:nvGrpSpPr>
+      <p:grpSpPr/>
+      <p:sp>
+        <p:nvSpPr>
+          <p:cNvPr id="6" name="文本框 5"/>
+          <p:cNvSpPr>
+            <a:spLocks noGrp="1"/>
+          </p:cNvSpPr>
+          <p:nvPr/>
+        </p:nvSpPr>
+        <p:spPr>
+          <a:xfrm>
+            <a:off x="275590" y="226695"/>
+            <a:ext cx="8522970" cy="583565"/>
+          </a:xfrm>
+          <a:prstGeom prst="rect">
+            <a:avLst/>
+          </a:prstGeom>
+          <a:noFill/>
+        </p:spPr>
+        <p:txBody>
+          <a:bodyPr wrap="square">
+            <a:spAutoFit/>
+          </a:bodyPr>
+          <a:lstStyle/>
+          <a:p>
+            <a:r>
+              <a:rPr lang="en-US" altLang="zh-CN" sz="3200" b="1">
+                <a:latin typeface="Times New Roman" panose="02020603050405020304"/>
+                <a:ea typeface="宋体" panose="02010600030101010101" pitchFamily="2" charset="-122"/>
+                <a:cs typeface="Times New Roman" panose="02020603050405020304"/>
+                <a:sym typeface="+mn-ea"/>
+              </a:rPr>
+              <a:t>Visual Processing</a:t>
+            </a:r>
+            <a:endParaRPr lang="en-US" altLang="zh-CN" sz="3200" b="1">
+              <a:latin typeface="Times New Roman" panose="02020603050405020304"/>
+              <a:ea typeface="宋体" panose="02010600030101010101" pitchFamily="2" charset="-122"/>
+              <a:cs typeface="Times New Roman" panose="02020603050405020304"/>
+              <a:sym typeface="+mn-ea"/>
+            </a:endParaRPr>
+          </a:p>
+        </p:txBody>
+      </p:sp>
+      <p:pic>
+        <p:nvPicPr>
+          <p:cNvPr id="14" name="图片 13" descr="10月20日(1)"/>
+          <p:cNvPicPr>
+            <a:picLocks noChangeAspect="1"/>
+          </p:cNvPicPr>
+          <p:nvPr/>
+        </p:nvPicPr>
+        <p:blipFill>
+          <a:blip r:embed="rId1"/>
+          <a:srcRect l="10347" r="10146" b="7276"/>
+          <a:stretch>
+            <a:fillRect/>
+          </a:stretch>
+        </p:blipFill>
+        <p:spPr>
+          <a:xfrm>
+            <a:off x="3691255" y="2008505"/>
+            <a:ext cx="5107305" cy="4467225"/>
+          </a:xfrm>
+          <a:prstGeom prst="rect">
+            <a:avLst/>
+          </a:prstGeom>
+        </p:spPr>
+      </p:pic>
+      <p:sp>
+        <p:nvSpPr>
+          <p:cNvPr id="18" name="文本框 17"/>
+          <p:cNvSpPr txBox="1"/>
+          <p:nvPr/>
+        </p:nvSpPr>
+        <p:spPr>
+          <a:xfrm>
+            <a:off x="133350" y="1995805"/>
+            <a:ext cx="3437890" cy="3538220"/>
+          </a:xfrm>
+          <a:prstGeom prst="rect">
+            <a:avLst/>
+          </a:prstGeom>
+        </p:spPr>
+        <p:txBody>
+          <a:bodyPr wrap="square">
+            <a:spAutoFit/>
+          </a:bodyPr>
+          <a:p>
+            <a:pPr marL="285750" indent="-285750">
+              <a:buFont typeface="Arial" panose="020B0604020202020204" pitchFamily="34" charset="0"/>
+              <a:buChar char="•"/>
+            </a:pPr>
+            <a:r>
+              <a:rPr lang="en-US" altLang="ja-JP" sz="1600"/>
+              <a:t>Variable 1 </a:t>
+            </a:r>
+            <a:r>
+              <a:rPr lang="en-US" altLang="zh-CN" sz="1600"/>
+              <a:t>Hand–Object Distance:</a:t>
+            </a:r>
+            <a:endParaRPr lang="en-US" altLang="zh-CN" sz="1600"/>
+          </a:p>
+          <a:p>
+            <a:pPr indent="457200">
+              <a:buFont typeface="Arial" panose="020B0604020202020204" pitchFamily="34" charset="0"/>
+              <a:buNone/>
+            </a:pPr>
+            <a:r>
+              <a:rPr lang="en-US" altLang="zh-CN" sz="1600"/>
+              <a:t>The distance between the midpoint of the two fingertips and the center of the object's bounding box.</a:t>
+            </a:r>
+            <a:endParaRPr lang="en-US" altLang="zh-CN" sz="1600"/>
+          </a:p>
+          <a:p>
+            <a:pPr indent="457200">
+              <a:buFont typeface="Arial" panose="020B0604020202020204" pitchFamily="34" charset="0"/>
+              <a:buNone/>
+            </a:pPr>
+            <a:endParaRPr lang="en-US" altLang="zh-CN" sz="1600"/>
+          </a:p>
+          <a:p>
+            <a:pPr marL="285750" indent="-285750">
+              <a:buFont typeface="Arial" panose="020B0604020202020204" pitchFamily="34" charset="0"/>
+              <a:buChar char="•"/>
+            </a:pPr>
+            <a:endParaRPr lang="en-US" altLang="zh-CN" sz="1600"/>
+          </a:p>
+          <a:p>
+            <a:pPr marL="285750" indent="-285750">
+              <a:buFont typeface="Arial" panose="020B0604020202020204" pitchFamily="34" charset="0"/>
+              <a:buChar char="•"/>
+            </a:pPr>
+            <a:r>
+              <a:rPr lang="en-US" altLang="ja-JP" sz="1600">
+                <a:sym typeface="+mn-ea"/>
+              </a:rPr>
+              <a:t>Variable 2 </a:t>
+            </a:r>
+            <a:r>
+              <a:rPr lang="en-US" altLang="zh-CN" sz="1600">
+                <a:sym typeface="+mn-ea"/>
+              </a:rPr>
+              <a:t>Fingertip Aperture</a:t>
+            </a:r>
+            <a:r>
+              <a:rPr lang="en-US" altLang="zh-CN" sz="1600">
+                <a:sym typeface="+mn-ea"/>
+              </a:rPr>
+              <a:t>:</a:t>
+            </a:r>
+            <a:endParaRPr lang="en-US" altLang="zh-CN" sz="1600">
+              <a:sym typeface="+mn-ea"/>
+            </a:endParaRPr>
+          </a:p>
+          <a:p>
+            <a:pPr indent="457200">
+              <a:buFont typeface="Arial" panose="020B0604020202020204" pitchFamily="34" charset="0"/>
+              <a:buNone/>
+            </a:pPr>
+            <a:r>
+              <a:rPr lang="en-US" altLang="zh-CN" sz="1600">
+                <a:sym typeface="+mn-ea"/>
+              </a:rPr>
+              <a:t>The distance between the thumb tip and index fingertip.</a:t>
+            </a:r>
+            <a:endParaRPr lang="en-US" altLang="zh-CN" sz="1600">
+              <a:sym typeface="+mn-ea"/>
+            </a:endParaRPr>
+          </a:p>
+          <a:p>
+            <a:pPr indent="457200">
+              <a:buFont typeface="Arial" panose="020B0604020202020204" pitchFamily="34" charset="0"/>
+              <a:buNone/>
+            </a:pPr>
+            <a:endParaRPr lang="en-US" altLang="zh-CN" sz="1600">
+              <a:sym typeface="+mn-ea"/>
+            </a:endParaRPr>
+          </a:p>
+          <a:p>
+            <a:pPr marL="285750" indent="-285750">
+              <a:buFont typeface="Arial" panose="020B0604020202020204" pitchFamily="34" charset="0"/>
+              <a:buChar char="•"/>
+            </a:pPr>
+            <a:endParaRPr lang="en-US" altLang="zh-CN" sz="1600">
+              <a:sym typeface="+mn-ea"/>
+            </a:endParaRPr>
+          </a:p>
+          <a:p>
+            <a:pPr marL="285750" indent="-285750">
+              <a:buFont typeface="Arial" panose="020B0604020202020204" pitchFamily="34" charset="0"/>
+              <a:buChar char="•"/>
+            </a:pPr>
+            <a:r>
+              <a:rPr lang="en-US" altLang="zh-CN" sz="1600">
+                <a:sym typeface="+mn-ea"/>
+              </a:rPr>
+              <a:t>All distances are measured in pixels (px).</a:t>
+            </a:r>
+            <a:endParaRPr lang="en-US" altLang="zh-CN" sz="1600">
+              <a:sym typeface="+mn-ea"/>
+            </a:endParaRPr>
+          </a:p>
+          <a:p>
+            <a:pPr marL="285750" indent="-285750">
+              <a:buFont typeface="Arial" panose="020B0604020202020204" pitchFamily="34" charset="0"/>
+              <a:buChar char="•"/>
+            </a:pPr>
+            <a:endParaRPr lang="en-US" altLang="zh-CN" sz="1600"/>
+          </a:p>
+        </p:txBody>
+      </p:sp>
+      <p:sp>
+        <p:nvSpPr>
+          <p:cNvPr id="19" name="文本框 18"/>
+          <p:cNvSpPr txBox="1"/>
+          <p:nvPr/>
+        </p:nvSpPr>
+        <p:spPr>
+          <a:xfrm>
+            <a:off x="276225" y="944245"/>
+            <a:ext cx="8522335" cy="337185"/>
+          </a:xfrm>
+          <a:prstGeom prst="rect">
+            <a:avLst/>
+          </a:prstGeom>
+        </p:spPr>
+        <p:txBody>
+          <a:bodyPr wrap="square">
+            <a:spAutoFit/>
+          </a:bodyPr>
+          <a:p>
+            <a:r>
+              <a:rPr lang="en-US" altLang="ja-JP" sz="1600"/>
+              <a:t>MediaPipe and </a:t>
+            </a:r>
+            <a:r>
+              <a:rPr lang="en-US" altLang="zh-CN" sz="1600"/>
+              <a:t>OpenCV</a:t>
+            </a:r>
+            <a:r>
+              <a:rPr lang="en-US" altLang="ja-JP" sz="1600"/>
+              <a:t> is used to detect hand landmarks and cube</a:t>
+            </a:r>
+            <a:endParaRPr lang="en-US" altLang="ja-JP" sz="1600"/>
+          </a:p>
+        </p:txBody>
+      </p:sp>
+    </p:spTree>
+  </p:cSld>
+  <p:clrMapOvr>
+    <a:masterClrMapping/>
+  </p:clrMapOvr>
+  <p:timing>
+    <p:tnLst>
+      <p:par>
+        <p:cTn id="1" dur="indefinite" restart="never" nodeType="tmRoot"/>
+      </p:par>
+    </p:tnLst>
+  </p:timing>
+</p:sld>
+</file>
+
+<file path=ppt/slides/slide8.xml><?xml version="1.0" encoding="utf-8"?>
+<p:sld xmlns:a="http://schemas.openxmlformats.org/drawingml/2006/main" xmlns:r="http://schemas.openxmlformats.org/officeDocument/2006/relationships" xmlns:p="http://schemas.openxmlformats.org/presentationml/2006/main">
+  <p:cSld>
+    <p:spTree>
+      <p:nvGrpSpPr>
+        <p:cNvPr id="1" name=""/>
+        <p:cNvGrpSpPr/>
+        <p:nvPr/>
+      </p:nvGrpSpPr>
+      <p:grpSpPr/>
+      <p:sp>
+        <p:nvSpPr>
+          <p:cNvPr id="6" name="文本框 5"/>
+          <p:cNvSpPr>
+            <a:spLocks noGrp="1"/>
+          </p:cNvSpPr>
+          <p:nvPr/>
+        </p:nvSpPr>
+        <p:spPr>
+          <a:xfrm>
+            <a:off x="275590" y="226695"/>
+            <a:ext cx="8522970" cy="583565"/>
+          </a:xfrm>
+          <a:prstGeom prst="rect">
+            <a:avLst/>
+          </a:prstGeom>
+          <a:noFill/>
+        </p:spPr>
+        <p:txBody>
+          <a:bodyPr wrap="square">
+            <a:spAutoFit/>
+          </a:bodyPr>
+          <a:lstStyle/>
+          <a:p>
+            <a:r>
+              <a:rPr sz="3200" b="1">
+                <a:latin typeface="Times New Roman" panose="02020603050405020304"/>
+                <a:ea typeface="Times New Roman" panose="02020603050405020304"/>
+                <a:cs typeface="Times New Roman" panose="02020603050405020304"/>
+                <a:sym typeface="+mn-ea"/>
+              </a:rPr>
+              <a:t>Data Collection</a:t>
+            </a:r>
+            <a:endParaRPr lang="zh-CN" altLang="en-US" sz="3200" b="1">
+              <a:latin typeface="Times New Roman" panose="02020603050405020304"/>
+              <a:ea typeface="宋体" panose="02010600030101010101" pitchFamily="2" charset="-122"/>
+              <a:cs typeface="Times New Roman" panose="02020603050405020304"/>
+            </a:endParaRPr>
+          </a:p>
+        </p:txBody>
+      </p:sp>
+      <p:sp>
+        <p:nvSpPr>
+          <p:cNvPr id="2" name="文本框 1"/>
+          <p:cNvSpPr txBox="1"/>
+          <p:nvPr/>
+        </p:nvSpPr>
+        <p:spPr>
+          <a:xfrm>
+            <a:off x="275590" y="2094230"/>
+            <a:ext cx="5217160" cy="2194560"/>
+          </a:xfrm>
+          <a:prstGeom prst="rect">
+            <a:avLst/>
+          </a:prstGeom>
+        </p:spPr>
+        <p:txBody>
+          <a:bodyPr wrap="square">
+            <a:spAutoFit/>
+          </a:bodyPr>
+          <a:p>
+            <a:pPr>
+              <a:lnSpc>
+                <a:spcPct val="190000"/>
+              </a:lnSpc>
+            </a:pPr>
+            <a:r>
+              <a:rPr lang="en-US" altLang="zh-CN">
+                <a:sym typeface="+mn-ea"/>
+              </a:rPr>
+              <a:t>Task: Natural reach-to-grasp movement</a:t>
+            </a:r>
+            <a:endParaRPr lang="en-US" altLang="zh-CN"/>
+          </a:p>
+          <a:p>
+            <a:pPr>
+              <a:lnSpc>
+                <a:spcPct val="190000"/>
+              </a:lnSpc>
+            </a:pPr>
+            <a:r>
+              <a:rPr lang="en-US" altLang="zh-CN"/>
+              <a:t>Initial hand position: table edge</a:t>
+            </a:r>
+            <a:endParaRPr lang="en-US" altLang="zh-CN"/>
+          </a:p>
+          <a:p>
+            <a:pPr>
+              <a:lnSpc>
+                <a:spcPct val="190000"/>
+              </a:lnSpc>
+            </a:pPr>
+            <a:r>
+              <a:rPr lang="en-US" altLang="zh-CN"/>
+              <a:t>Target position: 30 mm from the table edge</a:t>
+            </a:r>
+            <a:endParaRPr lang="en-US" altLang="zh-CN"/>
+          </a:p>
+          <a:p>
+            <a:pPr>
+              <a:lnSpc>
+                <a:spcPct val="190000"/>
+              </a:lnSpc>
+            </a:pPr>
+            <a:r>
+              <a:rPr lang="en-US" altLang="zh-CN"/>
+              <a:t>Target size: 20, 30, </a:t>
+            </a:r>
+            <a:r>
+              <a:rPr lang="en-US" altLang="zh-CN">
+                <a:sym typeface="+mn-ea"/>
+              </a:rPr>
+              <a:t>and </a:t>
+            </a:r>
+            <a:r>
+              <a:rPr lang="en-US" altLang="zh-CN"/>
+              <a:t>40 mm cubes</a:t>
+            </a:r>
+            <a:endParaRPr lang="en-US" altLang="zh-CN"/>
+          </a:p>
+        </p:txBody>
+      </p:sp>
+      <p:sp>
+        <p:nvSpPr>
+          <p:cNvPr id="28" name="Shape 25"/>
+          <p:cNvSpPr/>
+          <p:nvPr>
+            <p:custDataLst>
+              <p:tags r:id="rId1"/>
+            </p:custDataLst>
+          </p:nvPr>
+        </p:nvSpPr>
+        <p:spPr>
+          <a:xfrm>
+            <a:off x="275590" y="963930"/>
+            <a:ext cx="8522970" cy="388620"/>
+          </a:xfrm>
+          <a:prstGeom prst="rect">
+            <a:avLst/>
+          </a:prstGeom>
+          <a:solidFill>
+            <a:srgbClr val="F59E0B">
+              <a:alpha val="10000"/>
+            </a:srgbClr>
+          </a:solidFill>
+          <a:ln w="19050">
+            <a:solidFill>
+              <a:srgbClr val="F59E0B"/>
+            </a:solidFill>
+            <a:prstDash val="solid"/>
+          </a:ln>
+        </p:spPr>
+        <p:txBody>
+          <a:bodyPr/>
+          <a:p>
+            <a:pPr algn="ctr"/>
+            <a:r>
+              <a:rPr lang="en-US" altLang="zh-CN">
+                <a:sym typeface="+mn-ea"/>
+              </a:rPr>
+              <a:t>Collect grasping movement data from participants using cubes of different sizes.</a:t>
+            </a:r>
+            <a:endParaRPr lang="en-US" altLang="zh-CN">
+              <a:sym typeface="+mn-ea"/>
+            </a:endParaRPr>
+          </a:p>
+          <a:p>
+            <a:pPr algn="ctr"/>
+            <a:endParaRPr lang="en-US" altLang="zh-CN"/>
+          </a:p>
+        </p:txBody>
+      </p:sp>
+      <p:sp>
+        <p:nvSpPr>
+          <p:cNvPr id="93" name="Shape 26"/>
+          <p:cNvSpPr/>
+          <p:nvPr>
+            <p:custDataLst>
+              <p:tags r:id="rId2"/>
+            </p:custDataLst>
+          </p:nvPr>
+        </p:nvSpPr>
+        <p:spPr>
+          <a:xfrm>
+            <a:off x="275590" y="1724025"/>
+            <a:ext cx="3247390" cy="457200"/>
+          </a:xfrm>
+          <a:prstGeom prst="rect">
+            <a:avLst/>
+          </a:prstGeom>
+          <a:solidFill>
+            <a:srgbClr val="F59E0B"/>
+          </a:solidFill>
+          <a:ln w="19050">
+            <a:solidFill>
+              <a:srgbClr val="F59E0B"/>
+            </a:solidFill>
+            <a:prstDash val="solid"/>
+          </a:ln>
+        </p:spPr>
+        <p:txBody>
+          <a:bodyPr/>
+          <a:p>
+            <a:r>
+              <a:rPr lang="en-US" altLang="zh-CN" sz="2400">
+                <a:sym typeface="+mn-ea"/>
+              </a:rPr>
+              <a:t>Experimental Conditions</a:t>
+            </a:r>
+            <a:endParaRPr lang="zh-CN" altLang="en-US" sz="2400"/>
+          </a:p>
+        </p:txBody>
+      </p:sp>
+      <p:pic>
+        <p:nvPicPr>
+          <p:cNvPr id="4" name="10月20日 (1)(1)">
+            <a:hlinkClick r:id="" action="ppaction://media"/>
+            <a:hlinkHover r:id="" action="ppaction://media"/>
+          </p:cNvPr>
+          <p:cNvPicPr>
+            <a:picLocks noChangeAspect="1"/>
+          </p:cNvPicPr>
+          <p:nvPr>
+            <a:videoFile r:link="rId3"/>
+            <p:extLst>
+              <p:ext uri="{DAA4B4D4-6D71-4841-9C94-3DE7FCFB9230}">
+                <p14:media xmlns:p14="http://schemas.microsoft.com/office/powerpoint/2010/main" r:embed="rId4"/>
+              </p:ext>
+            </p:extLst>
+          </p:nvPr>
+        </p:nvPicPr>
+        <p:blipFill>
+          <a:blip r:embed="rId5"/>
+          <a:stretch>
+            <a:fillRect/>
+          </a:stretch>
+        </p:blipFill>
+        <p:spPr>
+          <a:xfrm>
+            <a:off x="5401945" y="1589405"/>
+            <a:ext cx="3467735" cy="5138420"/>
+          </a:xfrm>
+          <a:prstGeom prst="rect">
+            <a:avLst/>
+          </a:prstGeom>
+        </p:spPr>
+      </p:pic>
+    </p:spTree>
+  </p:cSld>
+  <p:clrMapOvr>
+    <a:masterClrMapping/>
+  </p:clrMapOvr>
+  <p:timing>
+    <p:tnLst>
+      <p:par>
+        <p:cTn id="1" dur="indefinite" restart="never" nodeType="tmRoot">
+          <p:childTnLst>
+            <p:video fullScrn="0">
+              <p:cMediaNode>
+                <p:cTn id="2" fill="hold" display="1">
+                  <p:stCondLst>
+                    <p:cond delay="indefinite"/>
+                  </p:stCondLst>
+                </p:cTn>
+                <p:tgtEl>
+                  <p:spTgt spid="4"/>
+                </p:tgtEl>
+              </p:cMediaNode>
+            </p:video>
+            <p:seq concurrent="1" nextAc="seek">
+              <p:cTn id="3" restart="whenNotActive" fill="hold" evtFilter="cancelBubble" nodeType="interactiveSeq">
+                <p:stCondLst>
+                  <p:cond evt="onClick" delay="0">
+                    <p:tgtEl>
+                      <p:spTgt spid="4"/>
+                    </p:tgtEl>
+                  </p:cond>
+                </p:stCondLst>
+                <p:endSync evt="end" delay="0">
+                  <p:rtn val="all"/>
+                </p:endSync>
+                <p:childTnLst>
+                  <p:par>
+                    <p:cTn id="4" fill="hold">
+                      <p:stCondLst>
+                        <p:cond delay="0"/>
+                      </p:stCondLst>
+                      <p:childTnLst>
+                        <p:par>
+                          <p:cTn id="5" fill="hold">
+                            <p:stCondLst>
+                              <p:cond delay="0"/>
+                            </p:stCondLst>
+                            <p:childTnLst>
+                              <p:par>
+                                <p:cTn id="6" presetID="2" presetClass="mediacall" presetSubtype="0" fill="hold" nodeType="clickEffect">
+                                  <p:stCondLst>
+                                    <p:cond delay="0"/>
+                                  </p:stCondLst>
+                                  <p:childTnLst>
+                                    <p:cmd type="call" cmd="togglePause">
+                                      <p:cBhvr additive="base">
+                                        <p:cTn id="7" dur="1" fill="hold"/>
+                                        <p:tgtEl>
+                                          <p:spTgt spid="4"/>
+                                        </p:tgtEl>
+                                      </p:cBhvr>
+                                    </p:cmd>
+                                  </p:childTnLst>
+                                </p:cTn>
+                              </p:par>
+                            </p:childTnLst>
+                          </p:cTn>
+                        </p:par>
+                      </p:childTnLst>
+                    </p:cTn>
+                  </p:par>
+                </p:childTnLst>
+              </p:cTn>
+              <p:nextCondLst>
+                <p:cond evt="onClick" delay="0">
+                  <p:tgtEl>
+                    <p:spTgt spid="4"/>
+                  </p:tgtEl>
+                </p:cond>
+              </p:nextCondLst>
+            </p:seq>
+          </p:childTnLst>
+        </p:cTn>
+      </p:par>
+    </p:tnLst>
+  </p:timing>
+</p:sld>
+</file>
+
+<file path=ppt/slides/slide9.xml><?xml version="1.0" encoding="utf-8"?>
+<p:sld xmlns:a="http://schemas.openxmlformats.org/drawingml/2006/main" xmlns:r="http://schemas.openxmlformats.org/officeDocument/2006/relationships" xmlns:p="http://schemas.openxmlformats.org/presentationml/2006/main">
+  <p:cSld>
+    <p:spTree>
+      <p:nvGrpSpPr>
+        <p:cNvPr id="1" name=""/>
+        <p:cNvGrpSpPr/>
+        <p:nvPr/>
+      </p:nvGrpSpPr>
+      <p:grpSpPr/>
+      <p:pic>
+        <p:nvPicPr>
+          <p:cNvPr id="2" name="图片 1" descr="C:/Users/Di/Desktop/crop45_normalized_overlay_horizontal.pngcrop45_normalized_overlay_horizontal"/>
+          <p:cNvPicPr>
+            <a:picLocks noChangeAspect="1"/>
+          </p:cNvPicPr>
+          <p:nvPr/>
+        </p:nvPicPr>
+        <p:blipFill>
+          <a:blip r:embed="rId1"/>
+          <a:srcRect/>
+          <a:stretch>
+            <a:fillRect/>
+          </a:stretch>
+        </p:blipFill>
+        <p:spPr>
+          <a:xfrm>
+            <a:off x="275590" y="1975485"/>
+            <a:ext cx="8522970" cy="2840990"/>
+          </a:xfrm>
+          <a:prstGeom prst="rect">
+            <a:avLst/>
+          </a:prstGeom>
+        </p:spPr>
+      </p:pic>
+      <p:sp>
+        <p:nvSpPr>
+          <p:cNvPr id="6" name="文本框 5"/>
+          <p:cNvSpPr>
+            <a:spLocks noGrp="1"/>
+          </p:cNvSpPr>
+          <p:nvPr/>
+        </p:nvSpPr>
+        <p:spPr>
+          <a:xfrm>
+            <a:off x="275590" y="226695"/>
+            <a:ext cx="8522970" cy="583565"/>
+          </a:xfrm>
+          <a:prstGeom prst="rect">
+            <a:avLst/>
+          </a:prstGeom>
+          <a:noFill/>
+        </p:spPr>
+        <p:txBody>
+          <a:bodyPr wrap="square">
+            <a:spAutoFit/>
+          </a:bodyPr>
+          <a:lstStyle/>
+          <a:p>
+            <a:r>
+              <a:rPr lang="en-US" altLang="zh-CN" sz="3200" b="1">
+                <a:latin typeface="Times New Roman" panose="02020603050405020304"/>
+                <a:ea typeface="Times New Roman" panose="02020603050405020304"/>
+                <a:cs typeface="Times New Roman" panose="02020603050405020304"/>
+              </a:rPr>
+              <a:t>Data Relationship Analysis</a:t>
+            </a:r>
+            <a:endParaRPr lang="en-US" altLang="zh-CN" sz="3200" b="1">
+              <a:latin typeface="Times New Roman" panose="02020603050405020304"/>
+              <a:ea typeface="Times New Roman" panose="02020603050405020304"/>
+              <a:cs typeface="Times New Roman" panose="02020603050405020304"/>
+            </a:endParaRPr>
+          </a:p>
+        </p:txBody>
+      </p:sp>
+      <p:sp>
+        <p:nvSpPr>
+          <p:cNvPr id="9" name="文本框 8"/>
+          <p:cNvSpPr txBox="1"/>
+          <p:nvPr/>
+        </p:nvSpPr>
+        <p:spPr>
+          <a:xfrm>
+            <a:off x="309245" y="712470"/>
+            <a:ext cx="8454390" cy="521970"/>
+          </a:xfrm>
+          <a:prstGeom prst="rect">
+            <a:avLst/>
+          </a:prstGeom>
+          <a:noFill/>
+        </p:spPr>
+        <p:txBody>
+          <a:bodyPr wrap="square" rtlCol="0">
+            <a:spAutoFit/>
+          </a:bodyPr>
+          <a:p>
+            <a:r>
+              <a:rPr lang="en-US" altLang="zh-CN" sz="2800" b="1">
+                <a:solidFill>
+                  <a:srgbClr val="C7051C"/>
+                </a:solidFill>
+              </a:rPr>
+              <a:t>30</a:t>
+            </a:r>
+            <a:r>
+              <a:rPr lang="en-US" altLang="zh-CN" sz="2000" b="1">
+                <a:solidFill>
+                  <a:srgbClr val="C7051C"/>
+                </a:solidFill>
+              </a:rPr>
+              <a:t> trial with a 20 mm cube</a:t>
+            </a:r>
+            <a:endParaRPr lang="en-US" altLang="zh-CN" sz="2000" b="1">
+              <a:solidFill>
+                <a:srgbClr val="C7051C"/>
+              </a:solidFill>
+            </a:endParaRPr>
+          </a:p>
+        </p:txBody>
+      </p:sp>
+      <p:sp>
+        <p:nvSpPr>
+          <p:cNvPr id="28" name="Shape 25"/>
+          <p:cNvSpPr/>
+          <p:nvPr>
+            <p:custDataLst>
+              <p:tags r:id="rId2"/>
+            </p:custDataLst>
+          </p:nvPr>
+        </p:nvSpPr>
+        <p:spPr>
+          <a:xfrm>
+            <a:off x="104140" y="5684520"/>
+            <a:ext cx="8870950" cy="763905"/>
+          </a:xfrm>
+          <a:prstGeom prst="rect">
+            <a:avLst/>
+          </a:prstGeom>
+          <a:solidFill>
+            <a:srgbClr val="F59E0B">
+              <a:alpha val="10000"/>
+            </a:srgbClr>
+          </a:solidFill>
+          <a:ln w="19050">
+            <a:solidFill>
+              <a:srgbClr val="F59E0B"/>
+            </a:solidFill>
+            <a:prstDash val="solid"/>
+          </a:ln>
+        </p:spPr>
+        <p:txBody>
+          <a:bodyPr/>
+          <a:p>
+            <a:pPr algn="ctr">
+              <a:lnSpc>
+                <a:spcPct val="110000"/>
+              </a:lnSpc>
+            </a:pPr>
+            <a:r>
+              <a:rPr lang="en-US" altLang="zh-CN">
+                <a:sym typeface="+mn-ea"/>
+              </a:rPr>
+              <a:t>The data showed high consistency across experiments, suggesting a consistent relationship </a:t>
+            </a:r>
+            <a:r>
+              <a:rPr lang="en-US" altLang="zh-CN">
+                <a:sym typeface="+mn-ea"/>
+              </a:rPr>
+              <a:t>between hand–object distance and fingertip aperture</a:t>
+            </a:r>
+            <a:r>
+              <a:rPr lang="en-US" altLang="zh-CN">
+                <a:sym typeface="+mn-ea"/>
+              </a:rPr>
+              <a:t> during reach-to-grasp movements.</a:t>
+            </a:r>
+            <a:endParaRPr lang="en-US" altLang="zh-CN"/>
+          </a:p>
+          <a:p>
+            <a:pPr algn="ctr"/>
+            <a:endParaRPr lang="en-US" altLang="zh-CN"/>
+          </a:p>
+        </p:txBody>
+      </p:sp>
+      <p:sp>
+        <p:nvSpPr>
+          <p:cNvPr id="3" name="文本框 2"/>
+          <p:cNvSpPr txBox="1"/>
+          <p:nvPr/>
+        </p:nvSpPr>
+        <p:spPr>
+          <a:xfrm>
+            <a:off x="275590" y="1430020"/>
+            <a:ext cx="4295775" cy="645160"/>
+          </a:xfrm>
+          <a:prstGeom prst="rect">
+            <a:avLst/>
+          </a:prstGeom>
+        </p:spPr>
+        <p:txBody>
+          <a:bodyPr wrap="square">
+            <a:spAutoFit/>
+          </a:bodyPr>
+          <a:p>
+            <a:pPr algn="ctr"/>
+            <a:r>
+              <a:rPr lang="en-US" altLang="zh-CN"/>
+              <a:t>Maximum Aperture Timing</a:t>
+            </a:r>
+            <a:endParaRPr lang="zh-CN" altLang="en-US"/>
+          </a:p>
+          <a:p>
+            <a:pPr algn="ctr"/>
+            <a:r>
+              <a:rPr lang="en-US" altLang="zh-CN">
+                <a:solidFill>
+                  <a:srgbClr val="9E4802"/>
+                </a:solidFill>
+              </a:rPr>
+              <a:t>44.32 ± 2.37%</a:t>
+            </a:r>
+            <a:endParaRPr lang="en-US" altLang="zh-CN">
+              <a:solidFill>
+                <a:srgbClr val="9E4802"/>
+              </a:solidFill>
+            </a:endParaRPr>
+          </a:p>
+        </p:txBody>
+      </p:sp>
+      <p:sp>
+        <p:nvSpPr>
+          <p:cNvPr id="17" name="文本框 16"/>
+          <p:cNvSpPr txBox="1"/>
+          <p:nvPr/>
+        </p:nvSpPr>
+        <p:spPr>
+          <a:xfrm>
+            <a:off x="4679315" y="1430020"/>
+            <a:ext cx="4295775" cy="645160"/>
+          </a:xfrm>
+          <a:prstGeom prst="rect">
+            <a:avLst/>
+          </a:prstGeom>
+        </p:spPr>
+        <p:txBody>
+          <a:bodyPr wrap="square">
+            <a:spAutoFit/>
+          </a:bodyPr>
+          <a:p>
+            <a:pPr algn="ctr"/>
+            <a:r>
+              <a:rPr lang="en-US" altLang="ja-JP">
+                <a:sym typeface="+mn-ea"/>
+              </a:rPr>
+              <a:t>Distance at Maximum Aperture (%)</a:t>
+            </a:r>
+            <a:endParaRPr lang="en-US" altLang="ja-JP">
+              <a:sym typeface="+mn-ea"/>
+            </a:endParaRPr>
+          </a:p>
+          <a:p>
+            <a:pPr algn="ctr"/>
+            <a:r>
+              <a:rPr lang="en-US" altLang="zh-CN">
+                <a:solidFill>
+                  <a:srgbClr val="9E4802"/>
+                </a:solidFill>
+                <a:sym typeface="+mn-ea"/>
+              </a:rPr>
+              <a:t>52.15 ± 6.70%</a:t>
+            </a:r>
+            <a:endParaRPr lang="en-US" altLang="zh-CN">
+              <a:solidFill>
+                <a:srgbClr val="9E4802"/>
+              </a:solidFill>
+              <a:sym typeface="+mn-ea"/>
+            </a:endParaRPr>
+          </a:p>
+        </p:txBody>
+      </p:sp>
+      <p:sp>
+        <p:nvSpPr>
+          <p:cNvPr id="5" name="文本框 4"/>
+          <p:cNvSpPr txBox="1"/>
+          <p:nvPr/>
+        </p:nvSpPr>
+        <p:spPr>
+          <a:xfrm>
+            <a:off x="383540" y="4728845"/>
+            <a:ext cx="4295775" cy="645160"/>
+          </a:xfrm>
+          <a:prstGeom prst="rect">
+            <a:avLst/>
+          </a:prstGeom>
+        </p:spPr>
+        <p:txBody>
+          <a:bodyPr wrap="square">
+            <a:spAutoFit/>
+          </a:bodyPr>
+          <a:p>
+            <a:pPr algn="ctr"/>
+            <a:r>
+              <a:rPr lang="en-US" altLang="zh-CN"/>
+              <a:t>Fingertip Aperture Nomalized RMSE</a:t>
+            </a:r>
+            <a:endParaRPr lang="en-US" altLang="zh-CN"/>
+          </a:p>
+          <a:p>
+            <a:pPr algn="ctr"/>
+            <a:r>
+              <a:rPr lang="en-US" altLang="zh-CN">
+                <a:solidFill>
+                  <a:srgbClr val="9E4802"/>
+                </a:solidFill>
+              </a:rPr>
+              <a:t>0.0530 ± 0.0186</a:t>
+            </a:r>
+            <a:endParaRPr lang="en-US" altLang="zh-CN">
+              <a:solidFill>
+                <a:srgbClr val="9E4802"/>
+              </a:solidFill>
+            </a:endParaRPr>
+          </a:p>
+        </p:txBody>
+      </p:sp>
+      <p:sp>
+        <p:nvSpPr>
+          <p:cNvPr id="7" name="文本框 6"/>
+          <p:cNvSpPr txBox="1"/>
+          <p:nvPr/>
+        </p:nvSpPr>
+        <p:spPr>
+          <a:xfrm>
+            <a:off x="4679315" y="4728845"/>
+            <a:ext cx="4295775" cy="645160"/>
+          </a:xfrm>
+          <a:prstGeom prst="rect">
+            <a:avLst/>
+          </a:prstGeom>
+        </p:spPr>
+        <p:txBody>
+          <a:bodyPr wrap="square">
+            <a:spAutoFit/>
+          </a:bodyPr>
+          <a:p>
+            <a:pPr algn="ctr"/>
+            <a:r>
+              <a:rPr lang="en-US" altLang="zh-CN"/>
+              <a:t>Hand–Object Distance Nomalized RMSE</a:t>
+            </a:r>
+            <a:endParaRPr lang="en-US" altLang="zh-CN"/>
+          </a:p>
+          <a:p>
+            <a:pPr algn="ctr"/>
+            <a:r>
+              <a:rPr lang="en-US" altLang="zh-CN">
+                <a:solidFill>
+                  <a:srgbClr val="9E4802"/>
+                </a:solidFill>
+              </a:rPr>
+              <a:t>0.0226 ± 0.0112</a:t>
+            </a:r>
+            <a:endParaRPr lang="en-US" altLang="zh-CN">
+              <a:solidFill>
+                <a:srgbClr val="9E4802"/>
+              </a:solidFill>
+            </a:endParaRPr>
+          </a:p>
+        </p:txBody>
+      </p:sp>
     </p:spTree>
   </p:cSld>
   <p:clrMapOvr>
